--- a/oauth-learn/export/presentations/oauth_complete_workshop_lessons_1_8.pptx
+++ b/oauth-learn/export/presentations/oauth_complete_workshop_lessons_1_8.pptx
@@ -4250,7 +4250,7 @@
         <p:spPr>
           <a:xfrm>
             <a:off x="640080" y="640080"/>
-            <a:ext cx="10972800" cy="777240"/>
+            <a:ext cx="10972800" cy="822960"/>
           </a:xfrm>
           <a:prstGeom prst="rect">
             <a:avLst/>
@@ -4266,7 +4266,7 @@
               <a:buNone/>
             </a:pPr>
             <a:r>
-              <a:rPr lang="en-US" sz="2600" b="1" dirty="0">
+              <a:rPr lang="en-US" sz="3000" b="1" dirty="0">
                 <a:solidFill>
                   <a:srgbClr val="1F3A5F"/>
                 </a:solidFill>
@@ -4276,7 +4276,7 @@
               </a:rPr>
               <a:t>Authorization Code, step by step</a:t>
             </a:r>
-            <a:endParaRPr lang="en-US" sz="2600" dirty="0"/>
+            <a:endParaRPr lang="en-US" sz="3000" dirty="0"/>
           </a:p>
         </p:txBody>
       </p:sp>
@@ -4442,7 +4442,7 @@
               <a:buNone/>
             </a:pPr>
             <a:r>
-              <a:rPr lang="en-US" sz="1500" dirty="0">
+              <a:rPr lang="en-US" sz="1600" dirty="0">
                 <a:solidFill>
                   <a:srgbClr val="1D2733"/>
                 </a:solidFill>
@@ -4452,7 +4452,7 @@
               </a:rPr>
               <a:t>Client redirects the browser to /authorize</a:t>
             </a:r>
-            <a:endParaRPr lang="en-US" sz="1500" dirty="0"/>
+            <a:endParaRPr lang="en-US" sz="1600" dirty="0"/>
           </a:p>
         </p:txBody>
       </p:sp>
@@ -4540,7 +4540,7 @@
               <a:buNone/>
             </a:pPr>
             <a:r>
-              <a:rPr lang="en-US" sz="1500" dirty="0">
+              <a:rPr lang="en-US" sz="1600" dirty="0">
                 <a:solidFill>
                   <a:srgbClr val="1D2733"/>
                 </a:solidFill>
@@ -4548,9 +4548,9 @@
                 <a:ea typeface="Arial" pitchFamily="34" charset="-122"/>
                 <a:cs typeface="Arial" pitchFamily="34" charset="-120"/>
               </a:rPr>
-              <a:t>User logs in and approves at the authorization server</a:t>
-            </a:r>
-            <a:endParaRPr lang="en-US" sz="1500" dirty="0"/>
+              <a:t>User logs in and approves</a:t>
+            </a:r>
+            <a:endParaRPr lang="en-US" sz="1600" dirty="0"/>
           </a:p>
         </p:txBody>
       </p:sp>
@@ -4638,7 +4638,7 @@
               <a:buNone/>
             </a:pPr>
             <a:r>
-              <a:rPr lang="en-US" sz="1500" dirty="0">
+              <a:rPr lang="en-US" sz="1600" dirty="0">
                 <a:solidFill>
                   <a:srgbClr val="1D2733"/>
                 </a:solidFill>
@@ -4646,9 +4646,9 @@
                 <a:ea typeface="Arial" pitchFamily="34" charset="-122"/>
                 <a:cs typeface="Arial" pitchFamily="34" charset="-120"/>
               </a:rPr>
-              <a:t>Server redirects back with a short-lived code + state</a:t>
-            </a:r>
-            <a:endParaRPr lang="en-US" sz="1500" dirty="0"/>
+              <a:t>Server redirects back with code + state</a:t>
+            </a:r>
+            <a:endParaRPr lang="en-US" sz="1600" dirty="0"/>
           </a:p>
         </p:txBody>
       </p:sp>
@@ -4736,7 +4736,7 @@
               <a:buNone/>
             </a:pPr>
             <a:r>
-              <a:rPr lang="en-US" sz="1500" dirty="0">
+              <a:rPr lang="en-US" sz="1600" dirty="0">
                 <a:solidFill>
                   <a:srgbClr val="1D2733"/>
                 </a:solidFill>
@@ -4746,7 +4746,7 @@
               </a:rPr>
               <a:t>Client posts the code to /token (back-channel)</a:t>
             </a:r>
-            <a:endParaRPr lang="en-US" sz="1500" dirty="0"/>
+            <a:endParaRPr lang="en-US" sz="1600" dirty="0"/>
           </a:p>
         </p:txBody>
       </p:sp>
@@ -4834,7 +4834,7 @@
               <a:buNone/>
             </a:pPr>
             <a:r>
-              <a:rPr lang="en-US" sz="1500" dirty="0">
+              <a:rPr lang="en-US" sz="1600" dirty="0">
                 <a:solidFill>
                   <a:srgbClr val="1D2733"/>
                 </a:solidFill>
@@ -4842,9 +4842,9 @@
                 <a:ea typeface="Arial" pitchFamily="34" charset="-122"/>
                 <a:cs typeface="Arial" pitchFamily="34" charset="-120"/>
               </a:rPr>
-              <a:t>Client receives the access token (+ refresh token)</a:t>
-            </a:r>
-            <a:endParaRPr lang="en-US" sz="1500" dirty="0"/>
+              <a:t>Client receives the access token (+ refresh)</a:t>
+            </a:r>
+            <a:endParaRPr lang="en-US" sz="1600" dirty="0"/>
           </a:p>
         </p:txBody>
       </p:sp>
@@ -4932,7 +4932,7 @@
               <a:buNone/>
             </a:pPr>
             <a:r>
-              <a:rPr lang="en-US" sz="1500" dirty="0">
+              <a:rPr lang="en-US" sz="1600" dirty="0">
                 <a:solidFill>
                   <a:srgbClr val="1D2733"/>
                 </a:solidFill>
@@ -4942,7 +4942,7 @@
               </a:rPr>
               <a:t>Client calls the API with the access token</a:t>
             </a:r>
-            <a:endParaRPr lang="en-US" sz="1500" dirty="0"/>
+            <a:endParaRPr lang="en-US" sz="1600" dirty="0"/>
           </a:p>
         </p:txBody>
       </p:sp>
@@ -5026,7 +5026,7 @@
         <p:spPr>
           <a:xfrm>
             <a:off x="640080" y="640080"/>
-            <a:ext cx="10972800" cy="777240"/>
+            <a:ext cx="10972800" cy="822960"/>
           </a:xfrm>
           <a:prstGeom prst="rect">
             <a:avLst/>
@@ -5042,7 +5042,7 @@
               <a:buNone/>
             </a:pPr>
             <a:r>
-              <a:rPr lang="en-US" sz="2600" b="1" dirty="0">
+              <a:rPr lang="en-US" sz="3000" b="1" dirty="0">
                 <a:solidFill>
                   <a:srgbClr val="1F3A5F"/>
                 </a:solidFill>
@@ -5052,7 +5052,7 @@
               </a:rPr>
               <a:t>Authorization request parameters</a:t>
             </a:r>
-            <a:endParaRPr lang="en-US" sz="2600" dirty="0"/>
+            <a:endParaRPr lang="en-US" sz="3000" dirty="0"/>
           </a:p>
         </p:txBody>
       </p:sp>
@@ -5149,7 +5149,7 @@
           </p:nvPr>
         </p:nvGraphicFramePr>
         <p:xfrm>
-          <a:off x="640080" y="1554480"/>
+          <a:off x="640080" y="1645920"/>
           <a:ext cx="10881360" cy="914400"/>
         </p:xfrm>
         <a:graphic>
@@ -5160,7 +5160,7 @@
                 <a:gridCol w="3931920"/>
                 <a:gridCol w="6949440"/>
               </a:tblGrid>
-              <a:tr h="420624">
+              <a:tr h="457200">
                 <a:tc>
                   <a:txBody>
                     <a:bodyPr/>
@@ -5170,7 +5170,7 @@
                         <a:buNone/>
                       </a:pPr>
                       <a:r>
-                        <a:rPr lang="en-US" sz="1250" b="1" dirty="0">
+                        <a:rPr lang="en-US" sz="1300" b="1" dirty="0">
                           <a:solidFill>
                             <a:srgbClr val="FFFFFF"/>
                           </a:solidFill>
@@ -5180,7 +5180,7 @@
                         </a:rPr>
                         <a:t>Parameter</a:t>
                       </a:r>
-                      <a:endParaRPr lang="en-US" sz="1250" dirty="0">
+                      <a:endParaRPr lang="en-US" sz="1300" dirty="0">
                         <a:latin typeface="Arial" charset="0"/>
                         <a:ea typeface="Arial" charset="0"/>
                         <a:cs typeface="Arial" charset="0"/>
@@ -5238,7 +5238,7 @@
                         <a:buNone/>
                       </a:pPr>
                       <a:r>
-                        <a:rPr lang="en-US" sz="1250" b="1" dirty="0">
+                        <a:rPr lang="en-US" sz="1300" b="1" dirty="0">
                           <a:solidFill>
                             <a:srgbClr val="FFFFFF"/>
                           </a:solidFill>
@@ -5248,7 +5248,7 @@
                         </a:rPr>
                         <a:t>Purpose</a:t>
                       </a:r>
-                      <a:endParaRPr lang="en-US" sz="1250" dirty="0">
+                      <a:endParaRPr lang="en-US" sz="1300" dirty="0">
                         <a:latin typeface="Arial" charset="0"/>
                         <a:ea typeface="Arial" charset="0"/>
                         <a:cs typeface="Arial" charset="0"/>
@@ -5298,7 +5298,7 @@
                   </a:tcPr>
                 </a:tc>
               </a:tr>
-              <a:tr h="420624">
+              <a:tr h="457200">
                 <a:tc>
                   <a:txBody>
                     <a:bodyPr/>
@@ -5308,7 +5308,7 @@
                         <a:buNone/>
                       </a:pPr>
                       <a:r>
-                        <a:rPr lang="en-US" sz="1200" dirty="0">
+                        <a:rPr lang="en-US" sz="1250" dirty="0">
                           <a:solidFill>
                             <a:srgbClr val="1D2733"/>
                           </a:solidFill>
@@ -5318,7 +5318,7 @@
                         </a:rPr>
                         <a:t>response_type=code</a:t>
                       </a:r>
-                      <a:endParaRPr lang="en-US" sz="1200" dirty="0">
+                      <a:endParaRPr lang="en-US" sz="1250" dirty="0">
                         <a:latin typeface="Arial" charset="0"/>
                         <a:ea typeface="Arial" charset="0"/>
                         <a:cs typeface="Arial" charset="0"/>
@@ -5376,7 +5376,7 @@
                         <a:buNone/>
                       </a:pPr>
                       <a:r>
-                        <a:rPr lang="en-US" sz="1200" dirty="0">
+                        <a:rPr lang="en-US" sz="1250" dirty="0">
                           <a:solidFill>
                             <a:srgbClr val="1D2733"/>
                           </a:solidFill>
@@ -5386,7 +5386,7 @@
                         </a:rPr>
                         <a:t>Ask for an authorization code</a:t>
                       </a:r>
-                      <a:endParaRPr lang="en-US" sz="1200" dirty="0">
+                      <a:endParaRPr lang="en-US" sz="1250" dirty="0">
                         <a:latin typeface="Arial" charset="0"/>
                         <a:ea typeface="Arial" charset="0"/>
                         <a:cs typeface="Arial" charset="0"/>
@@ -5436,7 +5436,7 @@
                   </a:tcPr>
                 </a:tc>
               </a:tr>
-              <a:tr h="420624">
+              <a:tr h="457200">
                 <a:tc>
                   <a:txBody>
                     <a:bodyPr/>
@@ -5446,7 +5446,7 @@
                         <a:buNone/>
                       </a:pPr>
                       <a:r>
-                        <a:rPr lang="en-US" sz="1200" dirty="0">
+                        <a:rPr lang="en-US" sz="1250" dirty="0">
                           <a:solidFill>
                             <a:srgbClr val="1D2733"/>
                           </a:solidFill>
@@ -5456,7 +5456,7 @@
                         </a:rPr>
                         <a:t>client_id</a:t>
                       </a:r>
-                      <a:endParaRPr lang="en-US" sz="1200" dirty="0">
+                      <a:endParaRPr lang="en-US" sz="1250" dirty="0">
                         <a:latin typeface="Arial" charset="0"/>
                         <a:ea typeface="Arial" charset="0"/>
                         <a:cs typeface="Arial" charset="0"/>
@@ -5514,7 +5514,7 @@
                         <a:buNone/>
                       </a:pPr>
                       <a:r>
-                        <a:rPr lang="en-US" sz="1200" dirty="0">
+                        <a:rPr lang="en-US" sz="1250" dirty="0">
                           <a:solidFill>
                             <a:srgbClr val="1D2733"/>
                           </a:solidFill>
@@ -5524,7 +5524,7 @@
                         </a:rPr>
                         <a:t>Identify the client</a:t>
                       </a:r>
-                      <a:endParaRPr lang="en-US" sz="1200" dirty="0">
+                      <a:endParaRPr lang="en-US" sz="1250" dirty="0">
                         <a:latin typeface="Arial" charset="0"/>
                         <a:ea typeface="Arial" charset="0"/>
                         <a:cs typeface="Arial" charset="0"/>
@@ -5574,7 +5574,7 @@
                   </a:tcPr>
                 </a:tc>
               </a:tr>
-              <a:tr h="420624">
+              <a:tr h="457200">
                 <a:tc>
                   <a:txBody>
                     <a:bodyPr/>
@@ -5584,7 +5584,7 @@
                         <a:buNone/>
                       </a:pPr>
                       <a:r>
-                        <a:rPr lang="en-US" sz="1200" dirty="0">
+                        <a:rPr lang="en-US" sz="1250" dirty="0">
                           <a:solidFill>
                             <a:srgbClr val="1D2733"/>
                           </a:solidFill>
@@ -5594,7 +5594,7 @@
                         </a:rPr>
                         <a:t>redirect_uri</a:t>
                       </a:r>
-                      <a:endParaRPr lang="en-US" sz="1200" dirty="0">
+                      <a:endParaRPr lang="en-US" sz="1250" dirty="0">
                         <a:latin typeface="Arial" charset="0"/>
                         <a:ea typeface="Arial" charset="0"/>
                         <a:cs typeface="Arial" charset="0"/>
@@ -5652,7 +5652,7 @@
                         <a:buNone/>
                       </a:pPr>
                       <a:r>
-                        <a:rPr lang="en-US" sz="1200" dirty="0">
+                        <a:rPr lang="en-US" sz="1250" dirty="0">
                           <a:solidFill>
                             <a:srgbClr val="1D2733"/>
                           </a:solidFill>
@@ -5660,9 +5660,9 @@
                           <a:ea typeface="Arial" pitchFamily="34" charset="-122"/>
                           <a:cs typeface="Arial" pitchFamily="34" charset="-120"/>
                         </a:rPr>
-                        <a:t>Where the browser returns (must match registration)</a:t>
+                        <a:t>Where the browser returns (must match)</a:t>
                       </a:r>
-                      <a:endParaRPr lang="en-US" sz="1200" dirty="0">
+                      <a:endParaRPr lang="en-US" sz="1250" dirty="0">
                         <a:latin typeface="Arial" charset="0"/>
                         <a:ea typeface="Arial" charset="0"/>
                         <a:cs typeface="Arial" charset="0"/>
@@ -5712,7 +5712,7 @@
                   </a:tcPr>
                 </a:tc>
               </a:tr>
-              <a:tr h="420624">
+              <a:tr h="457200">
                 <a:tc>
                   <a:txBody>
                     <a:bodyPr/>
@@ -5722,7 +5722,7 @@
                         <a:buNone/>
                       </a:pPr>
                       <a:r>
-                        <a:rPr lang="en-US" sz="1200" dirty="0">
+                        <a:rPr lang="en-US" sz="1250" dirty="0">
                           <a:solidFill>
                             <a:srgbClr val="1D2733"/>
                           </a:solidFill>
@@ -5732,7 +5732,7 @@
                         </a:rPr>
                         <a:t>scope</a:t>
                       </a:r>
-                      <a:endParaRPr lang="en-US" sz="1200" dirty="0">
+                      <a:endParaRPr lang="en-US" sz="1250" dirty="0">
                         <a:latin typeface="Arial" charset="0"/>
                         <a:ea typeface="Arial" charset="0"/>
                         <a:cs typeface="Arial" charset="0"/>
@@ -5790,7 +5790,7 @@
                         <a:buNone/>
                       </a:pPr>
                       <a:r>
-                        <a:rPr lang="en-US" sz="1200" dirty="0">
+                        <a:rPr lang="en-US" sz="1250" dirty="0">
                           <a:solidFill>
                             <a:srgbClr val="1D2733"/>
                           </a:solidFill>
@@ -5800,7 +5800,7 @@
                         </a:rPr>
                         <a:t>Permissions requested</a:t>
                       </a:r>
-                      <a:endParaRPr lang="en-US" sz="1200" dirty="0">
+                      <a:endParaRPr lang="en-US" sz="1250" dirty="0">
                         <a:latin typeface="Arial" charset="0"/>
                         <a:ea typeface="Arial" charset="0"/>
                         <a:cs typeface="Arial" charset="0"/>
@@ -5850,7 +5850,7 @@
                   </a:tcPr>
                 </a:tc>
               </a:tr>
-              <a:tr h="420624">
+              <a:tr h="457200">
                 <a:tc>
                   <a:txBody>
                     <a:bodyPr/>
@@ -5860,7 +5860,7 @@
                         <a:buNone/>
                       </a:pPr>
                       <a:r>
-                        <a:rPr lang="en-US" sz="1200" dirty="0">
+                        <a:rPr lang="en-US" sz="1250" dirty="0">
                           <a:solidFill>
                             <a:srgbClr val="1D2733"/>
                           </a:solidFill>
@@ -5870,7 +5870,7 @@
                         </a:rPr>
                         <a:t>state</a:t>
                       </a:r>
-                      <a:endParaRPr lang="en-US" sz="1200" dirty="0">
+                      <a:endParaRPr lang="en-US" sz="1250" dirty="0">
                         <a:latin typeface="Arial" charset="0"/>
                         <a:ea typeface="Arial" charset="0"/>
                         <a:cs typeface="Arial" charset="0"/>
@@ -5928,7 +5928,7 @@
                         <a:buNone/>
                       </a:pPr>
                       <a:r>
-                        <a:rPr lang="en-US" sz="1200" dirty="0">
+                        <a:rPr lang="en-US" sz="1250" dirty="0">
                           <a:solidFill>
                             <a:srgbClr val="1D2733"/>
                           </a:solidFill>
@@ -5936,9 +5936,9 @@
                           <a:ea typeface="Arial" pitchFamily="34" charset="-122"/>
                           <a:cs typeface="Arial" pitchFamily="34" charset="-120"/>
                         </a:rPr>
-                        <a:t>Bind the callback to a request the client started (CSRF)</a:t>
+                        <a:t>Bind the callback to this client (CSRF)</a:t>
                       </a:r>
-                      <a:endParaRPr lang="en-US" sz="1200" dirty="0">
+                      <a:endParaRPr lang="en-US" sz="1250" dirty="0">
                         <a:latin typeface="Arial" charset="0"/>
                         <a:ea typeface="Arial" charset="0"/>
                         <a:cs typeface="Arial" charset="0"/>
@@ -5988,7 +5988,7 @@
                   </a:tcPr>
                 </a:tc>
               </a:tr>
-              <a:tr h="420624">
+              <a:tr h="457200">
                 <a:tc>
                   <a:txBody>
                     <a:bodyPr/>
@@ -5998,7 +5998,7 @@
                         <a:buNone/>
                       </a:pPr>
                       <a:r>
-                        <a:rPr lang="en-US" sz="1200" dirty="0">
+                        <a:rPr lang="en-US" sz="1250" dirty="0">
                           <a:solidFill>
                             <a:srgbClr val="1D2733"/>
                           </a:solidFill>
@@ -6006,9 +6006,9 @@
                           <a:ea typeface="Arial" pitchFamily="34" charset="-122"/>
                           <a:cs typeface="Arial" pitchFamily="34" charset="-120"/>
                         </a:rPr>
-                        <a:t>code_challenge (+ _method=S256)</a:t>
+                        <a:t>code_challenge (S256)</a:t>
                       </a:r>
-                      <a:endParaRPr lang="en-US" sz="1200" dirty="0">
+                      <a:endParaRPr lang="en-US" sz="1250" dirty="0">
                         <a:latin typeface="Arial" charset="0"/>
                         <a:ea typeface="Arial" charset="0"/>
                         <a:cs typeface="Arial" charset="0"/>
@@ -6066,7 +6066,7 @@
                         <a:buNone/>
                       </a:pPr>
                       <a:r>
-                        <a:rPr lang="en-US" sz="1200" dirty="0">
+                        <a:rPr lang="en-US" sz="1250" dirty="0">
                           <a:solidFill>
                             <a:srgbClr val="1D2733"/>
                           </a:solidFill>
@@ -6074,9 +6074,9 @@
                           <a:ea typeface="Arial" pitchFamily="34" charset="-122"/>
                           <a:cs typeface="Arial" pitchFamily="34" charset="-120"/>
                         </a:rPr>
-                        <a:t>PKCE challenge for the code exchange</a:t>
+                        <a:t>PKCE hash for the code exchange</a:t>
                       </a:r>
-                      <a:endParaRPr lang="en-US" sz="1200" dirty="0">
+                      <a:endParaRPr lang="en-US" sz="1250" dirty="0">
                         <a:latin typeface="Arial" charset="0"/>
                         <a:ea typeface="Arial" charset="0"/>
                         <a:cs typeface="Arial" charset="0"/>
@@ -6210,7 +6210,7 @@
         <p:spPr>
           <a:xfrm>
             <a:off x="640080" y="640080"/>
-            <a:ext cx="10972800" cy="777240"/>
+            <a:ext cx="10972800" cy="822960"/>
           </a:xfrm>
           <a:prstGeom prst="rect">
             <a:avLst/>
@@ -6226,7 +6226,7 @@
               <a:buNone/>
             </a:pPr>
             <a:r>
-              <a:rPr lang="en-US" sz="2600" b="1" dirty="0">
+              <a:rPr lang="en-US" sz="3000" b="1" dirty="0">
                 <a:solidFill>
                   <a:srgbClr val="1F3A5F"/>
                 </a:solidFill>
@@ -6236,7 +6236,7 @@
               </a:rPr>
               <a:t>A stolen code should not be enough</a:t>
             </a:r>
-            <a:endParaRPr lang="en-US" sz="2600" dirty="0"/>
+            <a:endParaRPr lang="en-US" sz="3000" dirty="0"/>
           </a:p>
         </p:txBody>
       </p:sp>
@@ -6326,12 +6326,12 @@
         </p:nvSpPr>
         <p:spPr>
           <a:xfrm>
-            <a:off x="640080" y="1554480"/>
-            <a:ext cx="5349240" cy="3108960"/>
+            <a:off x="640080" y="1645920"/>
+            <a:ext cx="5349240" cy="2834640"/>
           </a:xfrm>
           <a:prstGeom prst="roundRect">
             <a:avLst>
-              <a:gd name="adj" fmla="val 1765"/>
+              <a:gd name="adj" fmla="val 1935"/>
             </a:avLst>
           </a:prstGeom>
           <a:solidFill>
@@ -6360,8 +6360,8 @@
         </p:nvSpPr>
         <p:spPr>
           <a:xfrm>
-            <a:off x="822960" y="1700784"/>
-            <a:ext cx="4983480" cy="310896"/>
+            <a:off x="841248" y="1810512"/>
+            <a:ext cx="4946904" cy="347472"/>
           </a:xfrm>
           <a:prstGeom prst="rect">
             <a:avLst/>
@@ -6377,7 +6377,7 @@
               <a:buNone/>
             </a:pPr>
             <a:r>
-              <a:rPr lang="en-US" sz="1400" b="1" dirty="0">
+              <a:rPr lang="en-US" sz="1600" b="1" dirty="0">
                 <a:solidFill>
                   <a:srgbClr val="C0492F"/>
                 </a:solidFill>
@@ -6387,7 +6387,7 @@
               </a:rPr>
               <a:t>Without PKCE</a:t>
             </a:r>
-            <a:endParaRPr lang="en-US" sz="1400" dirty="0"/>
+            <a:endParaRPr lang="en-US" sz="1600" dirty="0"/>
           </a:p>
         </p:txBody>
       </p:sp>
@@ -6399,8 +6399,8 @@
         </p:nvSpPr>
         <p:spPr>
           <a:xfrm>
-            <a:off x="822960" y="2121408"/>
-            <a:ext cx="4983480" cy="2432304"/>
+            <a:off x="841248" y="2286000"/>
+            <a:ext cx="4946904" cy="2066544"/>
           </a:xfrm>
           <a:prstGeom prst="rect">
             <a:avLst/>
@@ -6412,15 +6412,15 @@
           <a:bodyPr wrap="square" lIns="0" tIns="0" rIns="0" bIns="0" rtlCol="0" anchor="t"/>
           <a:lstStyle/>
           <a:p>
-            <a:pPr marL="177800" indent="-177800">
+            <a:pPr marL="203200" indent="-203200">
               <a:spcAft>
-                <a:spcPts val="400"/>
+                <a:spcPts val="800"/>
               </a:spcAft>
               <a:buSzPct val="100000"/>
               <a:buChar char="•"/>
             </a:pPr>
             <a:r>
-              <a:rPr lang="en-US" sz="1300" dirty="0">
+              <a:rPr lang="en-US" sz="1450" dirty="0">
                 <a:solidFill>
                   <a:srgbClr val="1D2733"/>
                 </a:solidFill>
@@ -6428,20 +6428,20 @@
                 <a:ea typeface="Arial" pitchFamily="34" charset="-122"/>
                 <a:cs typeface="Arial" pitchFamily="34" charset="-120"/>
               </a:rPr>
-              <a:t>Attacker intercepts the authorization code</a:t>
-            </a:r>
-            <a:endParaRPr lang="en-US" sz="1300" dirty="0"/>
-          </a:p>
-          <a:p>
-            <a:pPr marL="177800" indent="-177800">
+              <a:t>Attacker intercepts the code</a:t>
+            </a:r>
+            <a:endParaRPr lang="en-US" sz="1450" dirty="0"/>
+          </a:p>
+          <a:p>
+            <a:pPr marL="203200" indent="-203200">
               <a:spcAft>
-                <a:spcPts val="400"/>
+                <a:spcPts val="800"/>
               </a:spcAft>
               <a:buSzPct val="100000"/>
               <a:buChar char="•"/>
             </a:pPr>
             <a:r>
-              <a:rPr lang="en-US" sz="1300" dirty="0">
+              <a:rPr lang="en-US" sz="1450" dirty="0">
                 <a:solidFill>
                   <a:srgbClr val="1D2733"/>
                 </a:solidFill>
@@ -6451,18 +6451,18 @@
               </a:rPr>
               <a:t>Sends it to /token</a:t>
             </a:r>
-            <a:endParaRPr lang="en-US" sz="1300" dirty="0"/>
-          </a:p>
-          <a:p>
-            <a:pPr marL="177800" indent="-177800">
+            <a:endParaRPr lang="en-US" sz="1450" dirty="0"/>
+          </a:p>
+          <a:p>
+            <a:pPr marL="203200" indent="-203200">
               <a:spcAft>
-                <a:spcPts val="400"/>
+                <a:spcPts val="800"/>
               </a:spcAft>
               <a:buSzPct val="100000"/>
               <a:buChar char="•"/>
             </a:pPr>
             <a:r>
-              <a:rPr lang="en-US" sz="1300" dirty="0">
+              <a:rPr lang="en-US" sz="1450" dirty="0">
                 <a:solidFill>
                   <a:srgbClr val="1D2733"/>
                 </a:solidFill>
@@ -6470,9 +6470,9 @@
                 <a:ea typeface="Arial" pitchFamily="34" charset="-122"/>
                 <a:cs typeface="Arial" pitchFamily="34" charset="-120"/>
               </a:rPr>
-              <a:t>If the client is public, may get tokens</a:t>
-            </a:r>
-            <a:endParaRPr lang="en-US" sz="1300" dirty="0"/>
+              <a:t>Public client → may get tokens</a:t>
+            </a:r>
+            <a:endParaRPr lang="en-US" sz="1450" dirty="0"/>
           </a:p>
         </p:txBody>
       </p:sp>
@@ -6484,12 +6484,12 @@
         </p:nvSpPr>
         <p:spPr>
           <a:xfrm>
-            <a:off x="6309360" y="1554480"/>
-            <a:ext cx="5349240" cy="3108960"/>
+            <a:off x="6309360" y="1645920"/>
+            <a:ext cx="5349240" cy="2834640"/>
           </a:xfrm>
           <a:prstGeom prst="roundRect">
             <a:avLst>
-              <a:gd name="adj" fmla="val 1765"/>
+              <a:gd name="adj" fmla="val 1935"/>
             </a:avLst>
           </a:prstGeom>
           <a:solidFill>
@@ -6518,8 +6518,8 @@
         </p:nvSpPr>
         <p:spPr>
           <a:xfrm>
-            <a:off x="6492240" y="1700784"/>
-            <a:ext cx="4983480" cy="310896"/>
+            <a:off x="6510528" y="1810512"/>
+            <a:ext cx="4946904" cy="347472"/>
           </a:xfrm>
           <a:prstGeom prst="rect">
             <a:avLst/>
@@ -6535,7 +6535,7 @@
               <a:buNone/>
             </a:pPr>
             <a:r>
-              <a:rPr lang="en-US" sz="1400" b="1" dirty="0">
+              <a:rPr lang="en-US" sz="1600" b="1" dirty="0">
                 <a:solidFill>
                   <a:srgbClr val="0F8A7E"/>
                 </a:solidFill>
@@ -6545,7 +6545,7 @@
               </a:rPr>
               <a:t>With PKCE</a:t>
             </a:r>
-            <a:endParaRPr lang="en-US" sz="1400" dirty="0"/>
+            <a:endParaRPr lang="en-US" sz="1600" dirty="0"/>
           </a:p>
         </p:txBody>
       </p:sp>
@@ -6557,8 +6557,8 @@
         </p:nvSpPr>
         <p:spPr>
           <a:xfrm>
-            <a:off x="6492240" y="2121408"/>
-            <a:ext cx="4983480" cy="2432304"/>
+            <a:off x="6510528" y="2286000"/>
+            <a:ext cx="4946904" cy="2066544"/>
           </a:xfrm>
           <a:prstGeom prst="rect">
             <a:avLst/>
@@ -6570,15 +6570,15 @@
           <a:bodyPr wrap="square" lIns="0" tIns="0" rIns="0" bIns="0" rtlCol="0" anchor="t"/>
           <a:lstStyle/>
           <a:p>
-            <a:pPr marL="177800" indent="-177800">
+            <a:pPr marL="203200" indent="-203200">
               <a:spcAft>
-                <a:spcPts val="400"/>
+                <a:spcPts val="800"/>
               </a:spcAft>
               <a:buSzPct val="100000"/>
               <a:buChar char="•"/>
             </a:pPr>
             <a:r>
-              <a:rPr lang="en-US" sz="1300" dirty="0">
+              <a:rPr lang="en-US" sz="1450" dirty="0">
                 <a:solidFill>
                   <a:srgbClr val="1D2733"/>
                 </a:solidFill>
@@ -6586,20 +6586,20 @@
                 <a:ea typeface="Arial" pitchFamily="34" charset="-122"/>
                 <a:cs typeface="Arial" pitchFamily="34" charset="-120"/>
               </a:rPr>
-              <a:t>Client first sends code_challenge (a hash)</a:t>
-            </a:r>
-            <a:endParaRPr lang="en-US" sz="1300" dirty="0"/>
-          </a:p>
-          <a:p>
-            <a:pPr marL="177800" indent="-177800">
+              <a:t>Client sends code_challenge (a hash)</a:t>
+            </a:r>
+            <a:endParaRPr lang="en-US" sz="1450" dirty="0"/>
+          </a:p>
+          <a:p>
+            <a:pPr marL="203200" indent="-203200">
               <a:spcAft>
-                <a:spcPts val="400"/>
+                <a:spcPts val="800"/>
               </a:spcAft>
               <a:buSzPct val="100000"/>
               <a:buChar char="•"/>
             </a:pPr>
             <a:r>
-              <a:rPr lang="en-US" sz="1300" dirty="0">
+              <a:rPr lang="en-US" sz="1450" dirty="0">
                 <a:solidFill>
                   <a:srgbClr val="1D2733"/>
                 </a:solidFill>
@@ -6607,20 +6607,20 @@
                 <a:ea typeface="Arial" pitchFamily="34" charset="-122"/>
                 <a:cs typeface="Arial" pitchFamily="34" charset="-120"/>
               </a:rPr>
-              <a:t>Later proves it with the code_verifier at /token</a:t>
-            </a:r>
-            <a:endParaRPr lang="en-US" sz="1300" dirty="0"/>
-          </a:p>
-          <a:p>
-            <a:pPr marL="177800" indent="-177800">
+              <a:t>Proves it with code_verifier at /token</a:t>
+            </a:r>
+            <a:endParaRPr lang="en-US" sz="1450" dirty="0"/>
+          </a:p>
+          <a:p>
+            <a:pPr marL="203200" indent="-203200">
               <a:spcAft>
-                <a:spcPts val="400"/>
+                <a:spcPts val="800"/>
               </a:spcAft>
               <a:buSzPct val="100000"/>
               <a:buChar char="•"/>
             </a:pPr>
             <a:r>
-              <a:rPr lang="en-US" sz="1300" dirty="0">
+              <a:rPr lang="en-US" sz="1450" dirty="0">
                 <a:solidFill>
                   <a:srgbClr val="1D2733"/>
                 </a:solidFill>
@@ -6628,9 +6628,9 @@
                 <a:ea typeface="Arial" pitchFamily="34" charset="-122"/>
                 <a:cs typeface="Arial" pitchFamily="34" charset="-120"/>
               </a:rPr>
-              <a:t>Attacker has the code but not the verifier → fails</a:t>
-            </a:r>
-            <a:endParaRPr lang="en-US" sz="1300" dirty="0"/>
+              <a:t>No verifier → attack fails</a:t>
+            </a:r>
+            <a:endParaRPr lang="en-US" sz="1450" dirty="0"/>
           </a:p>
         </p:txBody>
       </p:sp>
@@ -6642,7 +6642,7 @@
         </p:nvSpPr>
         <p:spPr>
           <a:xfrm>
-            <a:off x="640080" y="4800600"/>
+            <a:off x="640080" y="4709160"/>
             <a:ext cx="10881360" cy="822960"/>
           </a:xfrm>
           <a:prstGeom prst="roundRect">
@@ -6676,7 +6676,7 @@
         </p:nvSpPr>
         <p:spPr>
           <a:xfrm>
-            <a:off x="841248" y="4946904"/>
+            <a:off x="841248" y="4855464"/>
             <a:ext cx="10479024" cy="548640"/>
           </a:xfrm>
           <a:prstGeom prst="rect">
@@ -6691,12 +6691,12 @@
           <a:p>
             <a:pPr indent="0" marL="0">
               <a:lnSpc>
-                <a:spcPct val="106000"/>
+                <a:spcPct val="110000"/>
               </a:lnSpc>
               <a:buNone/>
             </a:pPr>
             <a:r>
-              <a:rPr lang="en-US" sz="1150" dirty="0">
+              <a:rPr lang="en-US" sz="1250" dirty="0">
                 <a:solidFill>
                   <a:srgbClr val="1D2733"/>
                 </a:solidFill>
@@ -6706,7 +6706,7 @@
               </a:rPr>
               <a:t>code_challenge = BASE64URL( SHA256(code_verifier) )      // S256, one-way</a:t>
             </a:r>
-            <a:endParaRPr lang="en-US" sz="1150" dirty="0"/>
+            <a:endParaRPr lang="en-US" sz="1250" dirty="0"/>
           </a:p>
         </p:txBody>
       </p:sp>
@@ -6790,7 +6790,7 @@
         <p:spPr>
           <a:xfrm>
             <a:off x="640080" y="640080"/>
-            <a:ext cx="10972800" cy="777240"/>
+            <a:ext cx="10972800" cy="822960"/>
           </a:xfrm>
           <a:prstGeom prst="rect">
             <a:avLst/>
@@ -6806,7 +6806,7 @@
               <a:buNone/>
             </a:pPr>
             <a:r>
-              <a:rPr lang="en-US" sz="2600" b="1" dirty="0">
+              <a:rPr lang="en-US" sz="3000" b="1" dirty="0">
                 <a:solidFill>
                   <a:srgbClr val="1F3A5F"/>
                 </a:solidFill>
@@ -6816,7 +6816,7 @@
               </a:rPr>
               <a:t>state vs redirect_uri vs PKCE</a:t>
             </a:r>
-            <a:endParaRPr lang="en-US" sz="2600" dirty="0"/>
+            <a:endParaRPr lang="en-US" sz="3000" dirty="0"/>
           </a:p>
         </p:txBody>
       </p:sp>
@@ -6925,7 +6925,7 @@
                 <a:gridCol w="3291840"/>
                 <a:gridCol w="4480560"/>
               </a:tblGrid>
-              <a:tr h="502920">
+              <a:tr h="548640">
                 <a:tc>
                   <a:txBody>
                     <a:bodyPr/>
@@ -6935,7 +6935,7 @@
                         <a:buNone/>
                       </a:pPr>
                       <a:r>
-                        <a:rPr lang="en-US" sz="1250" b="1" dirty="0">
+                        <a:rPr lang="en-US" sz="1300" b="1" dirty="0">
                           <a:solidFill>
                             <a:srgbClr val="FFFFFF"/>
                           </a:solidFill>
@@ -6945,7 +6945,7 @@
                         </a:rPr>
                         <a:t>Check</a:t>
                       </a:r>
-                      <a:endParaRPr lang="en-US" sz="1250" dirty="0">
+                      <a:endParaRPr lang="en-US" sz="1300" dirty="0">
                         <a:latin typeface="Arial" charset="0"/>
                         <a:ea typeface="Arial" charset="0"/>
                         <a:cs typeface="Arial" charset="0"/>
@@ -7003,7 +7003,7 @@
                         <a:buNone/>
                       </a:pPr>
                       <a:r>
-                        <a:rPr lang="en-US" sz="1250" b="1" dirty="0">
+                        <a:rPr lang="en-US" sz="1300" b="1" dirty="0">
                           <a:solidFill>
                             <a:srgbClr val="FFFFFF"/>
                           </a:solidFill>
@@ -7013,7 +7013,7 @@
                         </a:rPr>
                         <a:t>Checked by</a:t>
                       </a:r>
-                      <a:endParaRPr lang="en-US" sz="1250" dirty="0">
+                      <a:endParaRPr lang="en-US" sz="1300" dirty="0">
                         <a:latin typeface="Arial" charset="0"/>
                         <a:ea typeface="Arial" charset="0"/>
                         <a:cs typeface="Arial" charset="0"/>
@@ -7071,7 +7071,7 @@
                         <a:buNone/>
                       </a:pPr>
                       <a:r>
-                        <a:rPr lang="en-US" sz="1250" b="1" dirty="0">
+                        <a:rPr lang="en-US" sz="1300" b="1" dirty="0">
                           <a:solidFill>
                             <a:srgbClr val="FFFFFF"/>
                           </a:solidFill>
@@ -7079,9 +7079,9 @@
                           <a:ea typeface="Arial" pitchFamily="34" charset="-122"/>
                           <a:cs typeface="Arial" pitchFamily="34" charset="-120"/>
                         </a:rPr>
-                        <a:t>Protects</a:t>
+                        <a:t>Protects against</a:t>
                       </a:r>
-                      <a:endParaRPr lang="en-US" sz="1250" dirty="0">
+                      <a:endParaRPr lang="en-US" sz="1300" dirty="0">
                         <a:latin typeface="Arial" charset="0"/>
                         <a:ea typeface="Arial" charset="0"/>
                         <a:cs typeface="Arial" charset="0"/>
@@ -7131,7 +7131,7 @@
                   </a:tcPr>
                 </a:tc>
               </a:tr>
-              <a:tr h="502920">
+              <a:tr h="548640">
                 <a:tc>
                   <a:txBody>
                     <a:bodyPr/>
@@ -7141,7 +7141,7 @@
                         <a:buNone/>
                       </a:pPr>
                       <a:r>
-                        <a:rPr lang="en-US" sz="1200" dirty="0">
+                        <a:rPr lang="en-US" sz="1250" dirty="0">
                           <a:solidFill>
                             <a:srgbClr val="1D2733"/>
                           </a:solidFill>
@@ -7151,7 +7151,7 @@
                         </a:rPr>
                         <a:t>state</a:t>
                       </a:r>
-                      <a:endParaRPr lang="en-US" sz="1200" dirty="0">
+                      <a:endParaRPr lang="en-US" sz="1250" dirty="0">
                         <a:latin typeface="Arial" charset="0"/>
                         <a:ea typeface="Arial" charset="0"/>
                         <a:cs typeface="Arial" charset="0"/>
@@ -7209,7 +7209,7 @@
                         <a:buNone/>
                       </a:pPr>
                       <a:r>
-                        <a:rPr lang="en-US" sz="1200" dirty="0">
+                        <a:rPr lang="en-US" sz="1250" dirty="0">
                           <a:solidFill>
                             <a:srgbClr val="1D2733"/>
                           </a:solidFill>
@@ -7219,7 +7219,7 @@
                         </a:rPr>
                         <a:t>Client</a:t>
                       </a:r>
-                      <a:endParaRPr lang="en-US" sz="1200" dirty="0">
+                      <a:endParaRPr lang="en-US" sz="1250" dirty="0">
                         <a:latin typeface="Arial" charset="0"/>
                         <a:ea typeface="Arial" charset="0"/>
                         <a:cs typeface="Arial" charset="0"/>
@@ -7277,7 +7277,7 @@
                         <a:buNone/>
                       </a:pPr>
                       <a:r>
-                        <a:rPr lang="en-US" sz="1200" dirty="0">
+                        <a:rPr lang="en-US" sz="1250" dirty="0">
                           <a:solidFill>
                             <a:srgbClr val="1D2733"/>
                           </a:solidFill>
@@ -7285,9 +7285,9 @@
                           <a:ea typeface="Arial" pitchFamily="34" charset="-122"/>
                           <a:cs typeface="Arial" pitchFamily="34" charset="-120"/>
                         </a:rPr>
-                        <a:t>Callbacks the client did not start (CSRF)</a:t>
+                        <a:t>Callbacks the client didn't start (CSRF)</a:t>
                       </a:r>
-                      <a:endParaRPr lang="en-US" sz="1200" dirty="0">
+                      <a:endParaRPr lang="en-US" sz="1250" dirty="0">
                         <a:latin typeface="Arial" charset="0"/>
                         <a:ea typeface="Arial" charset="0"/>
                         <a:cs typeface="Arial" charset="0"/>
@@ -7337,7 +7337,7 @@
                   </a:tcPr>
                 </a:tc>
               </a:tr>
-              <a:tr h="502920">
+              <a:tr h="548640">
                 <a:tc>
                   <a:txBody>
                     <a:bodyPr/>
@@ -7347,7 +7347,7 @@
                         <a:buNone/>
                       </a:pPr>
                       <a:r>
-                        <a:rPr lang="en-US" sz="1200" dirty="0">
+                        <a:rPr lang="en-US" sz="1250" dirty="0">
                           <a:solidFill>
                             <a:srgbClr val="1D2733"/>
                           </a:solidFill>
@@ -7357,7 +7357,7 @@
                         </a:rPr>
                         <a:t>redirect_uri</a:t>
                       </a:r>
-                      <a:endParaRPr lang="en-US" sz="1200" dirty="0">
+                      <a:endParaRPr lang="en-US" sz="1250" dirty="0">
                         <a:latin typeface="Arial" charset="0"/>
                         <a:ea typeface="Arial" charset="0"/>
                         <a:cs typeface="Arial" charset="0"/>
@@ -7415,7 +7415,7 @@
                         <a:buNone/>
                       </a:pPr>
                       <a:r>
-                        <a:rPr lang="en-US" sz="1200" dirty="0">
+                        <a:rPr lang="en-US" sz="1250" dirty="0">
                           <a:solidFill>
                             <a:srgbClr val="1D2733"/>
                           </a:solidFill>
@@ -7425,7 +7425,7 @@
                         </a:rPr>
                         <a:t>Authorization server</a:t>
                       </a:r>
-                      <a:endParaRPr lang="en-US" sz="1200" dirty="0">
+                      <a:endParaRPr lang="en-US" sz="1250" dirty="0">
                         <a:latin typeface="Arial" charset="0"/>
                         <a:ea typeface="Arial" charset="0"/>
                         <a:cs typeface="Arial" charset="0"/>
@@ -7483,7 +7483,7 @@
                         <a:buNone/>
                       </a:pPr>
                       <a:r>
-                        <a:rPr lang="en-US" sz="1200" dirty="0">
+                        <a:rPr lang="en-US" sz="1250" dirty="0">
                           <a:solidFill>
                             <a:srgbClr val="1D2733"/>
                           </a:solidFill>
@@ -7491,9 +7491,9 @@
                           <a:ea typeface="Arial" pitchFamily="34" charset="-122"/>
                           <a:cs typeface="Arial" pitchFamily="34" charset="-120"/>
                         </a:rPr>
-                        <a:t>Binds the code to the original request target</a:t>
+                        <a:t>Binds the code to the original target</a:t>
                       </a:r>
-                      <a:endParaRPr lang="en-US" sz="1200" dirty="0">
+                      <a:endParaRPr lang="en-US" sz="1250" dirty="0">
                         <a:latin typeface="Arial" charset="0"/>
                         <a:ea typeface="Arial" charset="0"/>
                         <a:cs typeface="Arial" charset="0"/>
@@ -7543,7 +7543,7 @@
                   </a:tcPr>
                 </a:tc>
               </a:tr>
-              <a:tr h="502920">
+              <a:tr h="548640">
                 <a:tc>
                   <a:txBody>
                     <a:bodyPr/>
@@ -7553,7 +7553,7 @@
                         <a:buNone/>
                       </a:pPr>
                       <a:r>
-                        <a:rPr lang="en-US" sz="1200" dirty="0">
+                        <a:rPr lang="en-US" sz="1250" dirty="0">
                           <a:solidFill>
                             <a:srgbClr val="1D2733"/>
                           </a:solidFill>
@@ -7561,9 +7561,9 @@
                           <a:ea typeface="Arial" pitchFamily="34" charset="-122"/>
                           <a:cs typeface="Arial" pitchFamily="34" charset="-120"/>
                         </a:rPr>
-                        <a:t>code_verifier / challenge</a:t>
+                        <a:t>code_verifier</a:t>
                       </a:r>
-                      <a:endParaRPr lang="en-US" sz="1200" dirty="0">
+                      <a:endParaRPr lang="en-US" sz="1250" dirty="0">
                         <a:latin typeface="Arial" charset="0"/>
                         <a:ea typeface="Arial" charset="0"/>
                         <a:cs typeface="Arial" charset="0"/>
@@ -7621,7 +7621,7 @@
                         <a:buNone/>
                       </a:pPr>
                       <a:r>
-                        <a:rPr lang="en-US" sz="1200" dirty="0">
+                        <a:rPr lang="en-US" sz="1250" dirty="0">
                           <a:solidFill>
                             <a:srgbClr val="1D2733"/>
                           </a:solidFill>
@@ -7631,7 +7631,7 @@
                         </a:rPr>
                         <a:t>Token endpoint</a:t>
                       </a:r>
-                      <a:endParaRPr lang="en-US" sz="1200" dirty="0">
+                      <a:endParaRPr lang="en-US" sz="1250" dirty="0">
                         <a:latin typeface="Arial" charset="0"/>
                         <a:ea typeface="Arial" charset="0"/>
                         <a:cs typeface="Arial" charset="0"/>
@@ -7689,7 +7689,7 @@
                         <a:buNone/>
                       </a:pPr>
                       <a:r>
-                        <a:rPr lang="en-US" sz="1200" dirty="0">
+                        <a:rPr lang="en-US" sz="1250" dirty="0">
                           <a:solidFill>
                             <a:srgbClr val="1D2733"/>
                           </a:solidFill>
@@ -7697,9 +7697,9 @@
                           <a:ea typeface="Arial" pitchFamily="34" charset="-122"/>
                           <a:cs typeface="Arial" pitchFamily="34" charset="-120"/>
                         </a:rPr>
-                        <a:t>Proves the redeemer knows the original secret</a:t>
+                        <a:t>Proves the redeemer started the flow</a:t>
                       </a:r>
-                      <a:endParaRPr lang="en-US" sz="1200" dirty="0">
+                      <a:endParaRPr lang="en-US" sz="1250" dirty="0">
                         <a:latin typeface="Arial" charset="0"/>
                         <a:ea typeface="Arial" charset="0"/>
                         <a:cs typeface="Arial" charset="0"/>
@@ -7761,8 +7761,8 @@
         </p:nvSpPr>
         <p:spPr>
           <a:xfrm>
-            <a:off x="640080" y="3657600"/>
-            <a:ext cx="10972800" cy="365760"/>
+            <a:off x="640080" y="3749040"/>
+            <a:ext cx="10972800" cy="457200"/>
           </a:xfrm>
           <a:prstGeom prst="rect">
             <a:avLst/>
@@ -7778,7 +7778,7 @@
               <a:buNone/>
             </a:pPr>
             <a:r>
-              <a:rPr lang="en-US" sz="1400" b="1" dirty="0">
+              <a:rPr lang="en-US" sz="1600" b="1" dirty="0">
                 <a:solidFill>
                   <a:srgbClr val="1F3A5F"/>
                 </a:solidFill>
@@ -7786,9 +7786,9 @@
                 <a:ea typeface="Arial" pitchFamily="34" charset="-122"/>
                 <a:cs typeface="Arial" pitchFamily="34" charset="-120"/>
               </a:rPr>
-              <a:t>They solve different problems — a modern browser flow uses all three.</a:t>
-            </a:r>
-            <a:endParaRPr lang="en-US" sz="1400" dirty="0"/>
+              <a:t>Different problems — a modern browser flow uses all three.</a:t>
+            </a:r>
+            <a:endParaRPr lang="en-US" sz="1600" dirty="0"/>
           </a:p>
         </p:txBody>
       </p:sp>
@@ -8060,7 +8060,7 @@
         <p:spPr>
           <a:xfrm>
             <a:off x="640080" y="640080"/>
-            <a:ext cx="10972800" cy="777240"/>
+            <a:ext cx="10972800" cy="822960"/>
           </a:xfrm>
           <a:prstGeom prst="rect">
             <a:avLst/>
@@ -8076,7 +8076,7 @@
               <a:buNone/>
             </a:pPr>
             <a:r>
-              <a:rPr lang="en-US" sz="2600" b="1" dirty="0">
+              <a:rPr lang="en-US" sz="3000" b="1" dirty="0">
                 <a:solidFill>
                   <a:srgbClr val="1F3A5F"/>
                 </a:solidFill>
@@ -8086,7 +8086,7 @@
               </a:rPr>
               <a:t>Three more flows, three problems</a:t>
             </a:r>
-            <a:endParaRPr lang="en-US" sz="2600" dirty="0"/>
+            <a:endParaRPr lang="en-US" sz="3000" dirty="0"/>
           </a:p>
         </p:txBody>
       </p:sp>
@@ -8176,7 +8176,7 @@
         </p:nvSpPr>
         <p:spPr>
           <a:xfrm>
-            <a:off x="640080" y="1554480"/>
+            <a:off x="640080" y="1645920"/>
             <a:ext cx="10881360" cy="1097280"/>
           </a:xfrm>
           <a:prstGeom prst="roundRect">
@@ -8210,8 +8210,8 @@
         </p:nvSpPr>
         <p:spPr>
           <a:xfrm>
-            <a:off x="822960" y="1700784"/>
-            <a:ext cx="10515600" cy="310896"/>
+            <a:off x="841248" y="1810512"/>
+            <a:ext cx="10479024" cy="347472"/>
           </a:xfrm>
           <a:prstGeom prst="rect">
             <a:avLst/>
@@ -8227,7 +8227,7 @@
               <a:buNone/>
             </a:pPr>
             <a:r>
-              <a:rPr lang="en-US" sz="1400" b="1" dirty="0">
+              <a:rPr lang="en-US" sz="1600" b="1" dirty="0">
                 <a:solidFill>
                   <a:srgbClr val="1F3A5F"/>
                 </a:solidFill>
@@ -8237,7 +8237,7 @@
               </a:rPr>
               <a:t>Client Credentials</a:t>
             </a:r>
-            <a:endParaRPr lang="en-US" sz="1400" dirty="0"/>
+            <a:endParaRPr lang="en-US" sz="1600" dirty="0"/>
           </a:p>
         </p:txBody>
       </p:sp>
@@ -8249,8 +8249,8 @@
         </p:nvSpPr>
         <p:spPr>
           <a:xfrm>
-            <a:off x="822960" y="2121408"/>
-            <a:ext cx="10515600" cy="420624"/>
+            <a:off x="841248" y="2286000"/>
+            <a:ext cx="10479024" cy="329184"/>
           </a:xfrm>
           <a:prstGeom prst="rect">
             <a:avLst/>
@@ -8264,12 +8264,12 @@
           <a:p>
             <a:pPr indent="0" marL="0">
               <a:spcAft>
-                <a:spcPts val="400"/>
+                <a:spcPts val="800"/>
               </a:spcAft>
               <a:buNone/>
             </a:pPr>
             <a:r>
-              <a:rPr lang="en-US" sz="1300" dirty="0">
+              <a:rPr lang="en-US" sz="1450" dirty="0">
                 <a:solidFill>
                   <a:srgbClr val="1D2733"/>
                 </a:solidFill>
@@ -8277,9 +8277,9 @@
                 <a:ea typeface="Arial" pitchFamily="34" charset="-122"/>
                 <a:cs typeface="Arial" pitchFamily="34" charset="-120"/>
               </a:rPr>
-              <a:t>Machine-to-machine — no user, no browser, no consent. Token represents the service.</a:t>
-            </a:r>
-            <a:endParaRPr lang="en-US" sz="1300" dirty="0"/>
+              <a:t>Machine-to-machine. No user, no browser. The token represents the service.</a:t>
+            </a:r>
+            <a:endParaRPr lang="en-US" sz="1450" dirty="0"/>
           </a:p>
         </p:txBody>
       </p:sp>
@@ -8291,7 +8291,7 @@
         </p:nvSpPr>
         <p:spPr>
           <a:xfrm>
-            <a:off x="640080" y="2788920"/>
+            <a:off x="640080" y="2880360"/>
             <a:ext cx="10881360" cy="1097280"/>
           </a:xfrm>
           <a:prstGeom prst="roundRect">
@@ -8325,8 +8325,8 @@
         </p:nvSpPr>
         <p:spPr>
           <a:xfrm>
-            <a:off x="822960" y="2935224"/>
-            <a:ext cx="10515600" cy="310896"/>
+            <a:off x="841248" y="3044952"/>
+            <a:ext cx="10479024" cy="347472"/>
           </a:xfrm>
           <a:prstGeom prst="rect">
             <a:avLst/>
@@ -8342,7 +8342,7 @@
               <a:buNone/>
             </a:pPr>
             <a:r>
-              <a:rPr lang="en-US" sz="1400" b="1" dirty="0">
+              <a:rPr lang="en-US" sz="1600" b="1" dirty="0">
                 <a:solidFill>
                   <a:srgbClr val="1F3A5F"/>
                 </a:solidFill>
@@ -8352,7 +8352,7 @@
               </a:rPr>
               <a:t>Refresh Token</a:t>
             </a:r>
-            <a:endParaRPr lang="en-US" sz="1400" dirty="0"/>
+            <a:endParaRPr lang="en-US" sz="1600" dirty="0"/>
           </a:p>
         </p:txBody>
       </p:sp>
@@ -8364,8 +8364,8 @@
         </p:nvSpPr>
         <p:spPr>
           <a:xfrm>
-            <a:off x="822960" y="3355848"/>
-            <a:ext cx="10515600" cy="420624"/>
+            <a:off x="841248" y="3520440"/>
+            <a:ext cx="10479024" cy="329184"/>
           </a:xfrm>
           <a:prstGeom prst="rect">
             <a:avLst/>
@@ -8379,12 +8379,12 @@
           <a:p>
             <a:pPr indent="0" marL="0">
               <a:spcAft>
-                <a:spcPts val="400"/>
+                <a:spcPts val="800"/>
               </a:spcAft>
               <a:buNone/>
             </a:pPr>
             <a:r>
-              <a:rPr lang="en-US" sz="1300" dirty="0">
+              <a:rPr lang="en-US" sz="1450" dirty="0">
                 <a:solidFill>
                   <a:srgbClr val="1D2733"/>
                 </a:solidFill>
@@ -8394,7 +8394,7 @@
               </a:rPr>
               <a:t>Renew a short-lived access token without sending the user through the flow again.</a:t>
             </a:r>
-            <a:endParaRPr lang="en-US" sz="1300" dirty="0"/>
+            <a:endParaRPr lang="en-US" sz="1450" dirty="0"/>
           </a:p>
         </p:txBody>
       </p:sp>
@@ -8406,7 +8406,7 @@
         </p:nvSpPr>
         <p:spPr>
           <a:xfrm>
-            <a:off x="640080" y="4023360"/>
+            <a:off x="640080" y="4114800"/>
             <a:ext cx="10881360" cy="1097280"/>
           </a:xfrm>
           <a:prstGeom prst="roundRect">
@@ -8440,8 +8440,8 @@
         </p:nvSpPr>
         <p:spPr>
           <a:xfrm>
-            <a:off x="822960" y="4169664"/>
-            <a:ext cx="10515600" cy="310896"/>
+            <a:off x="841248" y="4279392"/>
+            <a:ext cx="10479024" cy="347472"/>
           </a:xfrm>
           <a:prstGeom prst="rect">
             <a:avLst/>
@@ -8457,7 +8457,7 @@
               <a:buNone/>
             </a:pPr>
             <a:r>
-              <a:rPr lang="en-US" sz="1400" b="1" dirty="0">
+              <a:rPr lang="en-US" sz="1600" b="1" dirty="0">
                 <a:solidFill>
                   <a:srgbClr val="1F3A5F"/>
                 </a:solidFill>
@@ -8467,7 +8467,7 @@
               </a:rPr>
               <a:t>Device Authorization</a:t>
             </a:r>
-            <a:endParaRPr lang="en-US" sz="1400" dirty="0"/>
+            <a:endParaRPr lang="en-US" sz="1600" dirty="0"/>
           </a:p>
         </p:txBody>
       </p:sp>
@@ -8479,8 +8479,8 @@
         </p:nvSpPr>
         <p:spPr>
           <a:xfrm>
-            <a:off x="822960" y="4590288"/>
-            <a:ext cx="10515600" cy="420624"/>
+            <a:off x="841248" y="4754880"/>
+            <a:ext cx="10479024" cy="329184"/>
           </a:xfrm>
           <a:prstGeom prst="rect">
             <a:avLst/>
@@ -8494,12 +8494,12 @@
           <a:p>
             <a:pPr indent="0" marL="0">
               <a:spcAft>
-                <a:spcPts val="400"/>
+                <a:spcPts val="800"/>
               </a:spcAft>
               <a:buNone/>
             </a:pPr>
             <a:r>
-              <a:rPr lang="en-US" sz="1300" dirty="0">
+              <a:rPr lang="en-US" sz="1450" dirty="0">
                 <a:solidFill>
                   <a:srgbClr val="1D2733"/>
                 </a:solidFill>
@@ -8507,9 +8507,9 @@
                 <a:ea typeface="Arial" pitchFamily="34" charset="-122"/>
                 <a:cs typeface="Arial" pitchFamily="34" charset="-120"/>
               </a:rPr>
-              <a:t>Limited-input devices (CLI, TV): user approves on a second device while the client polls.</a:t>
-            </a:r>
-            <a:endParaRPr lang="en-US" sz="1300" dirty="0"/>
+              <a:t>CLI / TV: the user approves on a second device while the client polls.</a:t>
+            </a:r>
+            <a:endParaRPr lang="en-US" sz="1450" dirty="0"/>
           </a:p>
         </p:txBody>
       </p:sp>
@@ -8593,7 +8593,7 @@
         <p:spPr>
           <a:xfrm>
             <a:off x="640080" y="640080"/>
-            <a:ext cx="10972800" cy="777240"/>
+            <a:ext cx="10972800" cy="822960"/>
           </a:xfrm>
           <a:prstGeom prst="rect">
             <a:avLst/>
@@ -8609,7 +8609,7 @@
               <a:buNone/>
             </a:pPr>
             <a:r>
-              <a:rPr lang="en-US" sz="2600" b="1" dirty="0">
+              <a:rPr lang="en-US" sz="3000" b="1" dirty="0">
                 <a:solidFill>
                   <a:srgbClr val="1F3A5F"/>
                 </a:solidFill>
@@ -8619,7 +8619,7 @@
               </a:rPr>
               <a:t>Rotation makes reuse detectable</a:t>
             </a:r>
-            <a:endParaRPr lang="en-US" sz="2600" dirty="0"/>
+            <a:endParaRPr lang="en-US" sz="3000" dirty="0"/>
           </a:p>
         </p:txBody>
       </p:sp>
@@ -8716,7 +8716,7 @@
           </p:nvPr>
         </p:nvGraphicFramePr>
         <p:xfrm>
-          <a:off x="640080" y="1554480"/>
+          <a:off x="640080" y="1645920"/>
           <a:ext cx="10881360" cy="914400"/>
         </p:xfrm>
         <a:graphic>
@@ -8727,7 +8727,7 @@
                 <a:gridCol w="2194560"/>
                 <a:gridCol w="8686800"/>
               </a:tblGrid>
-              <a:tr h="457200">
+              <a:tr h="502920">
                 <a:tc>
                   <a:txBody>
                     <a:bodyPr/>
@@ -8737,7 +8737,7 @@
                         <a:buNone/>
                       </a:pPr>
                       <a:r>
-                        <a:rPr lang="en-US" sz="1250" b="1" dirty="0">
+                        <a:rPr lang="en-US" sz="1300" b="1" dirty="0">
                           <a:solidFill>
                             <a:srgbClr val="FFFFFF"/>
                           </a:solidFill>
@@ -8747,7 +8747,7 @@
                         </a:rPr>
                         <a:t>Step</a:t>
                       </a:r>
-                      <a:endParaRPr lang="en-US" sz="1250" dirty="0">
+                      <a:endParaRPr lang="en-US" sz="1300" dirty="0">
                         <a:latin typeface="Arial" charset="0"/>
                         <a:ea typeface="Arial" charset="0"/>
                         <a:cs typeface="Arial" charset="0"/>
@@ -8805,7 +8805,7 @@
                         <a:buNone/>
                       </a:pPr>
                       <a:r>
-                        <a:rPr lang="en-US" sz="1250" b="1" dirty="0">
+                        <a:rPr lang="en-US" sz="1300" b="1" dirty="0">
                           <a:solidFill>
                             <a:srgbClr val="FFFFFF"/>
                           </a:solidFill>
@@ -8815,7 +8815,7 @@
                         </a:rPr>
                         <a:t>What happens</a:t>
                       </a:r>
-                      <a:endParaRPr lang="en-US" sz="1250" dirty="0">
+                      <a:endParaRPr lang="en-US" sz="1300" dirty="0">
                         <a:latin typeface="Arial" charset="0"/>
                         <a:ea typeface="Arial" charset="0"/>
                         <a:cs typeface="Arial" charset="0"/>
@@ -8865,7 +8865,7 @@
                   </a:tcPr>
                 </a:tc>
               </a:tr>
-              <a:tr h="457200">
+              <a:tr h="502920">
                 <a:tc>
                   <a:txBody>
                     <a:bodyPr/>
@@ -8875,7 +8875,7 @@
                         <a:buNone/>
                       </a:pPr>
                       <a:r>
-                        <a:rPr lang="en-US" sz="1200" dirty="0">
+                        <a:rPr lang="en-US" sz="1250" dirty="0">
                           <a:solidFill>
                             <a:srgbClr val="1D2733"/>
                           </a:solidFill>
@@ -8885,7 +8885,7 @@
                         </a:rPr>
                         <a:t>Issue</a:t>
                       </a:r>
-                      <a:endParaRPr lang="en-US" sz="1200" dirty="0">
+                      <a:endParaRPr lang="en-US" sz="1250" dirty="0">
                         <a:latin typeface="Arial" charset="0"/>
                         <a:ea typeface="Arial" charset="0"/>
                         <a:cs typeface="Arial" charset="0"/>
@@ -8943,7 +8943,7 @@
                         <a:buNone/>
                       </a:pPr>
                       <a:r>
-                        <a:rPr lang="en-US" sz="1200" dirty="0">
+                        <a:rPr lang="en-US" sz="1250" dirty="0">
                           <a:solidFill>
                             <a:srgbClr val="1D2733"/>
                           </a:solidFill>
@@ -8953,7 +8953,7 @@
                         </a:rPr>
                         <a:t>Client gets access token AT1 + refresh token RT1</a:t>
                       </a:r>
-                      <a:endParaRPr lang="en-US" sz="1200" dirty="0">
+                      <a:endParaRPr lang="en-US" sz="1250" dirty="0">
                         <a:latin typeface="Arial" charset="0"/>
                         <a:ea typeface="Arial" charset="0"/>
                         <a:cs typeface="Arial" charset="0"/>
@@ -9003,7 +9003,7 @@
                   </a:tcPr>
                 </a:tc>
               </a:tr>
-              <a:tr h="457200">
+              <a:tr h="502920">
                 <a:tc>
                   <a:txBody>
                     <a:bodyPr/>
@@ -9013,7 +9013,7 @@
                         <a:buNone/>
                       </a:pPr>
                       <a:r>
-                        <a:rPr lang="en-US" sz="1200" dirty="0">
+                        <a:rPr lang="en-US" sz="1250" dirty="0">
                           <a:solidFill>
                             <a:srgbClr val="1D2733"/>
                           </a:solidFill>
@@ -9023,7 +9023,7 @@
                         </a:rPr>
                         <a:t>Refresh</a:t>
                       </a:r>
-                      <a:endParaRPr lang="en-US" sz="1200" dirty="0">
+                      <a:endParaRPr lang="en-US" sz="1250" dirty="0">
                         <a:latin typeface="Arial" charset="0"/>
                         <a:ea typeface="Arial" charset="0"/>
                         <a:cs typeface="Arial" charset="0"/>
@@ -9081,7 +9081,7 @@
                         <a:buNone/>
                       </a:pPr>
                       <a:r>
-                        <a:rPr lang="en-US" sz="1200" dirty="0">
+                        <a:rPr lang="en-US" sz="1250" dirty="0">
                           <a:solidFill>
                             <a:srgbClr val="1D2733"/>
                           </a:solidFill>
@@ -9091,7 +9091,7 @@
                         </a:rPr>
                         <a:t>AT1 expires; client sends RT1 to /token</a:t>
                       </a:r>
-                      <a:endParaRPr lang="en-US" sz="1200" dirty="0">
+                      <a:endParaRPr lang="en-US" sz="1250" dirty="0">
                         <a:latin typeface="Arial" charset="0"/>
                         <a:ea typeface="Arial" charset="0"/>
                         <a:cs typeface="Arial" charset="0"/>
@@ -9141,7 +9141,7 @@
                   </a:tcPr>
                 </a:tc>
               </a:tr>
-              <a:tr h="457200">
+              <a:tr h="502920">
                 <a:tc>
                   <a:txBody>
                     <a:bodyPr/>
@@ -9151,7 +9151,7 @@
                         <a:buNone/>
                       </a:pPr>
                       <a:r>
-                        <a:rPr lang="en-US" sz="1200" dirty="0">
+                        <a:rPr lang="en-US" sz="1250" dirty="0">
                           <a:solidFill>
                             <a:srgbClr val="1D2733"/>
                           </a:solidFill>
@@ -9161,7 +9161,7 @@
                         </a:rPr>
                         <a:t>Rotate</a:t>
                       </a:r>
-                      <a:endParaRPr lang="en-US" sz="1200" dirty="0">
+                      <a:endParaRPr lang="en-US" sz="1250" dirty="0">
                         <a:latin typeface="Arial" charset="0"/>
                         <a:ea typeface="Arial" charset="0"/>
                         <a:cs typeface="Arial" charset="0"/>
@@ -9219,7 +9219,7 @@
                         <a:buNone/>
                       </a:pPr>
                       <a:r>
-                        <a:rPr lang="en-US" sz="1200" dirty="0">
+                        <a:rPr lang="en-US" sz="1250" dirty="0">
                           <a:solidFill>
                             <a:srgbClr val="1D2733"/>
                           </a:solidFill>
@@ -9229,7 +9229,7 @@
                         </a:rPr>
                         <a:t>Server returns AT2 + RT2, marks RT1 used</a:t>
                       </a:r>
-                      <a:endParaRPr lang="en-US" sz="1200" dirty="0">
+                      <a:endParaRPr lang="en-US" sz="1250" dirty="0">
                         <a:latin typeface="Arial" charset="0"/>
                         <a:ea typeface="Arial" charset="0"/>
                         <a:cs typeface="Arial" charset="0"/>
@@ -9279,7 +9279,7 @@
                   </a:tcPr>
                 </a:tc>
               </a:tr>
-              <a:tr h="457200">
+              <a:tr h="502920">
                 <a:tc>
                   <a:txBody>
                     <a:bodyPr/>
@@ -9289,7 +9289,7 @@
                         <a:buNone/>
                       </a:pPr>
                       <a:r>
-                        <a:rPr lang="en-US" sz="1200" dirty="0">
+                        <a:rPr lang="en-US" sz="1250" dirty="0">
                           <a:solidFill>
                             <a:srgbClr val="1D2733"/>
                           </a:solidFill>
@@ -9299,7 +9299,7 @@
                         </a:rPr>
                         <a:t>Reuse seen</a:t>
                       </a:r>
-                      <a:endParaRPr lang="en-US" sz="1200" dirty="0">
+                      <a:endParaRPr lang="en-US" sz="1250" dirty="0">
                         <a:latin typeface="Arial" charset="0"/>
                         <a:ea typeface="Arial" charset="0"/>
                         <a:cs typeface="Arial" charset="0"/>
@@ -9357,7 +9357,7 @@
                         <a:buNone/>
                       </a:pPr>
                       <a:r>
-                        <a:rPr lang="en-US" sz="1200" dirty="0">
+                        <a:rPr lang="en-US" sz="1250" dirty="0">
                           <a:solidFill>
                             <a:srgbClr val="1D2733"/>
                           </a:solidFill>
@@ -9365,9 +9365,9 @@
                           <a:ea typeface="Arial" pitchFamily="34" charset="-122"/>
                           <a:cs typeface="Arial" pitchFamily="34" charset="-120"/>
                         </a:rPr>
-                        <a:t>If RT1 appears again → treat as theft, revoke the family</a:t>
+                        <a:t>RT1 appears again → theft; revoke the family</a:t>
                       </a:r>
-                      <a:endParaRPr lang="en-US" sz="1200" dirty="0">
+                      <a:endParaRPr lang="en-US" sz="1250" dirty="0">
                         <a:latin typeface="Arial" charset="0"/>
                         <a:ea typeface="Arial" charset="0"/>
                         <a:cs typeface="Arial" charset="0"/>
@@ -9446,7 +9446,7 @@
               <a:buNone/>
             </a:pPr>
             <a:r>
-              <a:rPr lang="en-US" sz="1400" b="1" dirty="0">
+              <a:rPr lang="en-US" sz="1600" b="1" dirty="0">
                 <a:solidFill>
                   <a:srgbClr val="1F3A5F"/>
                 </a:solidFill>
@@ -9454,9 +9454,9 @@
                 <a:ea typeface="Arial" pitchFamily="34" charset="-122"/>
                 <a:cs typeface="Arial" pitchFamily="34" charset="-120"/>
               </a:rPr>
-              <a:t>An access token opens the door once; a refresh token can keep making new keys — store it well.</a:t>
-            </a:r>
-            <a:endParaRPr lang="en-US" sz="1400" dirty="0"/>
+              <a:t>An access token opens the door once; a refresh token keeps making keys.</a:t>
+            </a:r>
+            <a:endParaRPr lang="en-US" sz="1600" dirty="0"/>
           </a:p>
         </p:txBody>
       </p:sp>
@@ -9540,7 +9540,7 @@
         <p:spPr>
           <a:xfrm>
             <a:off x="640080" y="640080"/>
-            <a:ext cx="10972800" cy="777240"/>
+            <a:ext cx="10972800" cy="822960"/>
           </a:xfrm>
           <a:prstGeom prst="rect">
             <a:avLst/>
@@ -9556,7 +9556,7 @@
               <a:buNone/>
             </a:pPr>
             <a:r>
-              <a:rPr lang="en-US" sz="2600" b="1" dirty="0">
+              <a:rPr lang="en-US" sz="3000" b="1" dirty="0">
                 <a:solidFill>
                   <a:srgbClr val="1F3A5F"/>
                 </a:solidFill>
@@ -9566,7 +9566,7 @@
               </a:rPr>
               <a:t>Choose the flow</a:t>
             </a:r>
-            <a:endParaRPr lang="en-US" sz="2600" dirty="0"/>
+            <a:endParaRPr lang="en-US" sz="3000" dirty="0"/>
           </a:p>
         </p:txBody>
       </p:sp>
@@ -9663,7 +9663,7 @@
           </p:nvPr>
         </p:nvGraphicFramePr>
         <p:xfrm>
-          <a:off x="640080" y="1554480"/>
+          <a:off x="640080" y="1645920"/>
           <a:ext cx="10881360" cy="914400"/>
         </p:xfrm>
         <a:graphic>
@@ -9677,7 +9677,7 @@
                 <a:gridCol w="3657600"/>
                 <a:gridCol w="1828800"/>
               </a:tblGrid>
-              <a:tr h="420624">
+              <a:tr h="457200">
                 <a:tc>
                   <a:txBody>
                     <a:bodyPr/>
@@ -9687,7 +9687,7 @@
                         <a:buNone/>
                       </a:pPr>
                       <a:r>
-                        <a:rPr lang="en-US" sz="1150" b="1" dirty="0">
+                        <a:rPr lang="en-US" sz="1200" b="1" dirty="0">
                           <a:solidFill>
                             <a:srgbClr val="FFFFFF"/>
                           </a:solidFill>
@@ -9697,7 +9697,7 @@
                         </a:rPr>
                         <a:t>Flow</a:t>
                       </a:r>
-                      <a:endParaRPr lang="en-US" sz="1150" dirty="0">
+                      <a:endParaRPr lang="en-US" sz="1200" dirty="0">
                         <a:latin typeface="Arial" charset="0"/>
                         <a:ea typeface="Arial" charset="0"/>
                         <a:cs typeface="Arial" charset="0"/>
@@ -9755,7 +9755,7 @@
                         <a:buNone/>
                       </a:pPr>
                       <a:r>
-                        <a:rPr lang="en-US" sz="1150" b="1" dirty="0">
+                        <a:rPr lang="en-US" sz="1200" b="1" dirty="0">
                           <a:solidFill>
                             <a:srgbClr val="FFFFFF"/>
                           </a:solidFill>
@@ -9765,7 +9765,7 @@
                         </a:rPr>
                         <a:t>User?</a:t>
                       </a:r>
-                      <a:endParaRPr lang="en-US" sz="1150" dirty="0">
+                      <a:endParaRPr lang="en-US" sz="1200" dirty="0">
                         <a:latin typeface="Arial" charset="0"/>
                         <a:ea typeface="Arial" charset="0"/>
                         <a:cs typeface="Arial" charset="0"/>
@@ -9823,7 +9823,7 @@
                         <a:buNone/>
                       </a:pPr>
                       <a:r>
-                        <a:rPr lang="en-US" sz="1150" b="1" dirty="0">
+                        <a:rPr lang="en-US" sz="1200" b="1" dirty="0">
                           <a:solidFill>
                             <a:srgbClr val="FFFFFF"/>
                           </a:solidFill>
@@ -9833,7 +9833,7 @@
                         </a:rPr>
                         <a:t>Redirect?</a:t>
                       </a:r>
-                      <a:endParaRPr lang="en-US" sz="1150" dirty="0">
+                      <a:endParaRPr lang="en-US" sz="1200" dirty="0">
                         <a:latin typeface="Arial" charset="0"/>
                         <a:ea typeface="Arial" charset="0"/>
                         <a:cs typeface="Arial" charset="0"/>
@@ -9891,7 +9891,7 @@
                         <a:buNone/>
                       </a:pPr>
                       <a:r>
-                        <a:rPr lang="en-US" sz="1150" b="1" dirty="0">
+                        <a:rPr lang="en-US" sz="1200" b="1" dirty="0">
                           <a:solidFill>
                             <a:srgbClr val="FFFFFF"/>
                           </a:solidFill>
@@ -9901,7 +9901,7 @@
                         </a:rPr>
                         <a:t>Main use</a:t>
                       </a:r>
-                      <a:endParaRPr lang="en-US" sz="1150" dirty="0">
+                      <a:endParaRPr lang="en-US" sz="1200" dirty="0">
                         <a:latin typeface="Arial" charset="0"/>
                         <a:ea typeface="Arial" charset="0"/>
                         <a:cs typeface="Arial" charset="0"/>
@@ -9959,7 +9959,7 @@
                         <a:buNone/>
                       </a:pPr>
                       <a:r>
-                        <a:rPr lang="en-US" sz="1150" b="1" dirty="0">
+                        <a:rPr lang="en-US" sz="1200" b="1" dirty="0">
                           <a:solidFill>
                             <a:srgbClr val="FFFFFF"/>
                           </a:solidFill>
@@ -9969,7 +9969,7 @@
                         </a:rPr>
                         <a:t>Today?</a:t>
                       </a:r>
-                      <a:endParaRPr lang="en-US" sz="1150" dirty="0">
+                      <a:endParaRPr lang="en-US" sz="1200" dirty="0">
                         <a:latin typeface="Arial" charset="0"/>
                         <a:ea typeface="Arial" charset="0"/>
                         <a:cs typeface="Arial" charset="0"/>
@@ -10019,7 +10019,7 @@
                   </a:tcPr>
                 </a:tc>
               </a:tr>
-              <a:tr h="420624">
+              <a:tr h="457200">
                 <a:tc>
                   <a:txBody>
                     <a:bodyPr/>
@@ -10029,7 +10029,7 @@
                         <a:buNone/>
                       </a:pPr>
                       <a:r>
-                        <a:rPr lang="en-US" sz="1150" dirty="0">
+                        <a:rPr lang="en-US" sz="1200" dirty="0">
                           <a:solidFill>
                             <a:srgbClr val="1D2733"/>
                           </a:solidFill>
@@ -10039,7 +10039,7 @@
                         </a:rPr>
                         <a:t>Auth Code + PKCE</a:t>
                       </a:r>
-                      <a:endParaRPr lang="en-US" sz="1150" dirty="0">
+                      <a:endParaRPr lang="en-US" sz="1200" dirty="0">
                         <a:latin typeface="Arial" charset="0"/>
                         <a:ea typeface="Arial" charset="0"/>
                         <a:cs typeface="Arial" charset="0"/>
@@ -10097,7 +10097,7 @@
                         <a:buNone/>
                       </a:pPr>
                       <a:r>
-                        <a:rPr lang="en-US" sz="1150" dirty="0">
+                        <a:rPr lang="en-US" sz="1200" dirty="0">
                           <a:solidFill>
                             <a:srgbClr val="1D2733"/>
                           </a:solidFill>
@@ -10107,7 +10107,7 @@
                         </a:rPr>
                         <a:t>Yes</a:t>
                       </a:r>
-                      <a:endParaRPr lang="en-US" sz="1150" dirty="0">
+                      <a:endParaRPr lang="en-US" sz="1200" dirty="0">
                         <a:latin typeface="Arial" charset="0"/>
                         <a:ea typeface="Arial" charset="0"/>
                         <a:cs typeface="Arial" charset="0"/>
@@ -10165,7 +10165,7 @@
                         <a:buNone/>
                       </a:pPr>
                       <a:r>
-                        <a:rPr lang="en-US" sz="1150" dirty="0">
+                        <a:rPr lang="en-US" sz="1200" dirty="0">
                           <a:solidFill>
                             <a:srgbClr val="1D2733"/>
                           </a:solidFill>
@@ -10175,7 +10175,7 @@
                         </a:rPr>
                         <a:t>Yes</a:t>
                       </a:r>
-                      <a:endParaRPr lang="en-US" sz="1150" dirty="0">
+                      <a:endParaRPr lang="en-US" sz="1200" dirty="0">
                         <a:latin typeface="Arial" charset="0"/>
                         <a:ea typeface="Arial" charset="0"/>
                         <a:cs typeface="Arial" charset="0"/>
@@ -10233,7 +10233,7 @@
                         <a:buNone/>
                       </a:pPr>
                       <a:r>
-                        <a:rPr lang="en-US" sz="1150" dirty="0">
+                        <a:rPr lang="en-US" sz="1200" dirty="0">
                           <a:solidFill>
                             <a:srgbClr val="1D2733"/>
                           </a:solidFill>
@@ -10243,7 +10243,7 @@
                         </a:rPr>
                         <a:t>Web, SPA, mobile with a user</a:t>
                       </a:r>
-                      <a:endParaRPr lang="en-US" sz="1150" dirty="0">
+                      <a:endParaRPr lang="en-US" sz="1200" dirty="0">
                         <a:latin typeface="Arial" charset="0"/>
                         <a:ea typeface="Arial" charset="0"/>
                         <a:cs typeface="Arial" charset="0"/>
@@ -10301,7 +10301,7 @@
                         <a:buNone/>
                       </a:pPr>
                       <a:r>
-                        <a:rPr lang="en-US" sz="1150" dirty="0">
+                        <a:rPr lang="en-US" sz="1200" dirty="0">
                           <a:solidFill>
                             <a:srgbClr val="1D2733"/>
                           </a:solidFill>
@@ -10311,7 +10311,7 @@
                         </a:rPr>
                         <a:t>Recommended</a:t>
                       </a:r>
-                      <a:endParaRPr lang="en-US" sz="1150" dirty="0">
+                      <a:endParaRPr lang="en-US" sz="1200" dirty="0">
                         <a:latin typeface="Arial" charset="0"/>
                         <a:ea typeface="Arial" charset="0"/>
                         <a:cs typeface="Arial" charset="0"/>
@@ -10361,7 +10361,7 @@
                   </a:tcPr>
                 </a:tc>
               </a:tr>
-              <a:tr h="420624">
+              <a:tr h="457200">
                 <a:tc>
                   <a:txBody>
                     <a:bodyPr/>
@@ -10371,7 +10371,7 @@
                         <a:buNone/>
                       </a:pPr>
                       <a:r>
-                        <a:rPr lang="en-US" sz="1150" dirty="0">
+                        <a:rPr lang="en-US" sz="1200" dirty="0">
                           <a:solidFill>
                             <a:srgbClr val="1D2733"/>
                           </a:solidFill>
@@ -10381,7 +10381,7 @@
                         </a:rPr>
                         <a:t>Client Credentials</a:t>
                       </a:r>
-                      <a:endParaRPr lang="en-US" sz="1150" dirty="0">
+                      <a:endParaRPr lang="en-US" sz="1200" dirty="0">
                         <a:latin typeface="Arial" charset="0"/>
                         <a:ea typeface="Arial" charset="0"/>
                         <a:cs typeface="Arial" charset="0"/>
@@ -10439,7 +10439,7 @@
                         <a:buNone/>
                       </a:pPr>
                       <a:r>
-                        <a:rPr lang="en-US" sz="1150" dirty="0">
+                        <a:rPr lang="en-US" sz="1200" dirty="0">
                           <a:solidFill>
                             <a:srgbClr val="1D2733"/>
                           </a:solidFill>
@@ -10449,7 +10449,7 @@
                         </a:rPr>
                         <a:t>No</a:t>
                       </a:r>
-                      <a:endParaRPr lang="en-US" sz="1150" dirty="0">
+                      <a:endParaRPr lang="en-US" sz="1200" dirty="0">
                         <a:latin typeface="Arial" charset="0"/>
                         <a:ea typeface="Arial" charset="0"/>
                         <a:cs typeface="Arial" charset="0"/>
@@ -10507,7 +10507,7 @@
                         <a:buNone/>
                       </a:pPr>
                       <a:r>
-                        <a:rPr lang="en-US" sz="1150" dirty="0">
+                        <a:rPr lang="en-US" sz="1200" dirty="0">
                           <a:solidFill>
                             <a:srgbClr val="1D2733"/>
                           </a:solidFill>
@@ -10517,7 +10517,7 @@
                         </a:rPr>
                         <a:t>No</a:t>
                       </a:r>
-                      <a:endParaRPr lang="en-US" sz="1150" dirty="0">
+                      <a:endParaRPr lang="en-US" sz="1200" dirty="0">
                         <a:latin typeface="Arial" charset="0"/>
                         <a:ea typeface="Arial" charset="0"/>
                         <a:cs typeface="Arial" charset="0"/>
@@ -10575,7 +10575,7 @@
                         <a:buNone/>
                       </a:pPr>
                       <a:r>
-                        <a:rPr lang="en-US" sz="1150" dirty="0">
+                        <a:rPr lang="en-US" sz="1200" dirty="0">
                           <a:solidFill>
                             <a:srgbClr val="1D2733"/>
                           </a:solidFill>
@@ -10585,7 +10585,7 @@
                         </a:rPr>
                         <a:t>Service-to-service APIs</a:t>
                       </a:r>
-                      <a:endParaRPr lang="en-US" sz="1150" dirty="0">
+                      <a:endParaRPr lang="en-US" sz="1200" dirty="0">
                         <a:latin typeface="Arial" charset="0"/>
                         <a:ea typeface="Arial" charset="0"/>
                         <a:cs typeface="Arial" charset="0"/>
@@ -10643,7 +10643,7 @@
                         <a:buNone/>
                       </a:pPr>
                       <a:r>
-                        <a:rPr lang="en-US" sz="1150" dirty="0">
+                        <a:rPr lang="en-US" sz="1200" dirty="0">
                           <a:solidFill>
                             <a:srgbClr val="1D2733"/>
                           </a:solidFill>
@@ -10653,7 +10653,7 @@
                         </a:rPr>
                         <a:t>Recommended</a:t>
                       </a:r>
-                      <a:endParaRPr lang="en-US" sz="1150" dirty="0">
+                      <a:endParaRPr lang="en-US" sz="1200" dirty="0">
                         <a:latin typeface="Arial" charset="0"/>
                         <a:ea typeface="Arial" charset="0"/>
                         <a:cs typeface="Arial" charset="0"/>
@@ -10703,7 +10703,7 @@
                   </a:tcPr>
                 </a:tc>
               </a:tr>
-              <a:tr h="420624">
+              <a:tr h="457200">
                 <a:tc>
                   <a:txBody>
                     <a:bodyPr/>
@@ -10713,7 +10713,7 @@
                         <a:buNone/>
                       </a:pPr>
                       <a:r>
-                        <a:rPr lang="en-US" sz="1150" dirty="0">
+                        <a:rPr lang="en-US" sz="1200" dirty="0">
                           <a:solidFill>
                             <a:srgbClr val="1D2733"/>
                           </a:solidFill>
@@ -10723,7 +10723,7 @@
                         </a:rPr>
                         <a:t>Refresh Token</a:t>
                       </a:r>
-                      <a:endParaRPr lang="en-US" sz="1150" dirty="0">
+                      <a:endParaRPr lang="en-US" sz="1200" dirty="0">
                         <a:latin typeface="Arial" charset="0"/>
                         <a:ea typeface="Arial" charset="0"/>
                         <a:cs typeface="Arial" charset="0"/>
@@ -10781,7 +10781,7 @@
                         <a:buNone/>
                       </a:pPr>
                       <a:r>
-                        <a:rPr lang="en-US" sz="1150" dirty="0">
+                        <a:rPr lang="en-US" sz="1200" dirty="0">
                           <a:solidFill>
                             <a:srgbClr val="1D2733"/>
                           </a:solidFill>
@@ -10791,7 +10791,7 @@
                         </a:rPr>
                         <a:t>Sometimes</a:t>
                       </a:r>
-                      <a:endParaRPr lang="en-US" sz="1150" dirty="0">
+                      <a:endParaRPr lang="en-US" sz="1200" dirty="0">
                         <a:latin typeface="Arial" charset="0"/>
                         <a:ea typeface="Arial" charset="0"/>
                         <a:cs typeface="Arial" charset="0"/>
@@ -10849,7 +10849,7 @@
                         <a:buNone/>
                       </a:pPr>
                       <a:r>
-                        <a:rPr lang="en-US" sz="1150" dirty="0">
+                        <a:rPr lang="en-US" sz="1200" dirty="0">
                           <a:solidFill>
                             <a:srgbClr val="1D2733"/>
                           </a:solidFill>
@@ -10859,7 +10859,7 @@
                         </a:rPr>
                         <a:t>No</a:t>
                       </a:r>
-                      <a:endParaRPr lang="en-US" sz="1150" dirty="0">
+                      <a:endParaRPr lang="en-US" sz="1200" dirty="0">
                         <a:latin typeface="Arial" charset="0"/>
                         <a:ea typeface="Arial" charset="0"/>
                         <a:cs typeface="Arial" charset="0"/>
@@ -10917,7 +10917,7 @@
                         <a:buNone/>
                       </a:pPr>
                       <a:r>
-                        <a:rPr lang="en-US" sz="1150" dirty="0">
+                        <a:rPr lang="en-US" sz="1200" dirty="0">
                           <a:solidFill>
                             <a:srgbClr val="1D2733"/>
                           </a:solidFill>
@@ -10927,7 +10927,7 @@
                         </a:rPr>
                         <a:t>Renew an access token</a:t>
                       </a:r>
-                      <a:endParaRPr lang="en-US" sz="1150" dirty="0">
+                      <a:endParaRPr lang="en-US" sz="1200" dirty="0">
                         <a:latin typeface="Arial" charset="0"/>
                         <a:ea typeface="Arial" charset="0"/>
                         <a:cs typeface="Arial" charset="0"/>
@@ -10985,7 +10985,7 @@
                         <a:buNone/>
                       </a:pPr>
                       <a:r>
-                        <a:rPr lang="en-US" sz="1150" dirty="0">
+                        <a:rPr lang="en-US" sz="1200" dirty="0">
                           <a:solidFill>
                             <a:srgbClr val="1D2733"/>
                           </a:solidFill>
@@ -10993,9 +10993,9 @@
                           <a:ea typeface="Arial" pitchFamily="34" charset="-122"/>
                           <a:cs typeface="Arial" pitchFamily="34" charset="-120"/>
                         </a:rPr>
-                        <a:t>Recommended w/ controls</a:t>
+                        <a:t>With controls</a:t>
                       </a:r>
-                      <a:endParaRPr lang="en-US" sz="1150" dirty="0">
+                      <a:endParaRPr lang="en-US" sz="1200" dirty="0">
                         <a:latin typeface="Arial" charset="0"/>
                         <a:ea typeface="Arial" charset="0"/>
                         <a:cs typeface="Arial" charset="0"/>
@@ -11045,7 +11045,7 @@
                   </a:tcPr>
                 </a:tc>
               </a:tr>
-              <a:tr h="420624">
+              <a:tr h="457200">
                 <a:tc>
                   <a:txBody>
                     <a:bodyPr/>
@@ -11055,7 +11055,7 @@
                         <a:buNone/>
                       </a:pPr>
                       <a:r>
-                        <a:rPr lang="en-US" sz="1150" dirty="0">
+                        <a:rPr lang="en-US" sz="1200" dirty="0">
                           <a:solidFill>
                             <a:srgbClr val="1D2733"/>
                           </a:solidFill>
@@ -11065,7 +11065,7 @@
                         </a:rPr>
                         <a:t>Device Authorization</a:t>
                       </a:r>
-                      <a:endParaRPr lang="en-US" sz="1150" dirty="0">
+                      <a:endParaRPr lang="en-US" sz="1200" dirty="0">
                         <a:latin typeface="Arial" charset="0"/>
                         <a:ea typeface="Arial" charset="0"/>
                         <a:cs typeface="Arial" charset="0"/>
@@ -11123,7 +11123,7 @@
                         <a:buNone/>
                       </a:pPr>
                       <a:r>
-                        <a:rPr lang="en-US" sz="1150" dirty="0">
+                        <a:rPr lang="en-US" sz="1200" dirty="0">
                           <a:solidFill>
                             <a:srgbClr val="1D2733"/>
                           </a:solidFill>
@@ -11133,7 +11133,7 @@
                         </a:rPr>
                         <a:t>Yes</a:t>
                       </a:r>
-                      <a:endParaRPr lang="en-US" sz="1150" dirty="0">
+                      <a:endParaRPr lang="en-US" sz="1200" dirty="0">
                         <a:latin typeface="Arial" charset="0"/>
                         <a:ea typeface="Arial" charset="0"/>
                         <a:cs typeface="Arial" charset="0"/>
@@ -11191,7 +11191,7 @@
                         <a:buNone/>
                       </a:pPr>
                       <a:r>
-                        <a:rPr lang="en-US" sz="1150" dirty="0">
+                        <a:rPr lang="en-US" sz="1200" dirty="0">
                           <a:solidFill>
                             <a:srgbClr val="1D2733"/>
                           </a:solidFill>
@@ -11201,7 +11201,7 @@
                         </a:rPr>
                         <a:t>Partial</a:t>
                       </a:r>
-                      <a:endParaRPr lang="en-US" sz="1150" dirty="0">
+                      <a:endParaRPr lang="en-US" sz="1200" dirty="0">
                         <a:latin typeface="Arial" charset="0"/>
                         <a:ea typeface="Arial" charset="0"/>
                         <a:cs typeface="Arial" charset="0"/>
@@ -11259,7 +11259,7 @@
                         <a:buNone/>
                       </a:pPr>
                       <a:r>
-                        <a:rPr lang="en-US" sz="1150" dirty="0">
+                        <a:rPr lang="en-US" sz="1200" dirty="0">
                           <a:solidFill>
                             <a:srgbClr val="1D2733"/>
                           </a:solidFill>
@@ -11269,7 +11269,7 @@
                         </a:rPr>
                         <a:t>CLI / TV / limited input</a:t>
                       </a:r>
-                      <a:endParaRPr lang="en-US" sz="1150" dirty="0">
+                      <a:endParaRPr lang="en-US" sz="1200" dirty="0">
                         <a:latin typeface="Arial" charset="0"/>
                         <a:ea typeface="Arial" charset="0"/>
                         <a:cs typeface="Arial" charset="0"/>
@@ -11327,7 +11327,7 @@
                         <a:buNone/>
                       </a:pPr>
                       <a:r>
-                        <a:rPr lang="en-US" sz="1150" dirty="0">
+                        <a:rPr lang="en-US" sz="1200" dirty="0">
                           <a:solidFill>
                             <a:srgbClr val="1D2733"/>
                           </a:solidFill>
@@ -11335,9 +11335,9 @@
                           <a:ea typeface="Arial" pitchFamily="34" charset="-122"/>
                           <a:cs typeface="Arial" pitchFamily="34" charset="-120"/>
                         </a:rPr>
-                        <a:t>When appropriate</a:t>
+                        <a:t>When needed</a:t>
                       </a:r>
-                      <a:endParaRPr lang="en-US" sz="1150" dirty="0">
+                      <a:endParaRPr lang="en-US" sz="1200" dirty="0">
                         <a:latin typeface="Arial" charset="0"/>
                         <a:ea typeface="Arial" charset="0"/>
                         <a:cs typeface="Arial" charset="0"/>
@@ -11387,7 +11387,7 @@
                   </a:tcPr>
                 </a:tc>
               </a:tr>
-              <a:tr h="420624">
+              <a:tr h="457200">
                 <a:tc>
                   <a:txBody>
                     <a:bodyPr/>
@@ -11397,7 +11397,7 @@
                         <a:buNone/>
                       </a:pPr>
                       <a:r>
-                        <a:rPr lang="en-US" sz="1150" dirty="0">
+                        <a:rPr lang="en-US" sz="1200" dirty="0">
                           <a:solidFill>
                             <a:srgbClr val="1D2733"/>
                           </a:solidFill>
@@ -11407,7 +11407,7 @@
                         </a:rPr>
                         <a:t>Implicit / Password</a:t>
                       </a:r>
-                      <a:endParaRPr lang="en-US" sz="1150" dirty="0">
+                      <a:endParaRPr lang="en-US" sz="1200" dirty="0">
                         <a:latin typeface="Arial" charset="0"/>
                         <a:ea typeface="Arial" charset="0"/>
                         <a:cs typeface="Arial" charset="0"/>
@@ -11465,7 +11465,7 @@
                         <a:buNone/>
                       </a:pPr>
                       <a:r>
-                        <a:rPr lang="en-US" sz="1150" dirty="0">
+                        <a:rPr lang="en-US" sz="1200" dirty="0">
                           <a:solidFill>
                             <a:srgbClr val="1D2733"/>
                           </a:solidFill>
@@ -11475,7 +11475,7 @@
                         </a:rPr>
                         <a:t>Yes</a:t>
                       </a:r>
-                      <a:endParaRPr lang="en-US" sz="1150" dirty="0">
+                      <a:endParaRPr lang="en-US" sz="1200" dirty="0">
                         <a:latin typeface="Arial" charset="0"/>
                         <a:ea typeface="Arial" charset="0"/>
                         <a:cs typeface="Arial" charset="0"/>
@@ -11533,7 +11533,7 @@
                         <a:buNone/>
                       </a:pPr>
                       <a:r>
-                        <a:rPr lang="en-US" sz="1150" dirty="0">
+                        <a:rPr lang="en-US" sz="1200" dirty="0">
                           <a:solidFill>
                             <a:srgbClr val="1D2733"/>
                           </a:solidFill>
@@ -11543,7 +11543,7 @@
                         </a:rPr>
                         <a:t>—</a:t>
                       </a:r>
-                      <a:endParaRPr lang="en-US" sz="1150" dirty="0">
+                      <a:endParaRPr lang="en-US" sz="1200" dirty="0">
                         <a:latin typeface="Arial" charset="0"/>
                         <a:ea typeface="Arial" charset="0"/>
                         <a:cs typeface="Arial" charset="0"/>
@@ -11601,7 +11601,7 @@
                         <a:buNone/>
                       </a:pPr>
                       <a:r>
-                        <a:rPr lang="en-US" sz="1150" dirty="0">
+                        <a:rPr lang="en-US" sz="1200" dirty="0">
                           <a:solidFill>
                             <a:srgbClr val="1D2733"/>
                           </a:solidFill>
@@ -11611,7 +11611,7 @@
                         </a:rPr>
                         <a:t>Legacy</a:t>
                       </a:r>
-                      <a:endParaRPr lang="en-US" sz="1150" dirty="0">
+                      <a:endParaRPr lang="en-US" sz="1200" dirty="0">
                         <a:latin typeface="Arial" charset="0"/>
                         <a:ea typeface="Arial" charset="0"/>
                         <a:cs typeface="Arial" charset="0"/>
@@ -11669,7 +11669,7 @@
                         <a:buNone/>
                       </a:pPr>
                       <a:r>
-                        <a:rPr lang="en-US" sz="1150" dirty="0">
+                        <a:rPr lang="en-US" sz="1200" dirty="0">
                           <a:solidFill>
                             <a:srgbClr val="1D2733"/>
                           </a:solidFill>
@@ -11679,7 +11679,7 @@
                         </a:rPr>
                         <a:t>Avoid</a:t>
                       </a:r>
-                      <a:endParaRPr lang="en-US" sz="1150" dirty="0">
+                      <a:endParaRPr lang="en-US" sz="1200" dirty="0">
                         <a:latin typeface="Arial" charset="0"/>
                         <a:ea typeface="Arial" charset="0"/>
                         <a:cs typeface="Arial" charset="0"/>
@@ -12001,7 +12001,7 @@
         <p:spPr>
           <a:xfrm>
             <a:off x="640080" y="640080"/>
-            <a:ext cx="10972800" cy="777240"/>
+            <a:ext cx="10972800" cy="822960"/>
           </a:xfrm>
           <a:prstGeom prst="rect">
             <a:avLst/>
@@ -12017,7 +12017,7 @@
               <a:buNone/>
             </a:pPr>
             <a:r>
-              <a:rPr lang="en-US" sz="2600" b="1" dirty="0">
+              <a:rPr lang="en-US" sz="3000" b="1" dirty="0">
                 <a:solidFill>
                   <a:srgbClr val="1F3A5F"/>
                 </a:solidFill>
@@ -12027,7 +12027,7 @@
               </a:rPr>
               <a:t>JWT: header . payload . signature</a:t>
             </a:r>
-            <a:endParaRPr lang="en-US" sz="2600" dirty="0"/>
+            <a:endParaRPr lang="en-US" sz="3000" dirty="0"/>
           </a:p>
         </p:txBody>
       </p:sp>
@@ -12117,12 +12117,12 @@
         </p:nvSpPr>
         <p:spPr>
           <a:xfrm>
-            <a:off x="640080" y="1554480"/>
-            <a:ext cx="5486400" cy="3383280"/>
+            <a:off x="640080" y="1645920"/>
+            <a:ext cx="5486400" cy="3200400"/>
           </a:xfrm>
           <a:prstGeom prst="roundRect">
             <a:avLst>
-              <a:gd name="adj" fmla="val 1622"/>
+              <a:gd name="adj" fmla="val 1714"/>
             </a:avLst>
           </a:prstGeom>
           <a:solidFill>
@@ -12151,7 +12151,7 @@
         </p:nvSpPr>
         <p:spPr>
           <a:xfrm>
-            <a:off x="804672" y="1645920"/>
+            <a:off x="804672" y="1737360"/>
             <a:ext cx="5157216" cy="256032"/>
           </a:xfrm>
           <a:prstGeom prst="rect">
@@ -12190,8 +12190,8 @@
         </p:nvSpPr>
         <p:spPr>
           <a:xfrm>
-            <a:off x="841248" y="1938528"/>
-            <a:ext cx="5084064" cy="2880360"/>
+            <a:off x="841248" y="2029968"/>
+            <a:ext cx="5084064" cy="2697480"/>
           </a:xfrm>
           <a:prstGeom prst="rect">
             <a:avLst/>
@@ -12205,12 +12205,12 @@
           <a:p>
             <a:pPr indent="0" marL="0">
               <a:lnSpc>
-                <a:spcPct val="106000"/>
+                <a:spcPct val="110000"/>
               </a:lnSpc>
               <a:buNone/>
             </a:pPr>
             <a:r>
-              <a:rPr lang="en-US" sz="1150" dirty="0">
+              <a:rPr lang="en-US" sz="1250" dirty="0">
                 <a:solidFill>
                   <a:srgbClr val="1D2733"/>
                 </a:solidFill>
@@ -12220,17 +12220,17 @@
               </a:rPr>
               <a:t>{</a:t>
             </a:r>
-            <a:endParaRPr lang="en-US" sz="1150" dirty="0"/>
+            <a:endParaRPr lang="en-US" sz="1250" dirty="0"/>
           </a:p>
           <a:p>
             <a:pPr indent="0" marL="0">
               <a:lnSpc>
-                <a:spcPct val="106000"/>
+                <a:spcPct val="110000"/>
               </a:lnSpc>
               <a:buNone/>
             </a:pPr>
             <a:r>
-              <a:rPr lang="en-US" sz="1150" dirty="0">
+              <a:rPr lang="en-US" sz="1250" dirty="0">
                 <a:solidFill>
                   <a:srgbClr val="1D2733"/>
                 </a:solidFill>
@@ -12240,17 +12240,17 @@
               </a:rPr>
               <a:t>  "iss": "https://auth.example.com",</a:t>
             </a:r>
-            <a:endParaRPr lang="en-US" sz="1150" dirty="0"/>
+            <a:endParaRPr lang="en-US" sz="1250" dirty="0"/>
           </a:p>
           <a:p>
             <a:pPr indent="0" marL="0">
               <a:lnSpc>
-                <a:spcPct val="106000"/>
+                <a:spcPct val="110000"/>
               </a:lnSpc>
               <a:buNone/>
             </a:pPr>
             <a:r>
-              <a:rPr lang="en-US" sz="1150" dirty="0">
+              <a:rPr lang="en-US" sz="1250" dirty="0">
                 <a:solidFill>
                   <a:srgbClr val="1D2733"/>
                 </a:solidFill>
@@ -12260,17 +12260,17 @@
               </a:rPr>
               <a:t>  "sub": "user_123",</a:t>
             </a:r>
-            <a:endParaRPr lang="en-US" sz="1150" dirty="0"/>
+            <a:endParaRPr lang="en-US" sz="1250" dirty="0"/>
           </a:p>
           <a:p>
             <a:pPr indent="0" marL="0">
               <a:lnSpc>
-                <a:spcPct val="106000"/>
+                <a:spcPct val="110000"/>
               </a:lnSpc>
               <a:buNone/>
             </a:pPr>
             <a:r>
-              <a:rPr lang="en-US" sz="1150" dirty="0">
+              <a:rPr lang="en-US" sz="1250" dirty="0">
                 <a:solidFill>
                   <a:srgbClr val="1D2733"/>
                 </a:solidFill>
@@ -12280,17 +12280,17 @@
               </a:rPr>
               <a:t>  "aud": "https://api.example.com",</a:t>
             </a:r>
-            <a:endParaRPr lang="en-US" sz="1150" dirty="0"/>
+            <a:endParaRPr lang="en-US" sz="1250" dirty="0"/>
           </a:p>
           <a:p>
             <a:pPr indent="0" marL="0">
               <a:lnSpc>
-                <a:spcPct val="106000"/>
+                <a:spcPct val="110000"/>
               </a:lnSpc>
               <a:buNone/>
             </a:pPr>
             <a:r>
-              <a:rPr lang="en-US" sz="1150" dirty="0">
+              <a:rPr lang="en-US" sz="1250" dirty="0">
                 <a:solidFill>
                   <a:srgbClr val="1D2733"/>
                 </a:solidFill>
@@ -12300,17 +12300,17 @@
               </a:rPr>
               <a:t>  "exp": 1760000000,</a:t>
             </a:r>
-            <a:endParaRPr lang="en-US" sz="1150" dirty="0"/>
+            <a:endParaRPr lang="en-US" sz="1250" dirty="0"/>
           </a:p>
           <a:p>
             <a:pPr indent="0" marL="0">
               <a:lnSpc>
-                <a:spcPct val="106000"/>
+                <a:spcPct val="110000"/>
               </a:lnSpc>
               <a:buNone/>
             </a:pPr>
             <a:r>
-              <a:rPr lang="en-US" sz="1150" dirty="0">
+              <a:rPr lang="en-US" sz="1250" dirty="0">
                 <a:solidFill>
                   <a:srgbClr val="1D2733"/>
                 </a:solidFill>
@@ -12320,17 +12320,17 @@
               </a:rPr>
               <a:t>  "scope": "repo.read repo.write"</a:t>
             </a:r>
-            <a:endParaRPr lang="en-US" sz="1150" dirty="0"/>
+            <a:endParaRPr lang="en-US" sz="1250" dirty="0"/>
           </a:p>
           <a:p>
             <a:pPr indent="0" marL="0">
               <a:lnSpc>
-                <a:spcPct val="106000"/>
+                <a:spcPct val="110000"/>
               </a:lnSpc>
               <a:buNone/>
             </a:pPr>
             <a:r>
-              <a:rPr lang="en-US" sz="1150" dirty="0">
+              <a:rPr lang="en-US" sz="1250" dirty="0">
                 <a:solidFill>
                   <a:srgbClr val="1D2733"/>
                 </a:solidFill>
@@ -12340,7 +12340,7 @@
               </a:rPr>
               <a:t>}</a:t>
             </a:r>
-            <a:endParaRPr lang="en-US" sz="1150" dirty="0"/>
+            <a:endParaRPr lang="en-US" sz="1250" dirty="0"/>
           </a:p>
         </p:txBody>
       </p:sp>
@@ -12352,12 +12352,12 @@
         </p:nvSpPr>
         <p:spPr>
           <a:xfrm>
-            <a:off x="6400800" y="1554480"/>
-            <a:ext cx="5120640" cy="3383280"/>
+            <a:off x="6400800" y="1645920"/>
+            <a:ext cx="5120640" cy="3200400"/>
           </a:xfrm>
           <a:prstGeom prst="roundRect">
             <a:avLst>
-              <a:gd name="adj" fmla="val 1622"/>
+              <a:gd name="adj" fmla="val 1714"/>
             </a:avLst>
           </a:prstGeom>
           <a:solidFill>
@@ -12386,8 +12386,8 @@
         </p:nvSpPr>
         <p:spPr>
           <a:xfrm>
-            <a:off x="6583680" y="1700784"/>
-            <a:ext cx="4754880" cy="310896"/>
+            <a:off x="6601968" y="1810512"/>
+            <a:ext cx="4718304" cy="347472"/>
           </a:xfrm>
           <a:prstGeom prst="rect">
             <a:avLst/>
@@ -12403,7 +12403,7 @@
               <a:buNone/>
             </a:pPr>
             <a:r>
-              <a:rPr lang="en-US" sz="1400" b="1" dirty="0">
+              <a:rPr lang="en-US" sz="1600" b="1" dirty="0">
                 <a:solidFill>
                   <a:srgbClr val="1F3A5F"/>
                 </a:solidFill>
@@ -12413,7 +12413,7 @@
               </a:rPr>
               <a:t>Claims that drive validation</a:t>
             </a:r>
-            <a:endParaRPr lang="en-US" sz="1400" dirty="0"/>
+            <a:endParaRPr lang="en-US" sz="1600" dirty="0"/>
           </a:p>
         </p:txBody>
       </p:sp>
@@ -12425,8 +12425,8 @@
         </p:nvSpPr>
         <p:spPr>
           <a:xfrm>
-            <a:off x="6583680" y="2121408"/>
-            <a:ext cx="4754880" cy="2706624"/>
+            <a:off x="6601968" y="2286000"/>
+            <a:ext cx="4718304" cy="2432304"/>
           </a:xfrm>
           <a:prstGeom prst="rect">
             <a:avLst/>
@@ -12438,15 +12438,15 @@
           <a:bodyPr wrap="square" lIns="0" tIns="0" rIns="0" bIns="0" rtlCol="0" anchor="t"/>
           <a:lstStyle/>
           <a:p>
-            <a:pPr marL="177800" indent="-177800">
+            <a:pPr marL="203200" indent="-203200">
               <a:spcAft>
-                <a:spcPts val="400"/>
+                <a:spcPts val="800"/>
               </a:spcAft>
               <a:buSzPct val="100000"/>
               <a:buChar char="•"/>
             </a:pPr>
             <a:r>
-              <a:rPr lang="en-US" sz="1300" dirty="0">
+              <a:rPr lang="en-US" sz="1450" dirty="0">
                 <a:solidFill>
                   <a:srgbClr val="1D2733"/>
                 </a:solidFill>
@@ -12454,20 +12454,20 @@
                 <a:ea typeface="Arial" pitchFamily="34" charset="-122"/>
                 <a:cs typeface="Arial" pitchFamily="34" charset="-120"/>
               </a:rPr>
-              <a:t>iss — do we trust this issuer?</a:t>
-            </a:r>
-            <a:endParaRPr lang="en-US" sz="1300" dirty="0"/>
-          </a:p>
-          <a:p>
-            <a:pPr marL="177800" indent="-177800">
+              <a:t>iss — trust this issuer?</a:t>
+            </a:r>
+            <a:endParaRPr lang="en-US" sz="1450" dirty="0"/>
+          </a:p>
+          <a:p>
+            <a:pPr marL="203200" indent="-203200">
               <a:spcAft>
-                <a:spcPts val="400"/>
+                <a:spcPts val="800"/>
               </a:spcAft>
               <a:buSzPct val="100000"/>
               <a:buChar char="•"/>
             </a:pPr>
             <a:r>
-              <a:rPr lang="en-US" sz="1300" dirty="0">
+              <a:rPr lang="en-US" sz="1450" dirty="0">
                 <a:solidFill>
                   <a:srgbClr val="1D2733"/>
                 </a:solidFill>
@@ -12475,20 +12475,20 @@
                 <a:ea typeface="Arial" pitchFamily="34" charset="-122"/>
                 <a:cs typeface="Arial" pitchFamily="34" charset="-120"/>
               </a:rPr>
-              <a:t>aud — is this token meant for this API?</a:t>
-            </a:r>
-            <a:endParaRPr lang="en-US" sz="1300" dirty="0"/>
-          </a:p>
-          <a:p>
-            <a:pPr marL="177800" indent="-177800">
+              <a:t>aud — meant for this API?</a:t>
+            </a:r>
+            <a:endParaRPr lang="en-US" sz="1450" dirty="0"/>
+          </a:p>
+          <a:p>
+            <a:pPr marL="203200" indent="-203200">
               <a:spcAft>
-                <a:spcPts val="400"/>
+                <a:spcPts val="800"/>
               </a:spcAft>
               <a:buSzPct val="100000"/>
               <a:buChar char="•"/>
             </a:pPr>
             <a:r>
-              <a:rPr lang="en-US" sz="1300" dirty="0">
+              <a:rPr lang="en-US" sz="1450" dirty="0">
                 <a:solidFill>
                   <a:srgbClr val="1D2733"/>
                 </a:solidFill>
@@ -12496,20 +12496,20 @@
                 <a:ea typeface="Arial" pitchFamily="34" charset="-122"/>
                 <a:cs typeface="Arial" pitchFamily="34" charset="-120"/>
               </a:rPr>
-              <a:t>exp / nbf — is it valid right now?</a:t>
-            </a:r>
-            <a:endParaRPr lang="en-US" sz="1300" dirty="0"/>
-          </a:p>
-          <a:p>
-            <a:pPr marL="177800" indent="-177800">
+              <a:t>exp / nbf — valid right now?</a:t>
+            </a:r>
+            <a:endParaRPr lang="en-US" sz="1450" dirty="0"/>
+          </a:p>
+          <a:p>
+            <a:pPr marL="203200" indent="-203200">
               <a:spcAft>
-                <a:spcPts val="400"/>
+                <a:spcPts val="800"/>
               </a:spcAft>
               <a:buSzPct val="100000"/>
               <a:buChar char="•"/>
             </a:pPr>
             <a:r>
-              <a:rPr lang="en-US" sz="1300" dirty="0">
+              <a:rPr lang="en-US" sz="1450" dirty="0">
                 <a:solidFill>
                   <a:srgbClr val="1D2733"/>
                 </a:solidFill>
@@ -12517,9 +12517,9 @@
                 <a:ea typeface="Arial" pitchFamily="34" charset="-122"/>
                 <a:cs typeface="Arial" pitchFamily="34" charset="-120"/>
               </a:rPr>
-              <a:t>scope — enough permission for this action?</a:t>
-            </a:r>
-            <a:endParaRPr lang="en-US" sz="1300" dirty="0"/>
+              <a:t>scope — enough permission?</a:t>
+            </a:r>
+            <a:endParaRPr lang="en-US" sz="1450" dirty="0"/>
           </a:p>
         </p:txBody>
       </p:sp>
@@ -12531,7 +12531,7 @@
         </p:nvSpPr>
         <p:spPr>
           <a:xfrm>
-            <a:off x="640080" y="5120640"/>
+            <a:off x="640080" y="5029200"/>
             <a:ext cx="10972800" cy="365760"/>
           </a:xfrm>
           <a:prstGeom prst="rect">
@@ -12642,7 +12642,7 @@
         <p:spPr>
           <a:xfrm>
             <a:off x="640080" y="640080"/>
-            <a:ext cx="10972800" cy="777240"/>
+            <a:ext cx="10972800" cy="822960"/>
           </a:xfrm>
           <a:prstGeom prst="rect">
             <a:avLst/>
@@ -12658,7 +12658,7 @@
               <a:buNone/>
             </a:pPr>
             <a:r>
-              <a:rPr lang="en-US" sz="2600" b="1" dirty="0">
+              <a:rPr lang="en-US" sz="3000" b="1" dirty="0">
                 <a:solidFill>
                   <a:srgbClr val="1F3A5F"/>
                 </a:solidFill>
@@ -12668,7 +12668,7 @@
               </a:rPr>
               <a:t>Eight lessons, one mental model</a:t>
             </a:r>
-            <a:endParaRPr lang="en-US" sz="2600" dirty="0"/>
+            <a:endParaRPr lang="en-US" sz="3000" dirty="0"/>
           </a:p>
         </p:txBody>
       </p:sp>
@@ -12881,7 +12881,7 @@
                 <a:ea typeface="Arial" pitchFamily="34" charset="-122"/>
                 <a:cs typeface="Arial" pitchFamily="34" charset="-120"/>
               </a:rPr>
-              <a:t>Why OAuth exists; the four actors; tokens, scopes, consent</a:t>
+              <a:t>Why OAuth exists; the four actors; tokens &amp; consent</a:t>
             </a:r>
             <a:endParaRPr lang="en-US" sz="1250" dirty="0"/>
           </a:p>
@@ -13155,7 +13155,7 @@
                 <a:ea typeface="Arial" pitchFamily="34" charset="-122"/>
                 <a:cs typeface="Arial" pitchFamily="34" charset="-120"/>
               </a:rPr>
-              <a:t>Choose the right flow for the application shape</a:t>
+              <a:t>Pick the right flow for the app shape</a:t>
             </a:r>
             <a:endParaRPr lang="en-US" sz="1250" dirty="0"/>
           </a:p>
@@ -13292,7 +13292,7 @@
                 <a:ea typeface="Arial" pitchFamily="34" charset="-122"/>
                 <a:cs typeface="Arial" pitchFamily="34" charset="-120"/>
               </a:rPr>
-              <a:t>Claims, decoding ≠ validation, the validation checklist</a:t>
+              <a:t>Decoding ≠ validation; the checklist</a:t>
             </a:r>
             <a:endParaRPr lang="en-US" sz="1250" dirty="0"/>
           </a:p>
@@ -13429,7 +13429,7 @@
                 <a:ea typeface="Arial" pitchFamily="34" charset="-122"/>
                 <a:cs typeface="Arial" pitchFamily="34" charset="-120"/>
               </a:rPr>
-              <a:t>Signing vs encryption; publishing and rotating keys</a:t>
+              <a:t>Signing vs encryption; publishing &amp; rotating keys</a:t>
             </a:r>
             <a:endParaRPr lang="en-US" sz="1250" dirty="0"/>
           </a:p>
@@ -13566,7 +13566,7 @@
                 <a:ea typeface="Arial" pitchFamily="34" charset="-122"/>
                 <a:cs typeface="Arial" pitchFamily="34" charset="-120"/>
               </a:rPr>
-              <a:t>Deprecated flows; attacks mapped to mitigations</a:t>
+              <a:t>Attacks mapped to mitigations</a:t>
             </a:r>
             <a:endParaRPr lang="en-US" sz="1250" dirty="0"/>
           </a:p>
@@ -13703,7 +13703,7 @@
                 <a:ea typeface="Arial" pitchFamily="34" charset="-122"/>
                 <a:cs typeface="Arial" pitchFamily="34" charset="-120"/>
               </a:rPr>
-              <a:t>Harden requests, responses, and token possession</a:t>
+              <a:t>Harden request, response, token</a:t>
             </a:r>
             <a:endParaRPr lang="en-US" sz="1250" dirty="0"/>
           </a:p>
@@ -13926,7 +13926,7 @@
         <p:spPr>
           <a:xfrm>
             <a:off x="640080" y="640080"/>
-            <a:ext cx="10972800" cy="777240"/>
+            <a:ext cx="10972800" cy="822960"/>
           </a:xfrm>
           <a:prstGeom prst="rect">
             <a:avLst/>
@@ -13942,7 +13942,7 @@
               <a:buNone/>
             </a:pPr>
             <a:r>
-              <a:rPr lang="en-US" sz="2600" b="1" dirty="0">
+              <a:rPr lang="en-US" sz="3000" b="1" dirty="0">
                 <a:solidFill>
                   <a:srgbClr val="1F3A5F"/>
                 </a:solidFill>
@@ -13952,7 +13952,7 @@
               </a:rPr>
               <a:t>What the resource server must check</a:t>
             </a:r>
-            <a:endParaRPr lang="en-US" sz="2600" dirty="0"/>
+            <a:endParaRPr lang="en-US" sz="3000" dirty="0"/>
           </a:p>
         </p:txBody>
       </p:sp>
@@ -14042,12 +14042,12 @@
         </p:nvSpPr>
         <p:spPr>
           <a:xfrm>
-            <a:off x="640080" y="1554480"/>
-            <a:ext cx="5349240" cy="3383280"/>
+            <a:off x="640080" y="1645920"/>
+            <a:ext cx="5349240" cy="3200400"/>
           </a:xfrm>
           <a:prstGeom prst="roundRect">
             <a:avLst>
-              <a:gd name="adj" fmla="val 1622"/>
+              <a:gd name="adj" fmla="val 1714"/>
             </a:avLst>
           </a:prstGeom>
           <a:solidFill>
@@ -14076,8 +14076,8 @@
         </p:nvSpPr>
         <p:spPr>
           <a:xfrm>
-            <a:off x="822960" y="1700784"/>
-            <a:ext cx="4983480" cy="310896"/>
+            <a:off x="841248" y="1810512"/>
+            <a:ext cx="4946904" cy="347472"/>
           </a:xfrm>
           <a:prstGeom prst="rect">
             <a:avLst/>
@@ -14093,7 +14093,7 @@
               <a:buNone/>
             </a:pPr>
             <a:r>
-              <a:rPr lang="en-US" sz="1400" b="1" dirty="0">
+              <a:rPr lang="en-US" sz="1600" b="1" dirty="0">
                 <a:solidFill>
                   <a:srgbClr val="1F3A5F"/>
                 </a:solidFill>
@@ -14103,7 +14103,7 @@
               </a:rPr>
               <a:t>Validation checklist</a:t>
             </a:r>
-            <a:endParaRPr lang="en-US" sz="1400" dirty="0"/>
+            <a:endParaRPr lang="en-US" sz="1600" dirty="0"/>
           </a:p>
         </p:txBody>
       </p:sp>
@@ -14115,8 +14115,8 @@
         </p:nvSpPr>
         <p:spPr>
           <a:xfrm>
-            <a:off x="822960" y="2121408"/>
-            <a:ext cx="4983480" cy="2706624"/>
+            <a:off x="841248" y="2286000"/>
+            <a:ext cx="4946904" cy="2432304"/>
           </a:xfrm>
           <a:prstGeom prst="rect">
             <a:avLst/>
@@ -14128,15 +14128,15 @@
           <a:bodyPr wrap="square" lIns="0" tIns="0" rIns="0" bIns="0" rtlCol="0" anchor="t"/>
           <a:lstStyle/>
           <a:p>
-            <a:pPr marL="177800" indent="-177800">
+            <a:pPr marL="203200" indent="-203200">
               <a:spcAft>
-                <a:spcPts val="400"/>
+                <a:spcPts val="800"/>
               </a:spcAft>
               <a:buSzPct val="100000"/>
               <a:buChar char="•"/>
             </a:pPr>
             <a:r>
-              <a:rPr lang="en-US" sz="1300" dirty="0">
+              <a:rPr lang="en-US" sz="1450" dirty="0">
                 <a:solidFill>
                   <a:srgbClr val="1D2733"/>
                 </a:solidFill>
@@ -14146,18 +14146,18 @@
               </a:rPr>
               <a:t>Signature verifies with a trusted key</a:t>
             </a:r>
-            <a:endParaRPr lang="en-US" sz="1300" dirty="0"/>
-          </a:p>
-          <a:p>
-            <a:pPr marL="177800" indent="-177800">
+            <a:endParaRPr lang="en-US" sz="1450" dirty="0"/>
+          </a:p>
+          <a:p>
+            <a:pPr marL="203200" indent="-203200">
               <a:spcAft>
-                <a:spcPts val="400"/>
+                <a:spcPts val="800"/>
               </a:spcAft>
               <a:buSzPct val="100000"/>
               <a:buChar char="•"/>
             </a:pPr>
             <a:r>
-              <a:rPr lang="en-US" sz="1300" dirty="0">
+              <a:rPr lang="en-US" sz="1450" dirty="0">
                 <a:solidFill>
                   <a:srgbClr val="1D2733"/>
                 </a:solidFill>
@@ -14165,20 +14165,20 @@
                 <a:ea typeface="Arial" pitchFamily="34" charset="-122"/>
                 <a:cs typeface="Arial" pitchFamily="34" charset="-120"/>
               </a:rPr>
-              <a:t>alg is expected; kid is a trusted key</a:t>
-            </a:r>
-            <a:endParaRPr lang="en-US" sz="1300" dirty="0"/>
-          </a:p>
-          <a:p>
-            <a:pPr marL="177800" indent="-177800">
+              <a:t>alg expected; kid is trusted</a:t>
+            </a:r>
+            <a:endParaRPr lang="en-US" sz="1450" dirty="0"/>
+          </a:p>
+          <a:p>
+            <a:pPr marL="203200" indent="-203200">
               <a:spcAft>
-                <a:spcPts val="400"/>
+                <a:spcPts val="800"/>
               </a:spcAft>
               <a:buSzPct val="100000"/>
               <a:buChar char="•"/>
             </a:pPr>
             <a:r>
-              <a:rPr lang="en-US" sz="1300" dirty="0">
+              <a:rPr lang="en-US" sz="1450" dirty="0">
                 <a:solidFill>
                   <a:srgbClr val="1D2733"/>
                 </a:solidFill>
@@ -14188,18 +14188,18 @@
               </a:rPr>
               <a:t>iss trusted · aud is this API</a:t>
             </a:r>
-            <a:endParaRPr lang="en-US" sz="1300" dirty="0"/>
-          </a:p>
-          <a:p>
-            <a:pPr marL="177800" indent="-177800">
+            <a:endParaRPr lang="en-US" sz="1450" dirty="0"/>
+          </a:p>
+          <a:p>
+            <a:pPr marL="203200" indent="-203200">
               <a:spcAft>
-                <a:spcPts val="400"/>
+                <a:spcPts val="800"/>
               </a:spcAft>
               <a:buSzPct val="100000"/>
               <a:buChar char="•"/>
             </a:pPr>
             <a:r>
-              <a:rPr lang="en-US" sz="1300" dirty="0">
+              <a:rPr lang="en-US" sz="1450" dirty="0">
                 <a:solidFill>
                   <a:srgbClr val="1D2733"/>
                 </a:solidFill>
@@ -14209,18 +14209,18 @@
               </a:rPr>
               <a:t>exp / nbf valid in time</a:t>
             </a:r>
-            <a:endParaRPr lang="en-US" sz="1300" dirty="0"/>
-          </a:p>
-          <a:p>
-            <a:pPr marL="177800" indent="-177800">
+            <a:endParaRPr lang="en-US" sz="1450" dirty="0"/>
+          </a:p>
+          <a:p>
+            <a:pPr marL="203200" indent="-203200">
               <a:spcAft>
-                <a:spcPts val="400"/>
+                <a:spcPts val="800"/>
               </a:spcAft>
               <a:buSzPct val="100000"/>
               <a:buChar char="•"/>
             </a:pPr>
             <a:r>
-              <a:rPr lang="en-US" sz="1300" dirty="0">
+              <a:rPr lang="en-US" sz="1450" dirty="0">
                 <a:solidFill>
                   <a:srgbClr val="1D2733"/>
                 </a:solidFill>
@@ -14228,9 +14228,9 @@
                 <a:ea typeface="Arial" pitchFamily="34" charset="-122"/>
                 <a:cs typeface="Arial" pitchFamily="34" charset="-120"/>
               </a:rPr>
-              <a:t>scope sufficient · correct token type</a:t>
-            </a:r>
-            <a:endParaRPr lang="en-US" sz="1300" dirty="0"/>
+              <a:t>scope sufficient</a:t>
+            </a:r>
+            <a:endParaRPr lang="en-US" sz="1450" dirty="0"/>
           </a:p>
         </p:txBody>
       </p:sp>
@@ -14242,12 +14242,12 @@
         </p:nvSpPr>
         <p:spPr>
           <a:xfrm>
-            <a:off x="6309360" y="1554480"/>
-            <a:ext cx="5349240" cy="3383280"/>
+            <a:off x="6309360" y="1645920"/>
+            <a:ext cx="5349240" cy="3200400"/>
           </a:xfrm>
           <a:prstGeom prst="roundRect">
             <a:avLst>
-              <a:gd name="adj" fmla="val 1622"/>
+              <a:gd name="adj" fmla="val 1714"/>
             </a:avLst>
           </a:prstGeom>
           <a:solidFill>
@@ -14276,8 +14276,8 @@
         </p:nvSpPr>
         <p:spPr>
           <a:xfrm>
-            <a:off x="6492240" y="1700784"/>
-            <a:ext cx="4983480" cy="310896"/>
+            <a:off x="6510528" y="1810512"/>
+            <a:ext cx="4946904" cy="347472"/>
           </a:xfrm>
           <a:prstGeom prst="rect">
             <a:avLst/>
@@ -14293,7 +14293,7 @@
               <a:buNone/>
             </a:pPr>
             <a:r>
-              <a:rPr lang="en-US" sz="1400" b="1" dirty="0">
+              <a:rPr lang="en-US" sz="1600" b="1" dirty="0">
                 <a:solidFill>
                   <a:srgbClr val="0F8A7E"/>
                 </a:solidFill>
@@ -14303,7 +14303,7 @@
               </a:rPr>
               <a:t>Reject for the right reason</a:t>
             </a:r>
-            <a:endParaRPr lang="en-US" sz="1400" dirty="0"/>
+            <a:endParaRPr lang="en-US" sz="1600" dirty="0"/>
           </a:p>
         </p:txBody>
       </p:sp>
@@ -14315,8 +14315,8 @@
         </p:nvSpPr>
         <p:spPr>
           <a:xfrm>
-            <a:off x="6492240" y="2121408"/>
-            <a:ext cx="4983480" cy="2706624"/>
+            <a:off x="6510528" y="2286000"/>
+            <a:ext cx="4946904" cy="2432304"/>
           </a:xfrm>
           <a:prstGeom prst="rect">
             <a:avLst/>
@@ -14328,15 +14328,15 @@
           <a:bodyPr wrap="square" lIns="0" tIns="0" rIns="0" bIns="0" rtlCol="0" anchor="t"/>
           <a:lstStyle/>
           <a:p>
-            <a:pPr marL="177800" indent="-177800">
+            <a:pPr marL="203200" indent="-203200">
               <a:spcAft>
-                <a:spcPts val="400"/>
+                <a:spcPts val="800"/>
               </a:spcAft>
               <a:buSzPct val="100000"/>
               <a:buChar char="•"/>
             </a:pPr>
             <a:r>
-              <a:rPr lang="en-US" sz="1300" dirty="0">
+              <a:rPr lang="en-US" sz="1450" dirty="0">
                 <a:solidFill>
                   <a:srgbClr val="1D2733"/>
                 </a:solidFill>
@@ -14344,20 +14344,20 @@
                 <a:ea typeface="Arial" pitchFamily="34" charset="-122"/>
                 <a:cs typeface="Arial" pitchFamily="34" charset="-120"/>
               </a:rPr>
-              <a:t>401 Unauthorized — missing, expired, malformed, invalid token</a:t>
-            </a:r>
-            <a:endParaRPr lang="en-US" sz="1300" dirty="0"/>
-          </a:p>
-          <a:p>
-            <a:pPr marL="177800" indent="-177800">
+              <a:t>401 — missing / expired / bad token</a:t>
+            </a:r>
+            <a:endParaRPr lang="en-US" sz="1450" dirty="0"/>
+          </a:p>
+          <a:p>
+            <a:pPr marL="203200" indent="-203200">
               <a:spcAft>
-                <a:spcPts val="400"/>
+                <a:spcPts val="800"/>
               </a:spcAft>
               <a:buSzPct val="100000"/>
               <a:buChar char="•"/>
             </a:pPr>
             <a:r>
-              <a:rPr lang="en-US" sz="1300" dirty="0">
+              <a:rPr lang="en-US" sz="1450" dirty="0">
                 <a:solidFill>
                   <a:srgbClr val="1D2733"/>
                 </a:solidFill>
@@ -14365,20 +14365,20 @@
                 <a:ea typeface="Arial" pitchFamily="34" charset="-122"/>
                 <a:cs typeface="Arial" pitchFamily="34" charset="-120"/>
               </a:rPr>
-              <a:t>403 Forbidden — valid token, but not enough scope</a:t>
-            </a:r>
-            <a:endParaRPr lang="en-US" sz="1300" dirty="0"/>
-          </a:p>
-          <a:p>
-            <a:pPr marL="177800" indent="-177800">
+              <a:t>403 — valid token, not enough scope</a:t>
+            </a:r>
+            <a:endParaRPr lang="en-US" sz="1450" dirty="0"/>
+          </a:p>
+          <a:p>
+            <a:pPr marL="203200" indent="-203200">
               <a:spcAft>
-                <a:spcPts val="400"/>
+                <a:spcPts val="800"/>
               </a:spcAft>
               <a:buSzPct val="100000"/>
               <a:buChar char="•"/>
             </a:pPr>
             <a:r>
-              <a:rPr lang="en-US" sz="1300" dirty="0">
+              <a:rPr lang="en-US" sz="1450" dirty="0">
                 <a:solidFill>
                   <a:srgbClr val="1D2733"/>
                 </a:solidFill>
@@ -14386,9 +14386,9 @@
                 <a:ea typeface="Arial" pitchFamily="34" charset="-122"/>
                 <a:cs typeface="Arial" pitchFamily="34" charset="-120"/>
               </a:rPr>
-              <a:t>Opaque (non-JWT) token? Call the introspection endpoint</a:t>
-            </a:r>
-            <a:endParaRPr lang="en-US" sz="1300" dirty="0"/>
+              <a:t>Opaque (non-JWT) token → introspect</a:t>
+            </a:r>
+            <a:endParaRPr lang="en-US" sz="1450" dirty="0"/>
           </a:p>
         </p:txBody>
       </p:sp>
@@ -14660,7 +14660,7 @@
         <p:spPr>
           <a:xfrm>
             <a:off x="640080" y="640080"/>
-            <a:ext cx="10972800" cy="777240"/>
+            <a:ext cx="10972800" cy="822960"/>
           </a:xfrm>
           <a:prstGeom prst="rect">
             <a:avLst/>
@@ -14676,7 +14676,7 @@
               <a:buNone/>
             </a:pPr>
             <a:r>
-              <a:rPr lang="en-US" sz="2600" b="1" dirty="0">
+              <a:rPr lang="en-US" sz="3000" b="1" dirty="0">
                 <a:solidFill>
                   <a:srgbClr val="1F3A5F"/>
                 </a:solidFill>
@@ -14686,7 +14686,7 @@
               </a:rPr>
               <a:t>Five pieces that fit together</a:t>
             </a:r>
-            <a:endParaRPr lang="en-US" sz="2600" dirty="0"/>
+            <a:endParaRPr lang="en-US" sz="3000" dirty="0"/>
           </a:p>
         </p:txBody>
       </p:sp>
@@ -14783,7 +14783,7 @@
           </p:nvPr>
         </p:nvGraphicFramePr>
         <p:xfrm>
-          <a:off x="640080" y="1554480"/>
+          <a:off x="640080" y="1645920"/>
           <a:ext cx="10881360" cy="914400"/>
         </p:xfrm>
         <a:graphic>
@@ -14794,7 +14794,7 @@
                 <a:gridCol w="2011680"/>
                 <a:gridCol w="8869680"/>
               </a:tblGrid>
-              <a:tr h="420624">
+              <a:tr h="457200">
                 <a:tc>
                   <a:txBody>
                     <a:bodyPr/>
@@ -14804,7 +14804,7 @@
                         <a:buNone/>
                       </a:pPr>
                       <a:r>
-                        <a:rPr lang="en-US" sz="1250" b="1" dirty="0">
+                        <a:rPr lang="en-US" sz="1300" b="1" dirty="0">
                           <a:solidFill>
                             <a:srgbClr val="FFFFFF"/>
                           </a:solidFill>
@@ -14814,7 +14814,7 @@
                         </a:rPr>
                         <a:t>Term</a:t>
                       </a:r>
-                      <a:endParaRPr lang="en-US" sz="1250" dirty="0">
+                      <a:endParaRPr lang="en-US" sz="1300" dirty="0">
                         <a:latin typeface="Arial" charset="0"/>
                         <a:ea typeface="Arial" charset="0"/>
                         <a:cs typeface="Arial" charset="0"/>
@@ -14872,7 +14872,7 @@
                         <a:buNone/>
                       </a:pPr>
                       <a:r>
-                        <a:rPr lang="en-US" sz="1250" b="1" dirty="0">
+                        <a:rPr lang="en-US" sz="1300" b="1" dirty="0">
                           <a:solidFill>
                             <a:srgbClr val="FFFFFF"/>
                           </a:solidFill>
@@ -14882,7 +14882,7 @@
                         </a:rPr>
                         <a:t>Purpose</a:t>
                       </a:r>
-                      <a:endParaRPr lang="en-US" sz="1250" dirty="0">
+                      <a:endParaRPr lang="en-US" sz="1300" dirty="0">
                         <a:latin typeface="Arial" charset="0"/>
                         <a:ea typeface="Arial" charset="0"/>
                         <a:cs typeface="Arial" charset="0"/>
@@ -14932,7 +14932,7 @@
                   </a:tcPr>
                 </a:tc>
               </a:tr>
-              <a:tr h="420624">
+              <a:tr h="457200">
                 <a:tc>
                   <a:txBody>
                     <a:bodyPr/>
@@ -14942,7 +14942,7 @@
                         <a:buNone/>
                       </a:pPr>
                       <a:r>
-                        <a:rPr lang="en-US" sz="1200" dirty="0">
+                        <a:rPr lang="en-US" sz="1250" dirty="0">
                           <a:solidFill>
                             <a:srgbClr val="1D2733"/>
                           </a:solidFill>
@@ -14952,7 +14952,7 @@
                         </a:rPr>
                         <a:t>JWT</a:t>
                       </a:r>
-                      <a:endParaRPr lang="en-US" sz="1200" dirty="0">
+                      <a:endParaRPr lang="en-US" sz="1250" dirty="0">
                         <a:latin typeface="Arial" charset="0"/>
                         <a:ea typeface="Arial" charset="0"/>
                         <a:cs typeface="Arial" charset="0"/>
@@ -15010,7 +15010,7 @@
                         <a:buNone/>
                       </a:pPr>
                       <a:r>
-                        <a:rPr lang="en-US" sz="1200" dirty="0">
+                        <a:rPr lang="en-US" sz="1250" dirty="0">
                           <a:solidFill>
                             <a:srgbClr val="1D2733"/>
                           </a:solidFill>
@@ -15020,7 +15020,7 @@
                         </a:rPr>
                         <a:t>Compact claims format (the container)</a:t>
                       </a:r>
-                      <a:endParaRPr lang="en-US" sz="1200" dirty="0">
+                      <a:endParaRPr lang="en-US" sz="1250" dirty="0">
                         <a:latin typeface="Arial" charset="0"/>
                         <a:ea typeface="Arial" charset="0"/>
                         <a:cs typeface="Arial" charset="0"/>
@@ -15070,7 +15070,7 @@
                   </a:tcPr>
                 </a:tc>
               </a:tr>
-              <a:tr h="420624">
+              <a:tr h="457200">
                 <a:tc>
                   <a:txBody>
                     <a:bodyPr/>
@@ -15080,7 +15080,7 @@
                         <a:buNone/>
                       </a:pPr>
                       <a:r>
-                        <a:rPr lang="en-US" sz="1200" dirty="0">
+                        <a:rPr lang="en-US" sz="1250" dirty="0">
                           <a:solidFill>
                             <a:srgbClr val="1D2733"/>
                           </a:solidFill>
@@ -15090,7 +15090,7 @@
                         </a:rPr>
                         <a:t>JWS</a:t>
                       </a:r>
-                      <a:endParaRPr lang="en-US" sz="1200" dirty="0">
+                      <a:endParaRPr lang="en-US" sz="1250" dirty="0">
                         <a:latin typeface="Arial" charset="0"/>
                         <a:ea typeface="Arial" charset="0"/>
                         <a:cs typeface="Arial" charset="0"/>
@@ -15148,7 +15148,7 @@
                         <a:buNone/>
                       </a:pPr>
                       <a:r>
-                        <a:rPr lang="en-US" sz="1200" dirty="0">
+                        <a:rPr lang="en-US" sz="1250" dirty="0">
                           <a:solidFill>
                             <a:srgbClr val="1D2733"/>
                           </a:solidFill>
@@ -15158,7 +15158,7 @@
                         </a:rPr>
                         <a:t>Signature — integrity / authenticity</a:t>
                       </a:r>
-                      <a:endParaRPr lang="en-US" sz="1200" dirty="0">
+                      <a:endParaRPr lang="en-US" sz="1250" dirty="0">
                         <a:latin typeface="Arial" charset="0"/>
                         <a:ea typeface="Arial" charset="0"/>
                         <a:cs typeface="Arial" charset="0"/>
@@ -15208,7 +15208,7 @@
                   </a:tcPr>
                 </a:tc>
               </a:tr>
-              <a:tr h="420624">
+              <a:tr h="457200">
                 <a:tc>
                   <a:txBody>
                     <a:bodyPr/>
@@ -15218,7 +15218,7 @@
                         <a:buNone/>
                       </a:pPr>
                       <a:r>
-                        <a:rPr lang="en-US" sz="1200" dirty="0">
+                        <a:rPr lang="en-US" sz="1250" dirty="0">
                           <a:solidFill>
                             <a:srgbClr val="1D2733"/>
                           </a:solidFill>
@@ -15228,7 +15228,7 @@
                         </a:rPr>
                         <a:t>JWE</a:t>
                       </a:r>
-                      <a:endParaRPr lang="en-US" sz="1200" dirty="0">
+                      <a:endParaRPr lang="en-US" sz="1250" dirty="0">
                         <a:latin typeface="Arial" charset="0"/>
                         <a:ea typeface="Arial" charset="0"/>
                         <a:cs typeface="Arial" charset="0"/>
@@ -15286,7 +15286,7 @@
                         <a:buNone/>
                       </a:pPr>
                       <a:r>
-                        <a:rPr lang="en-US" sz="1200" dirty="0">
+                        <a:rPr lang="en-US" sz="1250" dirty="0">
                           <a:solidFill>
                             <a:srgbClr val="1D2733"/>
                           </a:solidFill>
@@ -15296,7 +15296,7 @@
                         </a:rPr>
                         <a:t>Encryption — confidentiality</a:t>
                       </a:r>
-                      <a:endParaRPr lang="en-US" sz="1200" dirty="0">
+                      <a:endParaRPr lang="en-US" sz="1250" dirty="0">
                         <a:latin typeface="Arial" charset="0"/>
                         <a:ea typeface="Arial" charset="0"/>
                         <a:cs typeface="Arial" charset="0"/>
@@ -15346,7 +15346,7 @@
                   </a:tcPr>
                 </a:tc>
               </a:tr>
-              <a:tr h="420624">
+              <a:tr h="457200">
                 <a:tc>
                   <a:txBody>
                     <a:bodyPr/>
@@ -15356,7 +15356,7 @@
                         <a:buNone/>
                       </a:pPr>
                       <a:r>
-                        <a:rPr lang="en-US" sz="1200" dirty="0">
+                        <a:rPr lang="en-US" sz="1250" dirty="0">
                           <a:solidFill>
                             <a:srgbClr val="1D2733"/>
                           </a:solidFill>
@@ -15366,7 +15366,7 @@
                         </a:rPr>
                         <a:t>JWK</a:t>
                       </a:r>
-                      <a:endParaRPr lang="en-US" sz="1200" dirty="0">
+                      <a:endParaRPr lang="en-US" sz="1250" dirty="0">
                         <a:latin typeface="Arial" charset="0"/>
                         <a:ea typeface="Arial" charset="0"/>
                         <a:cs typeface="Arial" charset="0"/>
@@ -15424,7 +15424,7 @@
                         <a:buNone/>
                       </a:pPr>
                       <a:r>
-                        <a:rPr lang="en-US" sz="1200" dirty="0">
+                        <a:rPr lang="en-US" sz="1250" dirty="0">
                           <a:solidFill>
                             <a:srgbClr val="1D2733"/>
                           </a:solidFill>
@@ -15434,7 +15434,7 @@
                         </a:rPr>
                         <a:t>JSON representation of one key</a:t>
                       </a:r>
-                      <a:endParaRPr lang="en-US" sz="1200" dirty="0">
+                      <a:endParaRPr lang="en-US" sz="1250" dirty="0">
                         <a:latin typeface="Arial" charset="0"/>
                         <a:ea typeface="Arial" charset="0"/>
                         <a:cs typeface="Arial" charset="0"/>
@@ -15484,7 +15484,7 @@
                   </a:tcPr>
                 </a:tc>
               </a:tr>
-              <a:tr h="420624">
+              <a:tr h="457200">
                 <a:tc>
                   <a:txBody>
                     <a:bodyPr/>
@@ -15494,7 +15494,7 @@
                         <a:buNone/>
                       </a:pPr>
                       <a:r>
-                        <a:rPr lang="en-US" sz="1200" dirty="0">
+                        <a:rPr lang="en-US" sz="1250" dirty="0">
                           <a:solidFill>
                             <a:srgbClr val="1D2733"/>
                           </a:solidFill>
@@ -15504,7 +15504,7 @@
                         </a:rPr>
                         <a:t>JWKS</a:t>
                       </a:r>
-                      <a:endParaRPr lang="en-US" sz="1200" dirty="0">
+                      <a:endParaRPr lang="en-US" sz="1250" dirty="0">
                         <a:latin typeface="Arial" charset="0"/>
                         <a:ea typeface="Arial" charset="0"/>
                         <a:cs typeface="Arial" charset="0"/>
@@ -15562,7 +15562,7 @@
                         <a:buNone/>
                       </a:pPr>
                       <a:r>
-                        <a:rPr lang="en-US" sz="1200" dirty="0">
+                        <a:rPr lang="en-US" sz="1250" dirty="0">
                           <a:solidFill>
                             <a:srgbClr val="1D2733"/>
                           </a:solidFill>
@@ -15572,7 +15572,7 @@
                         </a:rPr>
                         <a:t>A published set of keys (selected by kid)</a:t>
                       </a:r>
-                      <a:endParaRPr lang="en-US" sz="1200" dirty="0">
+                      <a:endParaRPr lang="en-US" sz="1250" dirty="0">
                         <a:latin typeface="Arial" charset="0"/>
                         <a:ea typeface="Arial" charset="0"/>
                         <a:cs typeface="Arial" charset="0"/>
@@ -15634,8 +15634,8 @@
         </p:nvSpPr>
         <p:spPr>
           <a:xfrm>
-            <a:off x="640080" y="4480560"/>
-            <a:ext cx="10972800" cy="365760"/>
+            <a:off x="640080" y="4572000"/>
+            <a:ext cx="10972800" cy="457200"/>
           </a:xfrm>
           <a:prstGeom prst="rect">
             <a:avLst/>
@@ -15651,7 +15651,7 @@
               <a:buNone/>
             </a:pPr>
             <a:r>
-              <a:rPr lang="en-US" sz="1450" b="1" dirty="0">
+              <a:rPr lang="en-US" sz="1600" b="1" dirty="0">
                 <a:solidFill>
                   <a:srgbClr val="1F3A5F"/>
                 </a:solidFill>
@@ -15659,9 +15659,9 @@
                 <a:ea typeface="Arial" pitchFamily="34" charset="-122"/>
                 <a:cs typeface="Arial" pitchFamily="34" charset="-120"/>
               </a:rPr>
-              <a:t>JWS proves the content was not modified. JWE hides the content.</a:t>
-            </a:r>
-            <a:endParaRPr lang="en-US" sz="1450" dirty="0"/>
+              <a:t>JWS proves the content wasn't modified. JWE hides the content.</a:t>
+            </a:r>
+            <a:endParaRPr lang="en-US" sz="1600" dirty="0"/>
           </a:p>
         </p:txBody>
       </p:sp>
@@ -15745,7 +15745,7 @@
         <p:spPr>
           <a:xfrm>
             <a:off x="640080" y="640080"/>
-            <a:ext cx="10972800" cy="777240"/>
+            <a:ext cx="10972800" cy="822960"/>
           </a:xfrm>
           <a:prstGeom prst="rect">
             <a:avLst/>
@@ -15761,7 +15761,7 @@
               <a:buNone/>
             </a:pPr>
             <a:r>
-              <a:rPr lang="en-US" sz="2600" b="1" dirty="0">
+              <a:rPr lang="en-US" sz="3000" b="1" dirty="0">
                 <a:solidFill>
                   <a:srgbClr val="1F3A5F"/>
                 </a:solidFill>
@@ -15771,7 +15771,7 @@
               </a:rPr>
               <a:t>Where the verifier gets the key</a:t>
             </a:r>
-            <a:endParaRPr lang="en-US" sz="2600" dirty="0"/>
+            <a:endParaRPr lang="en-US" sz="3000" dirty="0"/>
           </a:p>
         </p:txBody>
       </p:sp>
@@ -15861,12 +15861,12 @@
         </p:nvSpPr>
         <p:spPr>
           <a:xfrm>
-            <a:off x="640080" y="1554480"/>
-            <a:ext cx="5349240" cy="3291840"/>
+            <a:off x="640080" y="1645920"/>
+            <a:ext cx="5349240" cy="3108960"/>
           </a:xfrm>
           <a:prstGeom prst="roundRect">
             <a:avLst>
-              <a:gd name="adj" fmla="val 1667"/>
+              <a:gd name="adj" fmla="val 1765"/>
             </a:avLst>
           </a:prstGeom>
           <a:solidFill>
@@ -15895,8 +15895,8 @@
         </p:nvSpPr>
         <p:spPr>
           <a:xfrm>
-            <a:off x="822960" y="1700784"/>
-            <a:ext cx="4983480" cy="310896"/>
+            <a:off x="841248" y="1810512"/>
+            <a:ext cx="4946904" cy="347472"/>
           </a:xfrm>
           <a:prstGeom prst="rect">
             <a:avLst/>
@@ -15912,7 +15912,7 @@
               <a:buNone/>
             </a:pPr>
             <a:r>
-              <a:rPr lang="en-US" sz="1400" b="1" dirty="0">
+              <a:rPr lang="en-US" sz="1600" b="1" dirty="0">
                 <a:solidFill>
                   <a:srgbClr val="1F3A5F"/>
                 </a:solidFill>
@@ -15922,7 +15922,7 @@
               </a:rPr>
               <a:t>How verification works</a:t>
             </a:r>
-            <a:endParaRPr lang="en-US" sz="1400" dirty="0"/>
+            <a:endParaRPr lang="en-US" sz="1600" dirty="0"/>
           </a:p>
         </p:txBody>
       </p:sp>
@@ -15934,8 +15934,8 @@
         </p:nvSpPr>
         <p:spPr>
           <a:xfrm>
-            <a:off x="822960" y="2121408"/>
-            <a:ext cx="4983480" cy="2615184"/>
+            <a:off x="841248" y="2286000"/>
+            <a:ext cx="4946904" cy="2340864"/>
           </a:xfrm>
           <a:prstGeom prst="rect">
             <a:avLst/>
@@ -15947,15 +15947,15 @@
           <a:bodyPr wrap="square" lIns="0" tIns="0" rIns="0" bIns="0" rtlCol="0" anchor="t"/>
           <a:lstStyle/>
           <a:p>
-            <a:pPr marL="177800" indent="-177800">
+            <a:pPr marL="203200" indent="-203200">
               <a:spcAft>
-                <a:spcPts val="400"/>
+                <a:spcPts val="800"/>
               </a:spcAft>
               <a:buSzPct val="100000"/>
               <a:buChar char="•"/>
             </a:pPr>
             <a:r>
-              <a:rPr lang="en-US" sz="1300" dirty="0">
+              <a:rPr lang="en-US" sz="1450" dirty="0">
                 <a:solidFill>
                   <a:srgbClr val="1D2733"/>
                 </a:solidFill>
@@ -15965,18 +15965,18 @@
               </a:rPr>
               <a:t>AS signs with its private key</a:t>
             </a:r>
-            <a:endParaRPr lang="en-US" sz="1300" dirty="0"/>
-          </a:p>
-          <a:p>
-            <a:pPr marL="177800" indent="-177800">
+            <a:endParaRPr lang="en-US" sz="1450" dirty="0"/>
+          </a:p>
+          <a:p>
+            <a:pPr marL="203200" indent="-203200">
               <a:spcAft>
-                <a:spcPts val="400"/>
+                <a:spcPts val="800"/>
               </a:spcAft>
               <a:buSzPct val="100000"/>
               <a:buChar char="•"/>
             </a:pPr>
             <a:r>
-              <a:rPr lang="en-US" sz="1300" dirty="0">
+              <a:rPr lang="en-US" sz="1450" dirty="0">
                 <a:solidFill>
                   <a:srgbClr val="1D2733"/>
                 </a:solidFill>
@@ -15986,18 +15986,18 @@
               </a:rPr>
               <a:t>AS publishes the public key in JWKS</a:t>
             </a:r>
-            <a:endParaRPr lang="en-US" sz="1300" dirty="0"/>
-          </a:p>
-          <a:p>
-            <a:pPr marL="177800" indent="-177800">
+            <a:endParaRPr lang="en-US" sz="1450" dirty="0"/>
+          </a:p>
+          <a:p>
+            <a:pPr marL="203200" indent="-203200">
               <a:spcAft>
-                <a:spcPts val="400"/>
+                <a:spcPts val="800"/>
               </a:spcAft>
               <a:buSzPct val="100000"/>
               <a:buChar char="•"/>
             </a:pPr>
             <a:r>
-              <a:rPr lang="en-US" sz="1300" dirty="0">
+              <a:rPr lang="en-US" sz="1450" dirty="0">
                 <a:solidFill>
                   <a:srgbClr val="1D2733"/>
                 </a:solidFill>
@@ -16005,20 +16005,20 @@
                 <a:ea typeface="Arial" pitchFamily="34" charset="-122"/>
                 <a:cs typeface="Arial" pitchFamily="34" charset="-120"/>
               </a:rPr>
-              <a:t>Resource server fetches JWKS from a trusted jwks_uri</a:t>
-            </a:r>
-            <a:endParaRPr lang="en-US" sz="1300" dirty="0"/>
-          </a:p>
-          <a:p>
-            <a:pPr marL="177800" indent="-177800">
+              <a:t>RS fetches JWKS from a trusted uri</a:t>
+            </a:r>
+            <a:endParaRPr lang="en-US" sz="1450" dirty="0"/>
+          </a:p>
+          <a:p>
+            <a:pPr marL="203200" indent="-203200">
               <a:spcAft>
-                <a:spcPts val="400"/>
+                <a:spcPts val="800"/>
               </a:spcAft>
               <a:buSzPct val="100000"/>
               <a:buChar char="•"/>
             </a:pPr>
             <a:r>
-              <a:rPr lang="en-US" sz="1300" dirty="0">
+              <a:rPr lang="en-US" sz="1450" dirty="0">
                 <a:solidFill>
                   <a:srgbClr val="1D2733"/>
                 </a:solidFill>
@@ -16026,9 +16026,9 @@
                 <a:ea typeface="Arial" pitchFamily="34" charset="-122"/>
                 <a:cs typeface="Arial" pitchFamily="34" charset="-120"/>
               </a:rPr>
-              <a:t>Selects the key by kid, then verifies</a:t>
-            </a:r>
-            <a:endParaRPr lang="en-US" sz="1300" dirty="0"/>
+              <a:t>Selects by kid, then verifies</a:t>
+            </a:r>
+            <a:endParaRPr lang="en-US" sz="1450" dirty="0"/>
           </a:p>
         </p:txBody>
       </p:sp>
@@ -16040,12 +16040,12 @@
         </p:nvSpPr>
         <p:spPr>
           <a:xfrm>
-            <a:off x="6309360" y="1554480"/>
-            <a:ext cx="5349240" cy="3291840"/>
+            <a:off x="6309360" y="1645920"/>
+            <a:ext cx="5349240" cy="3108960"/>
           </a:xfrm>
           <a:prstGeom prst="roundRect">
             <a:avLst>
-              <a:gd name="adj" fmla="val 1667"/>
+              <a:gd name="adj" fmla="val 1765"/>
             </a:avLst>
           </a:prstGeom>
           <a:solidFill>
@@ -16074,8 +16074,8 @@
         </p:nvSpPr>
         <p:spPr>
           <a:xfrm>
-            <a:off x="6492240" y="1700784"/>
-            <a:ext cx="4983480" cy="310896"/>
+            <a:off x="6510528" y="1810512"/>
+            <a:ext cx="4946904" cy="347472"/>
           </a:xfrm>
           <a:prstGeom prst="rect">
             <a:avLst/>
@@ -16091,7 +16091,7 @@
               <a:buNone/>
             </a:pPr>
             <a:r>
-              <a:rPr lang="en-US" sz="1400" b="1" dirty="0">
+              <a:rPr lang="en-US" sz="1600" b="1" dirty="0">
                 <a:solidFill>
                   <a:srgbClr val="C0492F"/>
                 </a:solidFill>
@@ -16101,7 +16101,7 @@
               </a:rPr>
               <a:t>Common alg / kid mistakes</a:t>
             </a:r>
-            <a:endParaRPr lang="en-US" sz="1400" dirty="0"/>
+            <a:endParaRPr lang="en-US" sz="1600" dirty="0"/>
           </a:p>
         </p:txBody>
       </p:sp>
@@ -16113,8 +16113,8 @@
         </p:nvSpPr>
         <p:spPr>
           <a:xfrm>
-            <a:off x="6492240" y="2121408"/>
-            <a:ext cx="4983480" cy="2615184"/>
+            <a:off x="6510528" y="2286000"/>
+            <a:ext cx="4946904" cy="2340864"/>
           </a:xfrm>
           <a:prstGeom prst="rect">
             <a:avLst/>
@@ -16126,15 +16126,15 @@
           <a:bodyPr wrap="square" lIns="0" tIns="0" rIns="0" bIns="0" rtlCol="0" anchor="t"/>
           <a:lstStyle/>
           <a:p>
-            <a:pPr marL="177800" indent="-177800">
+            <a:pPr marL="203200" indent="-203200">
               <a:spcAft>
-                <a:spcPts val="400"/>
+                <a:spcPts val="800"/>
               </a:spcAft>
               <a:buSzPct val="100000"/>
               <a:buChar char="•"/>
             </a:pPr>
             <a:r>
-              <a:rPr lang="en-US" sz="1300" dirty="0">
+              <a:rPr lang="en-US" sz="1450" dirty="0">
                 <a:solidFill>
                   <a:srgbClr val="1D2733"/>
                 </a:solidFill>
@@ -16142,20 +16142,20 @@
                 <a:ea typeface="Arial" pitchFamily="34" charset="-122"/>
                 <a:cs typeface="Arial" pitchFamily="34" charset="-120"/>
               </a:rPr>
-              <a:t>Accepting alg=none (unsigned tokens)</a:t>
-            </a:r>
-            <a:endParaRPr lang="en-US" sz="1300" dirty="0"/>
-          </a:p>
-          <a:p>
-            <a:pPr marL="177800" indent="-177800">
+              <a:t>Accepting alg=none</a:t>
+            </a:r>
+            <a:endParaRPr lang="en-US" sz="1450" dirty="0"/>
+          </a:p>
+          <a:p>
+            <a:pPr marL="203200" indent="-203200">
               <a:spcAft>
-                <a:spcPts val="400"/>
+                <a:spcPts val="800"/>
               </a:spcAft>
               <a:buSzPct val="100000"/>
               <a:buChar char="•"/>
             </a:pPr>
             <a:r>
-              <a:rPr lang="en-US" sz="1300" dirty="0">
+              <a:rPr lang="en-US" sz="1450" dirty="0">
                 <a:solidFill>
                   <a:srgbClr val="1D2733"/>
                 </a:solidFill>
@@ -16163,20 +16163,20 @@
                 <a:ea typeface="Arial" pitchFamily="34" charset="-122"/>
                 <a:cs typeface="Arial" pitchFamily="34" charset="-120"/>
               </a:rPr>
-              <a:t>Accepting any algorithm from the token header</a:t>
-            </a:r>
-            <a:endParaRPr lang="en-US" sz="1300" dirty="0"/>
-          </a:p>
-          <a:p>
-            <a:pPr marL="177800" indent="-177800">
+              <a:t>Trusting the token's algorithm</a:t>
+            </a:r>
+            <a:endParaRPr lang="en-US" sz="1450" dirty="0"/>
+          </a:p>
+          <a:p>
+            <a:pPr marL="203200" indent="-203200">
               <a:spcAft>
-                <a:spcPts val="400"/>
+                <a:spcPts val="800"/>
               </a:spcAft>
               <a:buSzPct val="100000"/>
               <a:buChar char="•"/>
             </a:pPr>
             <a:r>
-              <a:rPr lang="en-US" sz="1300" dirty="0">
+              <a:rPr lang="en-US" sz="1450" dirty="0">
                 <a:solidFill>
                   <a:srgbClr val="1D2733"/>
                 </a:solidFill>
@@ -16184,20 +16184,20 @@
                 <a:ea typeface="Arial" pitchFamily="34" charset="-122"/>
                 <a:cs typeface="Arial" pitchFamily="34" charset="-120"/>
               </a:rPr>
-              <a:t>Fetching keys from a URL the token controls</a:t>
-            </a:r>
-            <a:endParaRPr lang="en-US" sz="1300" dirty="0"/>
-          </a:p>
-          <a:p>
-            <a:pPr marL="177800" indent="-177800">
+              <a:t>Keys from a token-controlled URL</a:t>
+            </a:r>
+            <a:endParaRPr lang="en-US" sz="1450" dirty="0"/>
+          </a:p>
+          <a:p>
+            <a:pPr marL="203200" indent="-203200">
               <a:spcAft>
-                <a:spcPts val="400"/>
+                <a:spcPts val="800"/>
               </a:spcAft>
               <a:buSzPct val="100000"/>
               <a:buChar char="•"/>
             </a:pPr>
             <a:r>
-              <a:rPr lang="en-US" sz="1300" dirty="0">
+              <a:rPr lang="en-US" sz="1450" dirty="0">
                 <a:solidFill>
                   <a:srgbClr val="1D2733"/>
                 </a:solidFill>
@@ -16205,9 +16205,9 @@
                 <a:ea typeface="Arial" pitchFamily="34" charset="-122"/>
                 <a:cs typeface="Arial" pitchFamily="34" charset="-120"/>
               </a:rPr>
-              <a:t>Removing an old key before old tokens expire</a:t>
-            </a:r>
-            <a:endParaRPr lang="en-US" sz="1300" dirty="0"/>
+              <a:t>Dropping an old key too early</a:t>
+            </a:r>
+            <a:endParaRPr lang="en-US" sz="1450" dirty="0"/>
           </a:p>
         </p:txBody>
       </p:sp>
@@ -16219,8 +16219,8 @@
         </p:nvSpPr>
         <p:spPr>
           <a:xfrm>
-            <a:off x="640080" y="5029200"/>
-            <a:ext cx="10972800" cy="365760"/>
+            <a:off x="640080" y="4937760"/>
+            <a:ext cx="10972800" cy="457200"/>
           </a:xfrm>
           <a:prstGeom prst="rect">
             <a:avLst/>
@@ -16236,7 +16236,7 @@
               <a:buNone/>
             </a:pPr>
             <a:r>
-              <a:rPr lang="en-US" sz="1350" b="1" dirty="0">
+              <a:rPr lang="en-US" sz="1600" b="1" dirty="0">
                 <a:solidFill>
                   <a:srgbClr val="1F3A5F"/>
                 </a:solidFill>
@@ -16244,9 +16244,9 @@
                 <a:ea typeface="Arial" pitchFamily="34" charset="-122"/>
                 <a:cs typeface="Arial" pitchFamily="34" charset="-120"/>
               </a:rPr>
-              <a:t>Allowed algorithms and key sources come from configuration — never from the token.</a:t>
-            </a:r>
-            <a:endParaRPr lang="en-US" sz="1350" dirty="0"/>
+              <a:t>Allowed algorithms and key sources come from configuration — never the token.</a:t>
+            </a:r>
+            <a:endParaRPr lang="en-US" sz="1600" dirty="0"/>
           </a:p>
         </p:txBody>
       </p:sp>
@@ -16518,7 +16518,7 @@
         <p:spPr>
           <a:xfrm>
             <a:off x="640080" y="640080"/>
-            <a:ext cx="10972800" cy="777240"/>
+            <a:ext cx="10972800" cy="822960"/>
           </a:xfrm>
           <a:prstGeom prst="rect">
             <a:avLst/>
@@ -16534,7 +16534,7 @@
               <a:buNone/>
             </a:pPr>
             <a:r>
-              <a:rPr lang="en-US" sz="2600" b="1" dirty="0">
+              <a:rPr lang="en-US" sz="3000" b="1" dirty="0">
                 <a:solidFill>
                   <a:srgbClr val="1F3A5F"/>
                 </a:solidFill>
@@ -16544,7 +16544,7 @@
               </a:rPr>
               <a:t>Avoid Implicit and Password grant</a:t>
             </a:r>
-            <a:endParaRPr lang="en-US" sz="2600" dirty="0"/>
+            <a:endParaRPr lang="en-US" sz="3000" dirty="0"/>
           </a:p>
         </p:txBody>
       </p:sp>
@@ -16634,12 +16634,12 @@
         </p:nvSpPr>
         <p:spPr>
           <a:xfrm>
-            <a:off x="640080" y="1554480"/>
-            <a:ext cx="5349240" cy="3017520"/>
+            <a:off x="640080" y="1645920"/>
+            <a:ext cx="5349240" cy="2834640"/>
           </a:xfrm>
           <a:prstGeom prst="roundRect">
             <a:avLst>
-              <a:gd name="adj" fmla="val 1818"/>
+              <a:gd name="adj" fmla="val 1935"/>
             </a:avLst>
           </a:prstGeom>
           <a:solidFill>
@@ -16668,8 +16668,8 @@
         </p:nvSpPr>
         <p:spPr>
           <a:xfrm>
-            <a:off x="822960" y="1700784"/>
-            <a:ext cx="4983480" cy="310896"/>
+            <a:off x="841248" y="1810512"/>
+            <a:ext cx="4946904" cy="347472"/>
           </a:xfrm>
           <a:prstGeom prst="rect">
             <a:avLst/>
@@ -16685,7 +16685,7 @@
               <a:buNone/>
             </a:pPr>
             <a:r>
-              <a:rPr lang="en-US" sz="1400" b="1" dirty="0">
+              <a:rPr lang="en-US" sz="1600" b="1" dirty="0">
                 <a:solidFill>
                   <a:srgbClr val="C0492F"/>
                 </a:solidFill>
@@ -16695,7 +16695,7 @@
               </a:rPr>
               <a:t>Implicit flow</a:t>
             </a:r>
-            <a:endParaRPr lang="en-US" sz="1400" dirty="0"/>
+            <a:endParaRPr lang="en-US" sz="1600" dirty="0"/>
           </a:p>
         </p:txBody>
       </p:sp>
@@ -16707,8 +16707,8 @@
         </p:nvSpPr>
         <p:spPr>
           <a:xfrm>
-            <a:off x="822960" y="2121408"/>
-            <a:ext cx="4983480" cy="2340864"/>
+            <a:off x="841248" y="2286000"/>
+            <a:ext cx="4946904" cy="2066544"/>
           </a:xfrm>
           <a:prstGeom prst="rect">
             <a:avLst/>
@@ -16720,15 +16720,15 @@
           <a:bodyPr wrap="square" lIns="0" tIns="0" rIns="0" bIns="0" rtlCol="0" anchor="t"/>
           <a:lstStyle/>
           <a:p>
-            <a:pPr marL="177800" indent="-177800">
+            <a:pPr marL="203200" indent="-203200">
               <a:spcAft>
-                <a:spcPts val="400"/>
+                <a:spcPts val="800"/>
               </a:spcAft>
               <a:buSzPct val="100000"/>
               <a:buChar char="•"/>
             </a:pPr>
             <a:r>
-              <a:rPr lang="en-US" sz="1300" dirty="0">
+              <a:rPr lang="en-US" sz="1450" dirty="0">
                 <a:solidFill>
                   <a:srgbClr val="1D2733"/>
                 </a:solidFill>
@@ -16736,20 +16736,20 @@
                 <a:ea typeface="Arial" pitchFamily="34" charset="-122"/>
                 <a:cs typeface="Arial" pitchFamily="34" charset="-120"/>
               </a:rPr>
-              <a:t>Returned tokens directly in the browser redirect</a:t>
-            </a:r>
-            <a:endParaRPr lang="en-US" sz="1300" dirty="0"/>
-          </a:p>
-          <a:p>
-            <a:pPr marL="177800" indent="-177800">
+              <a:t>Tokens returned in the browser redirect</a:t>
+            </a:r>
+            <a:endParaRPr lang="en-US" sz="1450" dirty="0"/>
+          </a:p>
+          <a:p>
+            <a:pPr marL="203200" indent="-203200">
               <a:spcAft>
-                <a:spcPts val="400"/>
+                <a:spcPts val="800"/>
               </a:spcAft>
               <a:buSzPct val="100000"/>
               <a:buChar char="•"/>
             </a:pPr>
             <a:r>
-              <a:rPr lang="en-US" sz="1300" dirty="0">
+              <a:rPr lang="en-US" sz="1450" dirty="0">
                 <a:solidFill>
                   <a:srgbClr val="1D2733"/>
                 </a:solidFill>
@@ -16757,20 +16757,20 @@
                 <a:ea typeface="Arial" pitchFamily="34" charset="-122"/>
                 <a:cs typeface="Arial" pitchFamily="34" charset="-120"/>
               </a:rPr>
-              <a:t>Front-channel token exposure (history, logs, scripts)</a:t>
-            </a:r>
-            <a:endParaRPr lang="en-US" sz="1300" dirty="0"/>
-          </a:p>
-          <a:p>
-            <a:pPr marL="177800" indent="-177800">
+              <a:t>Front-channel exposure (history, logs)</a:t>
+            </a:r>
+            <a:endParaRPr lang="en-US" sz="1450" dirty="0"/>
+          </a:p>
+          <a:p>
+            <a:pPr marL="203200" indent="-203200">
               <a:spcAft>
-                <a:spcPts val="400"/>
+                <a:spcPts val="800"/>
               </a:spcAft>
               <a:buSzPct val="100000"/>
               <a:buChar char="•"/>
             </a:pPr>
             <a:r>
-              <a:rPr lang="en-US" sz="1300" dirty="0">
+              <a:rPr lang="en-US" sz="1450" dirty="0">
                 <a:solidFill>
                   <a:srgbClr val="1D2733"/>
                 </a:solidFill>
@@ -16780,7 +16780,7 @@
               </a:rPr>
               <a:t>Replaced by Auth Code + PKCE</a:t>
             </a:r>
-            <a:endParaRPr lang="en-US" sz="1300" dirty="0"/>
+            <a:endParaRPr lang="en-US" sz="1450" dirty="0"/>
           </a:p>
         </p:txBody>
       </p:sp>
@@ -16792,12 +16792,12 @@
         </p:nvSpPr>
         <p:spPr>
           <a:xfrm>
-            <a:off x="6309360" y="1554480"/>
-            <a:ext cx="5349240" cy="3017520"/>
+            <a:off x="6309360" y="1645920"/>
+            <a:ext cx="5349240" cy="2834640"/>
           </a:xfrm>
           <a:prstGeom prst="roundRect">
             <a:avLst>
-              <a:gd name="adj" fmla="val 1818"/>
+              <a:gd name="adj" fmla="val 1935"/>
             </a:avLst>
           </a:prstGeom>
           <a:solidFill>
@@ -16826,8 +16826,8 @@
         </p:nvSpPr>
         <p:spPr>
           <a:xfrm>
-            <a:off x="6492240" y="1700784"/>
-            <a:ext cx="4983480" cy="310896"/>
+            <a:off x="6510528" y="1810512"/>
+            <a:ext cx="4946904" cy="347472"/>
           </a:xfrm>
           <a:prstGeom prst="rect">
             <a:avLst/>
@@ -16843,7 +16843,7 @@
               <a:buNone/>
             </a:pPr>
             <a:r>
-              <a:rPr lang="en-US" sz="1400" b="1" dirty="0">
+              <a:rPr lang="en-US" sz="1600" b="1" dirty="0">
                 <a:solidFill>
                   <a:srgbClr val="C0492F"/>
                 </a:solidFill>
@@ -16853,7 +16853,7 @@
               </a:rPr>
               <a:t>Password credentials</a:t>
             </a:r>
-            <a:endParaRPr lang="en-US" sz="1400" dirty="0"/>
+            <a:endParaRPr lang="en-US" sz="1600" dirty="0"/>
           </a:p>
         </p:txBody>
       </p:sp>
@@ -16865,8 +16865,8 @@
         </p:nvSpPr>
         <p:spPr>
           <a:xfrm>
-            <a:off x="6492240" y="2121408"/>
-            <a:ext cx="4983480" cy="2340864"/>
+            <a:off x="6510528" y="2286000"/>
+            <a:ext cx="4946904" cy="2066544"/>
           </a:xfrm>
           <a:prstGeom prst="rect">
             <a:avLst/>
@@ -16878,15 +16878,15 @@
           <a:bodyPr wrap="square" lIns="0" tIns="0" rIns="0" bIns="0" rtlCol="0" anchor="t"/>
           <a:lstStyle/>
           <a:p>
-            <a:pPr marL="177800" indent="-177800">
+            <a:pPr marL="203200" indent="-203200">
               <a:spcAft>
-                <a:spcPts val="400"/>
+                <a:spcPts val="800"/>
               </a:spcAft>
               <a:buSzPct val="100000"/>
               <a:buChar char="•"/>
             </a:pPr>
             <a:r>
-              <a:rPr lang="en-US" sz="1300" dirty="0">
+              <a:rPr lang="en-US" sz="1450" dirty="0">
                 <a:solidFill>
                   <a:srgbClr val="1D2733"/>
                 </a:solidFill>
@@ -16896,18 +16896,18 @@
               </a:rPr>
               <a:t>Client collects the user's real password</a:t>
             </a:r>
-            <a:endParaRPr lang="en-US" sz="1300" dirty="0"/>
-          </a:p>
-          <a:p>
-            <a:pPr marL="177800" indent="-177800">
+            <a:endParaRPr lang="en-US" sz="1450" dirty="0"/>
+          </a:p>
+          <a:p>
+            <a:pPr marL="203200" indent="-203200">
               <a:spcAft>
-                <a:spcPts val="400"/>
+                <a:spcPts val="800"/>
               </a:spcAft>
               <a:buSzPct val="100000"/>
               <a:buChar char="•"/>
             </a:pPr>
             <a:r>
-              <a:rPr lang="en-US" sz="1300" dirty="0">
+              <a:rPr lang="en-US" sz="1450" dirty="0">
                 <a:solidFill>
                   <a:srgbClr val="1D2733"/>
                 </a:solidFill>
@@ -16917,18 +16917,18 @@
               </a:rPr>
               <a:t>Breaks the core OAuth idea</a:t>
             </a:r>
-            <a:endParaRPr lang="en-US" sz="1300" dirty="0"/>
-          </a:p>
-          <a:p>
-            <a:pPr marL="177800" indent="-177800">
+            <a:endParaRPr lang="en-US" sz="1450" dirty="0"/>
+          </a:p>
+          <a:p>
+            <a:pPr marL="203200" indent="-203200">
               <a:spcAft>
-                <a:spcPts val="400"/>
+                <a:spcPts val="800"/>
               </a:spcAft>
               <a:buSzPct val="100000"/>
               <a:buChar char="•"/>
             </a:pPr>
             <a:r>
-              <a:rPr lang="en-US" sz="1300" dirty="0">
+              <a:rPr lang="en-US" sz="1450" dirty="0">
                 <a:solidFill>
                   <a:srgbClr val="1D2733"/>
                 </a:solidFill>
@@ -16936,9 +16936,9 @@
                 <a:ea typeface="Arial" pitchFamily="34" charset="-122"/>
                 <a:cs typeface="Arial" pitchFamily="34" charset="-120"/>
               </a:rPr>
-              <a:t>Blocks MFA; a breached client exposes credentials</a:t>
-            </a:r>
-            <a:endParaRPr lang="en-US" sz="1300" dirty="0"/>
+              <a:t>Blocks MFA; a breach exposes creds</a:t>
+            </a:r>
+            <a:endParaRPr lang="en-US" sz="1450" dirty="0"/>
           </a:p>
         </p:txBody>
       </p:sp>
@@ -16950,8 +16950,8 @@
         </p:nvSpPr>
         <p:spPr>
           <a:xfrm>
-            <a:off x="640080" y="4800600"/>
-            <a:ext cx="10972800" cy="365760"/>
+            <a:off x="640080" y="4754880"/>
+            <a:ext cx="10972800" cy="457200"/>
           </a:xfrm>
           <a:prstGeom prst="rect">
             <a:avLst/>
@@ -16967,7 +16967,7 @@
               <a:buNone/>
             </a:pPr>
             <a:r>
-              <a:rPr lang="en-US" sz="1400" b="1" dirty="0">
+              <a:rPr lang="en-US" sz="1600" b="1" dirty="0">
                 <a:solidFill>
                   <a:srgbClr val="1F3A5F"/>
                 </a:solidFill>
@@ -16975,9 +16975,9 @@
                 <a:ea typeface="Arial" pitchFamily="34" charset="-122"/>
                 <a:cs typeface="Arial" pitchFamily="34" charset="-120"/>
               </a:rPr>
-              <a:t>Use Auth Code + PKCE for users, Client Credentials for services.</a:t>
-            </a:r>
-            <a:endParaRPr lang="en-US" sz="1400" dirty="0"/>
+              <a:t>Auth Code + PKCE for users · Client Credentials for services.</a:t>
+            </a:r>
+            <a:endParaRPr lang="en-US" sz="1600" dirty="0"/>
           </a:p>
         </p:txBody>
       </p:sp>
@@ -17061,7 +17061,7 @@
         <p:spPr>
           <a:xfrm>
             <a:off x="640080" y="640080"/>
-            <a:ext cx="10972800" cy="777240"/>
+            <a:ext cx="10972800" cy="822960"/>
           </a:xfrm>
           <a:prstGeom prst="rect">
             <a:avLst/>
@@ -17077,7 +17077,7 @@
               <a:buNone/>
             </a:pPr>
             <a:r>
-              <a:rPr lang="en-US" sz="2600" b="1" dirty="0">
+              <a:rPr lang="en-US" sz="3000" b="1" dirty="0">
                 <a:solidFill>
                   <a:srgbClr val="1F3A5F"/>
                 </a:solidFill>
@@ -17087,7 +17087,7 @@
               </a:rPr>
               <a:t>Attacks mapped to mitigations</a:t>
             </a:r>
-            <a:endParaRPr lang="en-US" sz="2600" dirty="0"/>
+            <a:endParaRPr lang="en-US" sz="3000" dirty="0"/>
           </a:p>
         </p:txBody>
       </p:sp>
@@ -17184,7 +17184,7 @@
           </p:nvPr>
         </p:nvGraphicFramePr>
         <p:xfrm>
-          <a:off x="640080" y="1554480"/>
+          <a:off x="640080" y="1645920"/>
           <a:ext cx="10881360" cy="914400"/>
         </p:xfrm>
         <a:graphic>
@@ -17195,7 +17195,7 @@
                 <a:gridCol w="5120640"/>
                 <a:gridCol w="5760720"/>
               </a:tblGrid>
-              <a:tr h="402336">
+              <a:tr h="438912">
                 <a:tc>
                   <a:txBody>
                     <a:bodyPr/>
@@ -17205,7 +17205,7 @@
                         <a:buNone/>
                       </a:pPr>
                       <a:r>
-                        <a:rPr lang="en-US" sz="1250" b="1" dirty="0">
+                        <a:rPr lang="en-US" sz="1300" b="1" dirty="0">
                           <a:solidFill>
                             <a:srgbClr val="FFFFFF"/>
                           </a:solidFill>
@@ -17215,7 +17215,7 @@
                         </a:rPr>
                         <a:t>Attack / mistake</a:t>
                       </a:r>
-                      <a:endParaRPr lang="en-US" sz="1250" dirty="0">
+                      <a:endParaRPr lang="en-US" sz="1300" dirty="0">
                         <a:latin typeface="Arial" charset="0"/>
                         <a:ea typeface="Arial" charset="0"/>
                         <a:cs typeface="Arial" charset="0"/>
@@ -17273,7 +17273,7 @@
                         <a:buNone/>
                       </a:pPr>
                       <a:r>
-                        <a:rPr lang="en-US" sz="1250" b="1" dirty="0">
+                        <a:rPr lang="en-US" sz="1300" b="1" dirty="0">
                           <a:solidFill>
                             <a:srgbClr val="FFFFFF"/>
                           </a:solidFill>
@@ -17283,7 +17283,7 @@
                         </a:rPr>
                         <a:t>Mitigation</a:t>
                       </a:r>
-                      <a:endParaRPr lang="en-US" sz="1250" dirty="0">
+                      <a:endParaRPr lang="en-US" sz="1300" dirty="0">
                         <a:latin typeface="Arial" charset="0"/>
                         <a:ea typeface="Arial" charset="0"/>
                         <a:cs typeface="Arial" charset="0"/>
@@ -17333,7 +17333,7 @@
                   </a:tcPr>
                 </a:tc>
               </a:tr>
-              <a:tr h="402336">
+              <a:tr h="438912">
                 <a:tc>
                   <a:txBody>
                     <a:bodyPr/>
@@ -17343,7 +17343,7 @@
                         <a:buNone/>
                       </a:pPr>
                       <a:r>
-                        <a:rPr lang="en-US" sz="1200" dirty="0">
+                        <a:rPr lang="en-US" sz="1250" dirty="0">
                           <a:solidFill>
                             <a:srgbClr val="1D2733"/>
                           </a:solidFill>
@@ -17353,7 +17353,7 @@
                         </a:rPr>
                         <a:t>Missing state</a:t>
                       </a:r>
-                      <a:endParaRPr lang="en-US" sz="1200" dirty="0">
+                      <a:endParaRPr lang="en-US" sz="1250" dirty="0">
                         <a:latin typeface="Arial" charset="0"/>
                         <a:ea typeface="Arial" charset="0"/>
                         <a:cs typeface="Arial" charset="0"/>
@@ -17411,7 +17411,7 @@
                         <a:buNone/>
                       </a:pPr>
                       <a:r>
-                        <a:rPr lang="en-US" sz="1200" dirty="0">
+                        <a:rPr lang="en-US" sz="1250" dirty="0">
                           <a:solidFill>
                             <a:srgbClr val="1D2733"/>
                           </a:solidFill>
@@ -17421,7 +17421,7 @@
                         </a:rPr>
                         <a:t>Generate, store, and verify state</a:t>
                       </a:r>
-                      <a:endParaRPr lang="en-US" sz="1200" dirty="0">
+                      <a:endParaRPr lang="en-US" sz="1250" dirty="0">
                         <a:latin typeface="Arial" charset="0"/>
                         <a:ea typeface="Arial" charset="0"/>
                         <a:cs typeface="Arial" charset="0"/>
@@ -17471,7 +17471,7 @@
                   </a:tcPr>
                 </a:tc>
               </a:tr>
-              <a:tr h="402336">
+              <a:tr h="438912">
                 <a:tc>
                   <a:txBody>
                     <a:bodyPr/>
@@ -17481,7 +17481,7 @@
                         <a:buNone/>
                       </a:pPr>
                       <a:r>
-                        <a:rPr lang="en-US" sz="1200" dirty="0">
+                        <a:rPr lang="en-US" sz="1250" dirty="0">
                           <a:solidFill>
                             <a:srgbClr val="1D2733"/>
                           </a:solidFill>
@@ -17491,7 +17491,7 @@
                         </a:rPr>
                         <a:t>Weak redirect URI matching</a:t>
                       </a:r>
-                      <a:endParaRPr lang="en-US" sz="1200" dirty="0">
+                      <a:endParaRPr lang="en-US" sz="1250" dirty="0">
                         <a:latin typeface="Arial" charset="0"/>
                         <a:ea typeface="Arial" charset="0"/>
                         <a:cs typeface="Arial" charset="0"/>
@@ -17549,7 +17549,7 @@
                         <a:buNone/>
                       </a:pPr>
                       <a:r>
-                        <a:rPr lang="en-US" sz="1200" dirty="0">
+                        <a:rPr lang="en-US" sz="1250" dirty="0">
                           <a:solidFill>
                             <a:srgbClr val="1D2733"/>
                           </a:solidFill>
@@ -17559,7 +17559,7 @@
                         </a:rPr>
                         <a:t>Exact, pre-registered redirect URIs</a:t>
                       </a:r>
-                      <a:endParaRPr lang="en-US" sz="1200" dirty="0">
+                      <a:endParaRPr lang="en-US" sz="1250" dirty="0">
                         <a:latin typeface="Arial" charset="0"/>
                         <a:ea typeface="Arial" charset="0"/>
                         <a:cs typeface="Arial" charset="0"/>
@@ -17609,7 +17609,7 @@
                   </a:tcPr>
                 </a:tc>
               </a:tr>
-              <a:tr h="402336">
+              <a:tr h="438912">
                 <a:tc>
                   <a:txBody>
                     <a:bodyPr/>
@@ -17619,7 +17619,7 @@
                         <a:buNone/>
                       </a:pPr>
                       <a:r>
-                        <a:rPr lang="en-US" sz="1200" dirty="0">
+                        <a:rPr lang="en-US" sz="1250" dirty="0">
                           <a:solidFill>
                             <a:srgbClr val="1D2733"/>
                           </a:solidFill>
@@ -17629,7 +17629,7 @@
                         </a:rPr>
                         <a:t>Authorization code interception</a:t>
                       </a:r>
-                      <a:endParaRPr lang="en-US" sz="1200" dirty="0">
+                      <a:endParaRPr lang="en-US" sz="1250" dirty="0">
                         <a:latin typeface="Arial" charset="0"/>
                         <a:ea typeface="Arial" charset="0"/>
                         <a:cs typeface="Arial" charset="0"/>
@@ -17687,7 +17687,7 @@
                         <a:buNone/>
                       </a:pPr>
                       <a:r>
-                        <a:rPr lang="en-US" sz="1200" dirty="0">
+                        <a:rPr lang="en-US" sz="1250" dirty="0">
                           <a:solidFill>
                             <a:srgbClr val="1D2733"/>
                           </a:solidFill>
@@ -17697,7 +17697,7 @@
                         </a:rPr>
                         <a:t>PKCE + short-lived single-use codes</a:t>
                       </a:r>
-                      <a:endParaRPr lang="en-US" sz="1200" dirty="0">
+                      <a:endParaRPr lang="en-US" sz="1250" dirty="0">
                         <a:latin typeface="Arial" charset="0"/>
                         <a:ea typeface="Arial" charset="0"/>
                         <a:cs typeface="Arial" charset="0"/>
@@ -17747,7 +17747,7 @@
                   </a:tcPr>
                 </a:tc>
               </a:tr>
-              <a:tr h="402336">
+              <a:tr h="438912">
                 <a:tc>
                   <a:txBody>
                     <a:bodyPr/>
@@ -17757,7 +17757,7 @@
                         <a:buNone/>
                       </a:pPr>
                       <a:r>
-                        <a:rPr lang="en-US" sz="1200" dirty="0">
+                        <a:rPr lang="en-US" sz="1250" dirty="0">
                           <a:solidFill>
                             <a:srgbClr val="1D2733"/>
                           </a:solidFill>
@@ -17767,7 +17767,7 @@
                         </a:rPr>
                         <a:t>Long-lived / stolen access token</a:t>
                       </a:r>
-                      <a:endParaRPr lang="en-US" sz="1200" dirty="0">
+                      <a:endParaRPr lang="en-US" sz="1250" dirty="0">
                         <a:latin typeface="Arial" charset="0"/>
                         <a:ea typeface="Arial" charset="0"/>
                         <a:cs typeface="Arial" charset="0"/>
@@ -17825,7 +17825,7 @@
                         <a:buNone/>
                       </a:pPr>
                       <a:r>
-                        <a:rPr lang="en-US" sz="1200" dirty="0">
+                        <a:rPr lang="en-US" sz="1250" dirty="0">
                           <a:solidFill>
                             <a:srgbClr val="1D2733"/>
                           </a:solidFill>
@@ -17835,7 +17835,7 @@
                         </a:rPr>
                         <a:t>Short token lifetime</a:t>
                       </a:r>
-                      <a:endParaRPr lang="en-US" sz="1200" dirty="0">
+                      <a:endParaRPr lang="en-US" sz="1250" dirty="0">
                         <a:latin typeface="Arial" charset="0"/>
                         <a:ea typeface="Arial" charset="0"/>
                         <a:cs typeface="Arial" charset="0"/>
@@ -17885,7 +17885,7 @@
                   </a:tcPr>
                 </a:tc>
               </a:tr>
-              <a:tr h="402336">
+              <a:tr h="438912">
                 <a:tc>
                   <a:txBody>
                     <a:bodyPr/>
@@ -17895,7 +17895,7 @@
                         <a:buNone/>
                       </a:pPr>
                       <a:r>
-                        <a:rPr lang="en-US" sz="1200" dirty="0">
+                        <a:rPr lang="en-US" sz="1250" dirty="0">
                           <a:solidFill>
                             <a:srgbClr val="1D2733"/>
                           </a:solidFill>
@@ -17905,7 +17905,7 @@
                         </a:rPr>
                         <a:t>Refresh token theft</a:t>
                       </a:r>
-                      <a:endParaRPr lang="en-US" sz="1200" dirty="0">
+                      <a:endParaRPr lang="en-US" sz="1250" dirty="0">
                         <a:latin typeface="Arial" charset="0"/>
                         <a:ea typeface="Arial" charset="0"/>
                         <a:cs typeface="Arial" charset="0"/>
@@ -17963,7 +17963,7 @@
                         <a:buNone/>
                       </a:pPr>
                       <a:r>
-                        <a:rPr lang="en-US" sz="1200" dirty="0">
+                        <a:rPr lang="en-US" sz="1250" dirty="0">
                           <a:solidFill>
                             <a:srgbClr val="1D2733"/>
                           </a:solidFill>
@@ -17973,7 +17973,7 @@
                         </a:rPr>
                         <a:t>Rotation + reuse detection</a:t>
                       </a:r>
-                      <a:endParaRPr lang="en-US" sz="1200" dirty="0">
+                      <a:endParaRPr lang="en-US" sz="1250" dirty="0">
                         <a:latin typeface="Arial" charset="0"/>
                         <a:ea typeface="Arial" charset="0"/>
                         <a:cs typeface="Arial" charset="0"/>
@@ -18023,7 +18023,7 @@
                   </a:tcPr>
                 </a:tc>
               </a:tr>
-              <a:tr h="402336">
+              <a:tr h="438912">
                 <a:tc>
                   <a:txBody>
                     <a:bodyPr/>
@@ -18033,7 +18033,7 @@
                         <a:buNone/>
                       </a:pPr>
                       <a:r>
-                        <a:rPr lang="en-US" sz="1200" dirty="0">
+                        <a:rPr lang="en-US" sz="1250" dirty="0">
                           <a:solidFill>
                             <a:srgbClr val="1D2733"/>
                           </a:solidFill>
@@ -18043,7 +18043,7 @@
                         </a:rPr>
                         <a:t>Bearer token replay</a:t>
                       </a:r>
-                      <a:endParaRPr lang="en-US" sz="1200" dirty="0">
+                      <a:endParaRPr lang="en-US" sz="1250" dirty="0">
                         <a:latin typeface="Arial" charset="0"/>
                         <a:ea typeface="Arial" charset="0"/>
                         <a:cs typeface="Arial" charset="0"/>
@@ -18101,7 +18101,7 @@
                         <a:buNone/>
                       </a:pPr>
                       <a:r>
-                        <a:rPr lang="en-US" sz="1200" dirty="0">
+                        <a:rPr lang="en-US" sz="1250" dirty="0">
                           <a:solidFill>
                             <a:srgbClr val="1D2733"/>
                           </a:solidFill>
@@ -18111,7 +18111,7 @@
                         </a:rPr>
                         <a:t>Sender-constrained tokens (DPoP / mTLS)</a:t>
                       </a:r>
-                      <a:endParaRPr lang="en-US" sz="1200" dirty="0">
+                      <a:endParaRPr lang="en-US" sz="1250" dirty="0">
                         <a:latin typeface="Arial" charset="0"/>
                         <a:ea typeface="Arial" charset="0"/>
                         <a:cs typeface="Arial" charset="0"/>
@@ -18433,7 +18433,7 @@
         <p:spPr>
           <a:xfrm>
             <a:off x="640080" y="640080"/>
-            <a:ext cx="10972800" cy="777240"/>
+            <a:ext cx="10972800" cy="822960"/>
           </a:xfrm>
           <a:prstGeom prst="rect">
             <a:avLst/>
@@ -18449,7 +18449,7 @@
               <a:buNone/>
             </a:pPr>
             <a:r>
-              <a:rPr lang="en-US" sz="2600" b="1" dirty="0">
+              <a:rPr lang="en-US" sz="3000" b="1" dirty="0">
                 <a:solidFill>
                   <a:srgbClr val="1F3A5F"/>
                 </a:solidFill>
@@ -18459,7 +18459,7 @@
               </a:rPr>
               <a:t>PAR, JAR, JARM</a:t>
             </a:r>
-            <a:endParaRPr lang="en-US" sz="2600" dirty="0"/>
+            <a:endParaRPr lang="en-US" sz="3000" dirty="0"/>
           </a:p>
         </p:txBody>
       </p:sp>
@@ -18556,7 +18556,7 @@
           </p:nvPr>
         </p:nvGraphicFramePr>
         <p:xfrm>
-          <a:off x="640080" y="1554480"/>
+          <a:off x="640080" y="1645920"/>
           <a:ext cx="10881360" cy="914400"/>
         </p:xfrm>
         <a:graphic>
@@ -18568,7 +18568,7 @@
                 <a:gridCol w="5486400"/>
                 <a:gridCol w="3840480"/>
               </a:tblGrid>
-              <a:tr h="502920">
+              <a:tr h="548640">
                 <a:tc>
                   <a:txBody>
                     <a:bodyPr/>
@@ -18578,7 +18578,7 @@
                         <a:buNone/>
                       </a:pPr>
                       <a:r>
-                        <a:rPr lang="en-US" sz="1250" b="1" dirty="0">
+                        <a:rPr lang="en-US" sz="1300" b="1" dirty="0">
                           <a:solidFill>
                             <a:srgbClr val="FFFFFF"/>
                           </a:solidFill>
@@ -18588,7 +18588,7 @@
                         </a:rPr>
                         <a:t>Control</a:t>
                       </a:r>
-                      <a:endParaRPr lang="en-US" sz="1250" dirty="0">
+                      <a:endParaRPr lang="en-US" sz="1300" dirty="0">
                         <a:latin typeface="Arial" charset="0"/>
                         <a:ea typeface="Arial" charset="0"/>
                         <a:cs typeface="Arial" charset="0"/>
@@ -18646,7 +18646,7 @@
                         <a:buNone/>
                       </a:pPr>
                       <a:r>
-                        <a:rPr lang="en-US" sz="1250" b="1" dirty="0">
+                        <a:rPr lang="en-US" sz="1300" b="1" dirty="0">
                           <a:solidFill>
                             <a:srgbClr val="FFFFFF"/>
                           </a:solidFill>
@@ -18656,7 +18656,7 @@
                         </a:rPr>
                         <a:t>What it does</a:t>
                       </a:r>
-                      <a:endParaRPr lang="en-US" sz="1250" dirty="0">
+                      <a:endParaRPr lang="en-US" sz="1300" dirty="0">
                         <a:latin typeface="Arial" charset="0"/>
                         <a:ea typeface="Arial" charset="0"/>
                         <a:cs typeface="Arial" charset="0"/>
@@ -18714,7 +18714,7 @@
                         <a:buNone/>
                       </a:pPr>
                       <a:r>
-                        <a:rPr lang="en-US" sz="1250" b="1" dirty="0">
+                        <a:rPr lang="en-US" sz="1300" b="1" dirty="0">
                           <a:solidFill>
                             <a:srgbClr val="FFFFFF"/>
                           </a:solidFill>
@@ -18724,7 +18724,7 @@
                         </a:rPr>
                         <a:t>Protects</a:t>
                       </a:r>
-                      <a:endParaRPr lang="en-US" sz="1250" dirty="0">
+                      <a:endParaRPr lang="en-US" sz="1300" dirty="0">
                         <a:latin typeface="Arial" charset="0"/>
                         <a:ea typeface="Arial" charset="0"/>
                         <a:cs typeface="Arial" charset="0"/>
@@ -18774,7 +18774,7 @@
                   </a:tcPr>
                 </a:tc>
               </a:tr>
-              <a:tr h="502920">
+              <a:tr h="548640">
                 <a:tc>
                   <a:txBody>
                     <a:bodyPr/>
@@ -18784,7 +18784,7 @@
                         <a:buNone/>
                       </a:pPr>
                       <a:r>
-                        <a:rPr lang="en-US" sz="1200" dirty="0">
+                        <a:rPr lang="en-US" sz="1250" dirty="0">
                           <a:solidFill>
                             <a:srgbClr val="1D2733"/>
                           </a:solidFill>
@@ -18794,7 +18794,7 @@
                         </a:rPr>
                         <a:t>PAR</a:t>
                       </a:r>
-                      <a:endParaRPr lang="en-US" sz="1200" dirty="0">
+                      <a:endParaRPr lang="en-US" sz="1250" dirty="0">
                         <a:latin typeface="Arial" charset="0"/>
                         <a:ea typeface="Arial" charset="0"/>
                         <a:cs typeface="Arial" charset="0"/>
@@ -18852,7 +18852,7 @@
                         <a:buNone/>
                       </a:pPr>
                       <a:r>
-                        <a:rPr lang="en-US" sz="1200" dirty="0">
+                        <a:rPr lang="en-US" sz="1250" dirty="0">
                           <a:solidFill>
                             <a:srgbClr val="1D2733"/>
                           </a:solidFill>
@@ -18862,7 +18862,7 @@
                         </a:rPr>
                         <a:t>Push request details to a back-channel endpoint</a:t>
                       </a:r>
-                      <a:endParaRPr lang="en-US" sz="1200" dirty="0">
+                      <a:endParaRPr lang="en-US" sz="1250" dirty="0">
                         <a:latin typeface="Arial" charset="0"/>
                         <a:ea typeface="Arial" charset="0"/>
                         <a:cs typeface="Arial" charset="0"/>
@@ -18920,7 +18920,7 @@
                         <a:buNone/>
                       </a:pPr>
                       <a:r>
-                        <a:rPr lang="en-US" sz="1200" dirty="0">
+                        <a:rPr lang="en-US" sz="1250" dirty="0">
                           <a:solidFill>
                             <a:srgbClr val="1D2733"/>
                           </a:solidFill>
@@ -18930,7 +18930,7 @@
                         </a:rPr>
                         <a:t>Request exposure in the browser</a:t>
                       </a:r>
-                      <a:endParaRPr lang="en-US" sz="1200" dirty="0">
+                      <a:endParaRPr lang="en-US" sz="1250" dirty="0">
                         <a:latin typeface="Arial" charset="0"/>
                         <a:ea typeface="Arial" charset="0"/>
                         <a:cs typeface="Arial" charset="0"/>
@@ -18980,7 +18980,7 @@
                   </a:tcPr>
                 </a:tc>
               </a:tr>
-              <a:tr h="502920">
+              <a:tr h="548640">
                 <a:tc>
                   <a:txBody>
                     <a:bodyPr/>
@@ -18990,7 +18990,7 @@
                         <a:buNone/>
                       </a:pPr>
                       <a:r>
-                        <a:rPr lang="en-US" sz="1200" dirty="0">
+                        <a:rPr lang="en-US" sz="1250" dirty="0">
                           <a:solidFill>
                             <a:srgbClr val="1D2733"/>
                           </a:solidFill>
@@ -19000,7 +19000,7 @@
                         </a:rPr>
                         <a:t>JAR</a:t>
                       </a:r>
-                      <a:endParaRPr lang="en-US" sz="1200" dirty="0">
+                      <a:endParaRPr lang="en-US" sz="1250" dirty="0">
                         <a:latin typeface="Arial" charset="0"/>
                         <a:ea typeface="Arial" charset="0"/>
                         <a:cs typeface="Arial" charset="0"/>
@@ -19058,7 +19058,7 @@
                         <a:buNone/>
                       </a:pPr>
                       <a:r>
-                        <a:rPr lang="en-US" sz="1200" dirty="0">
+                        <a:rPr lang="en-US" sz="1250" dirty="0">
                           <a:solidFill>
                             <a:srgbClr val="1D2733"/>
                           </a:solidFill>
@@ -19068,7 +19068,7 @@
                         </a:rPr>
                         <a:t>Sign the authorization request (a JWT)</a:t>
                       </a:r>
-                      <a:endParaRPr lang="en-US" sz="1200" dirty="0">
+                      <a:endParaRPr lang="en-US" sz="1250" dirty="0">
                         <a:latin typeface="Arial" charset="0"/>
                         <a:ea typeface="Arial" charset="0"/>
                         <a:cs typeface="Arial" charset="0"/>
@@ -19126,7 +19126,7 @@
                         <a:buNone/>
                       </a:pPr>
                       <a:r>
-                        <a:rPr lang="en-US" sz="1200" dirty="0">
+                        <a:rPr lang="en-US" sz="1250" dirty="0">
                           <a:solidFill>
                             <a:srgbClr val="1D2733"/>
                           </a:solidFill>
@@ -19136,7 +19136,7 @@
                         </a:rPr>
                         <a:t>Request-parameter integrity</a:t>
                       </a:r>
-                      <a:endParaRPr lang="en-US" sz="1200" dirty="0">
+                      <a:endParaRPr lang="en-US" sz="1250" dirty="0">
                         <a:latin typeface="Arial" charset="0"/>
                         <a:ea typeface="Arial" charset="0"/>
                         <a:cs typeface="Arial" charset="0"/>
@@ -19186,7 +19186,7 @@
                   </a:tcPr>
                 </a:tc>
               </a:tr>
-              <a:tr h="502920">
+              <a:tr h="548640">
                 <a:tc>
                   <a:txBody>
                     <a:bodyPr/>
@@ -19196,7 +19196,7 @@
                         <a:buNone/>
                       </a:pPr>
                       <a:r>
-                        <a:rPr lang="en-US" sz="1200" dirty="0">
+                        <a:rPr lang="en-US" sz="1250" dirty="0">
                           <a:solidFill>
                             <a:srgbClr val="1D2733"/>
                           </a:solidFill>
@@ -19206,7 +19206,7 @@
                         </a:rPr>
                         <a:t>JARM</a:t>
                       </a:r>
-                      <a:endParaRPr lang="en-US" sz="1200" dirty="0">
+                      <a:endParaRPr lang="en-US" sz="1250" dirty="0">
                         <a:latin typeface="Arial" charset="0"/>
                         <a:ea typeface="Arial" charset="0"/>
                         <a:cs typeface="Arial" charset="0"/>
@@ -19264,7 +19264,7 @@
                         <a:buNone/>
                       </a:pPr>
                       <a:r>
-                        <a:rPr lang="en-US" sz="1200" dirty="0">
+                        <a:rPr lang="en-US" sz="1250" dirty="0">
                           <a:solidFill>
                             <a:srgbClr val="1D2733"/>
                           </a:solidFill>
@@ -19274,7 +19274,7 @@
                         </a:rPr>
                         <a:t>Sign the authorization response (a JWT)</a:t>
                       </a:r>
-                      <a:endParaRPr lang="en-US" sz="1200" dirty="0">
+                      <a:endParaRPr lang="en-US" sz="1250" dirty="0">
                         <a:latin typeface="Arial" charset="0"/>
                         <a:ea typeface="Arial" charset="0"/>
                         <a:cs typeface="Arial" charset="0"/>
@@ -19332,7 +19332,7 @@
                         <a:buNone/>
                       </a:pPr>
                       <a:r>
-                        <a:rPr lang="en-US" sz="1200" dirty="0">
+                        <a:rPr lang="en-US" sz="1250" dirty="0">
                           <a:solidFill>
                             <a:srgbClr val="1D2733"/>
                           </a:solidFill>
@@ -19342,7 +19342,7 @@
                         </a:rPr>
                         <a:t>Response integrity, mix-up</a:t>
                       </a:r>
-                      <a:endParaRPr lang="en-US" sz="1200" dirty="0">
+                      <a:endParaRPr lang="en-US" sz="1250" dirty="0">
                         <a:latin typeface="Arial" charset="0"/>
                         <a:ea typeface="Arial" charset="0"/>
                         <a:cs typeface="Arial" charset="0"/>
@@ -19405,7 +19405,7 @@
         <p:spPr>
           <a:xfrm>
             <a:off x="640080" y="3749040"/>
-            <a:ext cx="10972800" cy="365760"/>
+            <a:ext cx="10972800" cy="457200"/>
           </a:xfrm>
           <a:prstGeom prst="rect">
             <a:avLst/>
@@ -19421,7 +19421,7 @@
               <a:buNone/>
             </a:pPr>
             <a:r>
-              <a:rPr lang="en-US" sz="1350" b="1" dirty="0">
+              <a:rPr lang="en-US" sz="1600" b="1" dirty="0">
                 <a:solidFill>
                   <a:srgbClr val="1F3A5F"/>
                 </a:solidFill>
@@ -19429,9 +19429,9 @@
                 <a:ea typeface="Arial" pitchFamily="34" charset="-122"/>
                 <a:cs typeface="Arial" pitchFamily="34" charset="-120"/>
               </a:rPr>
-              <a:t>PAR pushes the request back-channel · JAR signs the request · JARM signs the response.</a:t>
-            </a:r>
-            <a:endParaRPr lang="en-US" sz="1350" dirty="0"/>
+              <a:t>PAR pushes the request · JAR signs the request · JARM signs the response.</a:t>
+            </a:r>
+            <a:endParaRPr lang="en-US" sz="1600" dirty="0"/>
           </a:p>
         </p:txBody>
       </p:sp>
@@ -19515,7 +19515,7 @@
         <p:spPr>
           <a:xfrm>
             <a:off x="640080" y="640080"/>
-            <a:ext cx="10972800" cy="777240"/>
+            <a:ext cx="10972800" cy="822960"/>
           </a:xfrm>
           <a:prstGeom prst="rect">
             <a:avLst/>
@@ -19531,7 +19531,7 @@
               <a:buNone/>
             </a:pPr>
             <a:r>
-              <a:rPr lang="en-US" sz="2600" b="1" dirty="0">
+              <a:rPr lang="en-US" sz="3000" b="1" dirty="0">
                 <a:solidFill>
                   <a:srgbClr val="1F3A5F"/>
                 </a:solidFill>
@@ -19541,7 +19541,7 @@
               </a:rPr>
               <a:t>DPoP vs mTLS</a:t>
             </a:r>
-            <a:endParaRPr lang="en-US" sz="2600" dirty="0"/>
+            <a:endParaRPr lang="en-US" sz="3000" dirty="0"/>
           </a:p>
         </p:txBody>
       </p:sp>
@@ -19631,12 +19631,12 @@
         </p:nvSpPr>
         <p:spPr>
           <a:xfrm>
-            <a:off x="640080" y="1554480"/>
-            <a:ext cx="5349240" cy="3200400"/>
+            <a:off x="640080" y="1645920"/>
+            <a:ext cx="5349240" cy="3017520"/>
           </a:xfrm>
           <a:prstGeom prst="roundRect">
             <a:avLst>
-              <a:gd name="adj" fmla="val 1714"/>
+              <a:gd name="adj" fmla="val 1818"/>
             </a:avLst>
           </a:prstGeom>
           <a:solidFill>
@@ -19665,8 +19665,8 @@
         </p:nvSpPr>
         <p:spPr>
           <a:xfrm>
-            <a:off x="822960" y="1700784"/>
-            <a:ext cx="4983480" cy="310896"/>
+            <a:off x="841248" y="1810512"/>
+            <a:ext cx="4946904" cy="347472"/>
           </a:xfrm>
           <a:prstGeom prst="rect">
             <a:avLst/>
@@ -19682,7 +19682,7 @@
               <a:buNone/>
             </a:pPr>
             <a:r>
-              <a:rPr lang="en-US" sz="1400" b="1" dirty="0">
+              <a:rPr lang="en-US" sz="1600" b="1" dirty="0">
                 <a:solidFill>
                   <a:srgbClr val="1F3A5F"/>
                 </a:solidFill>
@@ -19692,7 +19692,7 @@
               </a:rPr>
               <a:t>DPoP</a:t>
             </a:r>
-            <a:endParaRPr lang="en-US" sz="1400" dirty="0"/>
+            <a:endParaRPr lang="en-US" sz="1600" dirty="0"/>
           </a:p>
         </p:txBody>
       </p:sp>
@@ -19704,8 +19704,8 @@
         </p:nvSpPr>
         <p:spPr>
           <a:xfrm>
-            <a:off x="822960" y="2121408"/>
-            <a:ext cx="4983480" cy="2523744"/>
+            <a:off x="841248" y="2286000"/>
+            <a:ext cx="4946904" cy="2249424"/>
           </a:xfrm>
           <a:prstGeom prst="rect">
             <a:avLst/>
@@ -19717,15 +19717,15 @@
           <a:bodyPr wrap="square" lIns="0" tIns="0" rIns="0" bIns="0" rtlCol="0" anchor="t"/>
           <a:lstStyle/>
           <a:p>
-            <a:pPr marL="177800" indent="-177800">
+            <a:pPr marL="203200" indent="-203200">
               <a:spcAft>
-                <a:spcPts val="400"/>
+                <a:spcPts val="800"/>
               </a:spcAft>
               <a:buSzPct val="100000"/>
               <a:buChar char="•"/>
             </a:pPr>
             <a:r>
-              <a:rPr lang="en-US" sz="1300" dirty="0">
+              <a:rPr lang="en-US" sz="1450" dirty="0">
                 <a:solidFill>
                   <a:srgbClr val="1D2733"/>
                 </a:solidFill>
@@ -19733,20 +19733,20 @@
                 <a:ea typeface="Arial" pitchFamily="34" charset="-122"/>
                 <a:cs typeface="Arial" pitchFamily="34" charset="-120"/>
               </a:rPr>
-              <a:t>Application-layer signed proof per request</a:t>
-            </a:r>
-            <a:endParaRPr lang="en-US" sz="1300" dirty="0"/>
-          </a:p>
-          <a:p>
-            <a:pPr marL="177800" indent="-177800">
+              <a:t>App-layer signed proof per request</a:t>
+            </a:r>
+            <a:endParaRPr lang="en-US" sz="1450" dirty="0"/>
+          </a:p>
+          <a:p>
+            <a:pPr marL="203200" indent="-203200">
               <a:spcAft>
-                <a:spcPts val="400"/>
+                <a:spcPts val="800"/>
               </a:spcAft>
               <a:buSzPct val="100000"/>
               <a:buChar char="•"/>
             </a:pPr>
             <a:r>
-              <a:rPr lang="en-US" sz="1300" dirty="0">
+              <a:rPr lang="en-US" sz="1450" dirty="0">
                 <a:solidFill>
                   <a:srgbClr val="1D2733"/>
                 </a:solidFill>
@@ -19756,18 +19756,18 @@
               </a:rPr>
               <a:t>Token bound to a public key</a:t>
             </a:r>
-            <a:endParaRPr lang="en-US" sz="1300" dirty="0"/>
-          </a:p>
-          <a:p>
-            <a:pPr marL="177800" indent="-177800">
+            <a:endParaRPr lang="en-US" sz="1450" dirty="0"/>
+          </a:p>
+          <a:p>
+            <a:pPr marL="203200" indent="-203200">
               <a:spcAft>
-                <a:spcPts val="400"/>
+                <a:spcPts val="800"/>
               </a:spcAft>
               <a:buSzPct val="100000"/>
               <a:buChar char="•"/>
             </a:pPr>
             <a:r>
-              <a:rPr lang="en-US" sz="1300" dirty="0">
+              <a:rPr lang="en-US" sz="1450" dirty="0">
                 <a:solidFill>
                   <a:srgbClr val="1D2733"/>
                 </a:solidFill>
@@ -19777,7 +19777,7 @@
               </a:rPr>
               <a:t>Fits public clients &amp; APIs</a:t>
             </a:r>
-            <a:endParaRPr lang="en-US" sz="1300" dirty="0"/>
+            <a:endParaRPr lang="en-US" sz="1450" dirty="0"/>
           </a:p>
         </p:txBody>
       </p:sp>
@@ -19789,12 +19789,12 @@
         </p:nvSpPr>
         <p:spPr>
           <a:xfrm>
-            <a:off x="6309360" y="1554480"/>
-            <a:ext cx="5349240" cy="3200400"/>
+            <a:off x="6309360" y="1645920"/>
+            <a:ext cx="5349240" cy="3017520"/>
           </a:xfrm>
           <a:prstGeom prst="roundRect">
             <a:avLst>
-              <a:gd name="adj" fmla="val 1714"/>
+              <a:gd name="adj" fmla="val 1818"/>
             </a:avLst>
           </a:prstGeom>
           <a:solidFill>
@@ -19823,8 +19823,8 @@
         </p:nvSpPr>
         <p:spPr>
           <a:xfrm>
-            <a:off x="6492240" y="1700784"/>
-            <a:ext cx="4983480" cy="310896"/>
+            <a:off x="6510528" y="1810512"/>
+            <a:ext cx="4946904" cy="347472"/>
           </a:xfrm>
           <a:prstGeom prst="rect">
             <a:avLst/>
@@ -19840,7 +19840,7 @@
               <a:buNone/>
             </a:pPr>
             <a:r>
-              <a:rPr lang="en-US" sz="1400" b="1" dirty="0">
+              <a:rPr lang="en-US" sz="1600" b="1" dirty="0">
                 <a:solidFill>
                   <a:srgbClr val="0F8A7E"/>
                 </a:solidFill>
@@ -19850,7 +19850,7 @@
               </a:rPr>
               <a:t>mTLS</a:t>
             </a:r>
-            <a:endParaRPr lang="en-US" sz="1400" dirty="0"/>
+            <a:endParaRPr lang="en-US" sz="1600" dirty="0"/>
           </a:p>
         </p:txBody>
       </p:sp>
@@ -19862,8 +19862,8 @@
         </p:nvSpPr>
         <p:spPr>
           <a:xfrm>
-            <a:off x="6492240" y="2121408"/>
-            <a:ext cx="4983480" cy="2523744"/>
+            <a:off x="6510528" y="2286000"/>
+            <a:ext cx="4946904" cy="2249424"/>
           </a:xfrm>
           <a:prstGeom prst="rect">
             <a:avLst/>
@@ -19875,15 +19875,15 @@
           <a:bodyPr wrap="square" lIns="0" tIns="0" rIns="0" bIns="0" rtlCol="0" anchor="t"/>
           <a:lstStyle/>
           <a:p>
-            <a:pPr marL="177800" indent="-177800">
+            <a:pPr marL="203200" indent="-203200">
               <a:spcAft>
-                <a:spcPts val="400"/>
+                <a:spcPts val="800"/>
               </a:spcAft>
               <a:buSzPct val="100000"/>
               <a:buChar char="•"/>
             </a:pPr>
             <a:r>
-              <a:rPr lang="en-US" sz="1300" dirty="0">
+              <a:rPr lang="en-US" sz="1450" dirty="0">
                 <a:solidFill>
                   <a:srgbClr val="1D2733"/>
                 </a:solidFill>
@@ -19893,18 +19893,18 @@
               </a:rPr>
               <a:t>TLS-layer client certificate</a:t>
             </a:r>
-            <a:endParaRPr lang="en-US" sz="1300" dirty="0"/>
-          </a:p>
-          <a:p>
-            <a:pPr marL="177800" indent="-177800">
+            <a:endParaRPr lang="en-US" sz="1450" dirty="0"/>
+          </a:p>
+          <a:p>
+            <a:pPr marL="203200" indent="-203200">
               <a:spcAft>
-                <a:spcPts val="400"/>
+                <a:spcPts val="800"/>
               </a:spcAft>
               <a:buSzPct val="100000"/>
               <a:buChar char="•"/>
             </a:pPr>
             <a:r>
-              <a:rPr lang="en-US" sz="1300" dirty="0">
+              <a:rPr lang="en-US" sz="1450" dirty="0">
                 <a:solidFill>
                   <a:srgbClr val="1D2733"/>
                 </a:solidFill>
@@ -19914,18 +19914,18 @@
               </a:rPr>
               <a:t>Certificate-bound access tokens</a:t>
             </a:r>
-            <a:endParaRPr lang="en-US" sz="1300" dirty="0"/>
-          </a:p>
-          <a:p>
-            <a:pPr marL="177800" indent="-177800">
+            <a:endParaRPr lang="en-US" sz="1450" dirty="0"/>
+          </a:p>
+          <a:p>
+            <a:pPr marL="203200" indent="-203200">
               <a:spcAft>
-                <a:spcPts val="400"/>
+                <a:spcPts val="800"/>
               </a:spcAft>
               <a:buSzPct val="100000"/>
               <a:buChar char="•"/>
             </a:pPr>
             <a:r>
-              <a:rPr lang="en-US" sz="1300" dirty="0">
+              <a:rPr lang="en-US" sz="1450" dirty="0">
                 <a:solidFill>
                   <a:srgbClr val="1D2733"/>
                 </a:solidFill>
@@ -19935,7 +19935,7 @@
               </a:rPr>
               <a:t>Fits confidential / high-security clients</a:t>
             </a:r>
-            <a:endParaRPr lang="en-US" sz="1300" dirty="0"/>
+            <a:endParaRPr lang="en-US" sz="1450" dirty="0"/>
           </a:p>
         </p:txBody>
       </p:sp>
@@ -19948,7 +19948,7 @@
         <p:spPr>
           <a:xfrm>
             <a:off x="640080" y="4937760"/>
-            <a:ext cx="10972800" cy="365760"/>
+            <a:ext cx="10972800" cy="457200"/>
           </a:xfrm>
           <a:prstGeom prst="rect">
             <a:avLst/>
@@ -19964,7 +19964,7 @@
               <a:buNone/>
             </a:pPr>
             <a:r>
-              <a:rPr lang="en-US" sz="1400" b="1" dirty="0">
+              <a:rPr lang="en-US" sz="1600" b="1" dirty="0">
                 <a:solidFill>
                   <a:srgbClr val="1F3A5F"/>
                 </a:solidFill>
@@ -19972,9 +19972,9 @@
                 <a:ea typeface="Arial" pitchFamily="34" charset="-122"/>
                 <a:cs typeface="Arial" pitchFamily="34" charset="-120"/>
               </a:rPr>
-              <a:t>Both sender-constrain the token: a stolen bearer token alone is no longer enough.</a:t>
-            </a:r>
-            <a:endParaRPr lang="en-US" sz="1400" dirty="0"/>
+              <a:t>Both sender-constrain the token: a stolen bearer token alone is not enough.</a:t>
+            </a:r>
+            <a:endParaRPr lang="en-US" sz="1600" dirty="0"/>
           </a:p>
         </p:txBody>
       </p:sp>
@@ -20434,7 +20434,7 @@
         <p:spPr>
           <a:xfrm>
             <a:off x="640080" y="640080"/>
-            <a:ext cx="10972800" cy="777240"/>
+            <a:ext cx="10972800" cy="822960"/>
           </a:xfrm>
           <a:prstGeom prst="rect">
             <a:avLst/>
@@ -20450,7 +20450,7 @@
               <a:buNone/>
             </a:pPr>
             <a:r>
-              <a:rPr lang="en-US" sz="2600" b="1" dirty="0">
+              <a:rPr lang="en-US" sz="3000" b="1" dirty="0">
                 <a:solidFill>
                   <a:srgbClr val="1F3A5F"/>
                 </a:solidFill>
@@ -20460,7 +20460,7 @@
               </a:rPr>
               <a:t>Stricter OAuth, combined</a:t>
             </a:r>
-            <a:endParaRPr lang="en-US" sz="2600" dirty="0"/>
+            <a:endParaRPr lang="en-US" sz="3000" dirty="0"/>
           </a:p>
         </p:txBody>
       </p:sp>
@@ -20550,12 +20550,12 @@
         </p:nvSpPr>
         <p:spPr>
           <a:xfrm>
-            <a:off x="640080" y="1554480"/>
-            <a:ext cx="5349240" cy="3291840"/>
+            <a:off x="640080" y="1645920"/>
+            <a:ext cx="5349240" cy="3108960"/>
           </a:xfrm>
           <a:prstGeom prst="roundRect">
             <a:avLst>
-              <a:gd name="adj" fmla="val 1667"/>
+              <a:gd name="adj" fmla="val 1765"/>
             </a:avLst>
           </a:prstGeom>
           <a:solidFill>
@@ -20584,8 +20584,8 @@
         </p:nvSpPr>
         <p:spPr>
           <a:xfrm>
-            <a:off x="822960" y="1700784"/>
-            <a:ext cx="4983480" cy="310896"/>
+            <a:off x="841248" y="1810512"/>
+            <a:ext cx="4946904" cy="347472"/>
           </a:xfrm>
           <a:prstGeom prst="rect">
             <a:avLst/>
@@ -20601,7 +20601,7 @@
               <a:buNone/>
             </a:pPr>
             <a:r>
-              <a:rPr lang="en-US" sz="1400" b="1" dirty="0">
+              <a:rPr lang="en-US" sz="1600" b="1" dirty="0">
                 <a:solidFill>
                   <a:srgbClr val="1F3A5F"/>
                 </a:solidFill>
@@ -20611,7 +20611,7 @@
               </a:rPr>
               <a:t>FAPI 2.0 combines</a:t>
             </a:r>
-            <a:endParaRPr lang="en-US" sz="1400" dirty="0"/>
+            <a:endParaRPr lang="en-US" sz="1600" dirty="0"/>
           </a:p>
         </p:txBody>
       </p:sp>
@@ -20623,8 +20623,8 @@
         </p:nvSpPr>
         <p:spPr>
           <a:xfrm>
-            <a:off x="822960" y="2121408"/>
-            <a:ext cx="4983480" cy="2615184"/>
+            <a:off x="841248" y="2286000"/>
+            <a:ext cx="4946904" cy="2340864"/>
           </a:xfrm>
           <a:prstGeom prst="rect">
             <a:avLst/>
@@ -20636,15 +20636,15 @@
           <a:bodyPr wrap="square" lIns="0" tIns="0" rIns="0" bIns="0" rtlCol="0" anchor="t"/>
           <a:lstStyle/>
           <a:p>
-            <a:pPr marL="177800" indent="-177800">
+            <a:pPr marL="203200" indent="-203200">
               <a:spcAft>
-                <a:spcPts val="400"/>
+                <a:spcPts val="800"/>
               </a:spcAft>
               <a:buSzPct val="100000"/>
               <a:buChar char="•"/>
             </a:pPr>
             <a:r>
-              <a:rPr lang="en-US" sz="1300" dirty="0">
+              <a:rPr lang="en-US" sz="1450" dirty="0">
                 <a:solidFill>
                   <a:srgbClr val="1D2733"/>
                 </a:solidFill>
@@ -20654,18 +20654,18 @@
               </a:rPr>
               <a:t>Strict OAuth configuration</a:t>
             </a:r>
-            <a:endParaRPr lang="en-US" sz="1300" dirty="0"/>
-          </a:p>
-          <a:p>
-            <a:pPr marL="177800" indent="-177800">
+            <a:endParaRPr lang="en-US" sz="1450" dirty="0"/>
+          </a:p>
+          <a:p>
+            <a:pPr marL="203200" indent="-203200">
               <a:spcAft>
-                <a:spcPts val="400"/>
+                <a:spcPts val="800"/>
               </a:spcAft>
               <a:buSzPct val="100000"/>
               <a:buChar char="•"/>
             </a:pPr>
             <a:r>
-              <a:rPr lang="en-US" sz="1300" dirty="0">
+              <a:rPr lang="en-US" sz="1450" dirty="0">
                 <a:solidFill>
                   <a:srgbClr val="1D2733"/>
                 </a:solidFill>
@@ -20675,18 +20675,18 @@
               </a:rPr>
               <a:t>PAR + sender-constrained tokens</a:t>
             </a:r>
-            <a:endParaRPr lang="en-US" sz="1300" dirty="0"/>
-          </a:p>
-          <a:p>
-            <a:pPr marL="177800" indent="-177800">
+            <a:endParaRPr lang="en-US" sz="1450" dirty="0"/>
+          </a:p>
+          <a:p>
+            <a:pPr marL="203200" indent="-203200">
               <a:spcAft>
-                <a:spcPts val="400"/>
+                <a:spcPts val="800"/>
               </a:spcAft>
               <a:buSzPct val="100000"/>
               <a:buChar char="•"/>
             </a:pPr>
             <a:r>
-              <a:rPr lang="en-US" sz="1300" dirty="0">
+              <a:rPr lang="en-US" sz="1450" dirty="0">
                 <a:solidFill>
                   <a:srgbClr val="1D2733"/>
                 </a:solidFill>
@@ -20696,18 +20696,18 @@
               </a:rPr>
               <a:t>Strong client authentication</a:t>
             </a:r>
-            <a:endParaRPr lang="en-US" sz="1300" dirty="0"/>
-          </a:p>
-          <a:p>
-            <a:pPr marL="177800" indent="-177800">
+            <a:endParaRPr lang="en-US" sz="1450" dirty="0"/>
+          </a:p>
+          <a:p>
+            <a:pPr marL="203200" indent="-203200">
               <a:spcAft>
-                <a:spcPts val="400"/>
+                <a:spcPts val="800"/>
               </a:spcAft>
               <a:buSzPct val="100000"/>
               <a:buChar char="•"/>
             </a:pPr>
             <a:r>
-              <a:rPr lang="en-US" sz="1300" dirty="0">
+              <a:rPr lang="en-US" sz="1450" dirty="0">
                 <a:solidFill>
                   <a:srgbClr val="1D2733"/>
                 </a:solidFill>
@@ -20717,28 +20717,7 @@
               </a:rPr>
               <a:t>Strict token validation</a:t>
             </a:r>
-            <a:endParaRPr lang="en-US" sz="1300" dirty="0"/>
-          </a:p>
-          <a:p>
-            <a:pPr marL="177800" indent="-177800">
-              <a:spcAft>
-                <a:spcPts val="400"/>
-              </a:spcAft>
-              <a:buSzPct val="100000"/>
-              <a:buChar char="•"/>
-            </a:pPr>
-            <a:r>
-              <a:rPr lang="en-US" sz="1300" dirty="0">
-                <a:solidFill>
-                  <a:srgbClr val="1D2733"/>
-                </a:solidFill>
-                <a:latin typeface="Arial" pitchFamily="34" charset="0"/>
-                <a:ea typeface="Arial" pitchFamily="34" charset="-122"/>
-                <a:cs typeface="Arial" pitchFamily="34" charset="-120"/>
-              </a:rPr>
-              <a:t>Optional message signing (non-repudiation)</a:t>
-            </a:r>
-            <a:endParaRPr lang="en-US" sz="1300" dirty="0"/>
+            <a:endParaRPr lang="en-US" sz="1450" dirty="0"/>
           </a:p>
         </p:txBody>
       </p:sp>
@@ -20750,12 +20729,12 @@
         </p:nvSpPr>
         <p:spPr>
           <a:xfrm>
-            <a:off x="6309360" y="1554480"/>
-            <a:ext cx="5349240" cy="3291840"/>
+            <a:off x="6309360" y="1645920"/>
+            <a:ext cx="5349240" cy="3108960"/>
           </a:xfrm>
           <a:prstGeom prst="roundRect">
             <a:avLst>
-              <a:gd name="adj" fmla="val 1667"/>
+              <a:gd name="adj" fmla="val 1765"/>
             </a:avLst>
           </a:prstGeom>
           <a:solidFill>
@@ -20784,8 +20763,8 @@
         </p:nvSpPr>
         <p:spPr>
           <a:xfrm>
-            <a:off x="6492240" y="1700784"/>
-            <a:ext cx="4983480" cy="310896"/>
+            <a:off x="6510528" y="1810512"/>
+            <a:ext cx="4946904" cy="347472"/>
           </a:xfrm>
           <a:prstGeom prst="rect">
             <a:avLst/>
@@ -20801,7 +20780,7 @@
               <a:buNone/>
             </a:pPr>
             <a:r>
-              <a:rPr lang="en-US" sz="1400" b="1" dirty="0">
+              <a:rPr lang="en-US" sz="1600" b="1" dirty="0">
                 <a:solidFill>
                   <a:srgbClr val="0F8A7E"/>
                 </a:solidFill>
@@ -20811,7 +20790,7 @@
               </a:rPr>
               <a:t>Where it's used</a:t>
             </a:r>
-            <a:endParaRPr lang="en-US" sz="1400" dirty="0"/>
+            <a:endParaRPr lang="en-US" sz="1600" dirty="0"/>
           </a:p>
         </p:txBody>
       </p:sp>
@@ -20823,8 +20802,8 @@
         </p:nvSpPr>
         <p:spPr>
           <a:xfrm>
-            <a:off x="6492240" y="2121408"/>
-            <a:ext cx="4983480" cy="2615184"/>
+            <a:off x="6510528" y="2286000"/>
+            <a:ext cx="4946904" cy="2340864"/>
           </a:xfrm>
           <a:prstGeom prst="rect">
             <a:avLst/>
@@ -20836,15 +20815,15 @@
           <a:bodyPr wrap="square" lIns="0" tIns="0" rIns="0" bIns="0" rtlCol="0" anchor="t"/>
           <a:lstStyle/>
           <a:p>
-            <a:pPr marL="177800" indent="-177800">
+            <a:pPr marL="203200" indent="-203200">
               <a:spcAft>
-                <a:spcPts val="400"/>
+                <a:spcPts val="800"/>
               </a:spcAft>
               <a:buSzPct val="100000"/>
               <a:buChar char="•"/>
             </a:pPr>
             <a:r>
-              <a:rPr lang="en-US" sz="1300" dirty="0">
+              <a:rPr lang="en-US" sz="1450" dirty="0">
                 <a:solidFill>
                   <a:srgbClr val="1D2733"/>
                 </a:solidFill>
@@ -20854,18 +20833,18 @@
               </a:rPr>
               <a:t>Open banking &amp; payments</a:t>
             </a:r>
-            <a:endParaRPr lang="en-US" sz="1300" dirty="0"/>
-          </a:p>
-          <a:p>
-            <a:pPr marL="177800" indent="-177800">
+            <a:endParaRPr lang="en-US" sz="1450" dirty="0"/>
+          </a:p>
+          <a:p>
+            <a:pPr marL="203200" indent="-203200">
               <a:spcAft>
-                <a:spcPts val="400"/>
+                <a:spcPts val="800"/>
               </a:spcAft>
               <a:buSzPct val="100000"/>
               <a:buChar char="•"/>
             </a:pPr>
             <a:r>
-              <a:rPr lang="en-US" sz="1300" dirty="0">
+              <a:rPr lang="en-US" sz="1450" dirty="0">
                 <a:solidFill>
                   <a:srgbClr val="1D2733"/>
                 </a:solidFill>
@@ -20873,20 +20852,20 @@
                 <a:ea typeface="Arial" pitchFamily="34" charset="-122"/>
                 <a:cs typeface="Arial" pitchFamily="34" charset="-120"/>
               </a:rPr>
-              <a:t>Healthcare &amp; sensitive identity APIs</a:t>
-            </a:r>
-            <a:endParaRPr lang="en-US" sz="1300" dirty="0"/>
-          </a:p>
-          <a:p>
-            <a:pPr marL="177800" indent="-177800">
+              <a:t>Healthcare &amp; sensitive identity</a:t>
+            </a:r>
+            <a:endParaRPr lang="en-US" sz="1450" dirty="0"/>
+          </a:p>
+          <a:p>
+            <a:pPr marL="203200" indent="-203200">
               <a:spcAft>
-                <a:spcPts val="400"/>
+                <a:spcPts val="800"/>
               </a:spcAft>
               <a:buSzPct val="100000"/>
               <a:buChar char="•"/>
             </a:pPr>
             <a:r>
-              <a:rPr lang="en-US" sz="1300" dirty="0">
+              <a:rPr lang="en-US" sz="1450" dirty="0">
                 <a:solidFill>
                   <a:srgbClr val="1D2733"/>
                 </a:solidFill>
@@ -20894,9 +20873,9 @@
                 <a:ea typeface="Arial" pitchFamily="34" charset="-122"/>
                 <a:cs typeface="Arial" pitchFamily="34" charset="-120"/>
               </a:rPr>
-              <a:t>Regulated / high-impact data APIs</a:t>
-            </a:r>
-            <a:endParaRPr lang="en-US" sz="1300" dirty="0"/>
+              <a:t>Regulated, high-impact APIs</a:t>
+            </a:r>
+            <a:endParaRPr lang="en-US" sz="1450" dirty="0"/>
           </a:p>
         </p:txBody>
       </p:sp>
@@ -20908,8 +20887,8 @@
         </p:nvSpPr>
         <p:spPr>
           <a:xfrm>
-            <a:off x="640080" y="5029200"/>
-            <a:ext cx="10972800" cy="365760"/>
+            <a:off x="640080" y="4937760"/>
+            <a:ext cx="10972800" cy="457200"/>
           </a:xfrm>
           <a:prstGeom prst="rect">
             <a:avLst/>
@@ -20925,7 +20904,7 @@
               <a:buNone/>
             </a:pPr>
             <a:r>
-              <a:rPr lang="en-US" sz="1400" b="1" dirty="0">
+              <a:rPr lang="en-US" sz="1600" b="1" dirty="0">
                 <a:solidFill>
                   <a:srgbClr val="1F3A5F"/>
                 </a:solidFill>
@@ -20933,9 +20912,9 @@
                 <a:ea typeface="Arial" pitchFamily="34" charset="-122"/>
                 <a:cs typeface="Arial" pitchFamily="34" charset="-120"/>
               </a:rPr>
-              <a:t>Normal OAuth gives options; FAPI chooses the strict ones for high-value APIs.</a:t>
-            </a:r>
-            <a:endParaRPr lang="en-US" sz="1400" dirty="0"/>
+              <a:t>Normal OAuth gives options; FAPI chooses the strict ones.</a:t>
+            </a:r>
+            <a:endParaRPr lang="en-US" sz="1600" dirty="0"/>
           </a:p>
         </p:txBody>
       </p:sp>
@@ -21019,7 +20998,7 @@
         <p:spPr>
           <a:xfrm>
             <a:off x="640080" y="640080"/>
-            <a:ext cx="10972800" cy="777240"/>
+            <a:ext cx="10972800" cy="822960"/>
           </a:xfrm>
           <a:prstGeom prst="rect">
             <a:avLst/>
@@ -21035,7 +21014,7 @@
               <a:buNone/>
             </a:pPr>
             <a:r>
-              <a:rPr lang="en-US" sz="2600" b="1" dirty="0">
+              <a:rPr lang="en-US" sz="3000" b="1" dirty="0">
                 <a:solidFill>
                   <a:srgbClr val="1F3A5F"/>
                 </a:solidFill>
@@ -21045,7 +21024,7 @@
               </a:rPr>
               <a:t>FAPI controls mapped to risk</a:t>
             </a:r>
-            <a:endParaRPr lang="en-US" sz="2600" dirty="0"/>
+            <a:endParaRPr lang="en-US" sz="3000" dirty="0"/>
           </a:p>
         </p:txBody>
       </p:sp>
@@ -21142,7 +21121,7 @@
           </p:nvPr>
         </p:nvGraphicFramePr>
         <p:xfrm>
-          <a:off x="640080" y="1554480"/>
+          <a:off x="640080" y="1645920"/>
           <a:ext cx="10881360" cy="914400"/>
         </p:xfrm>
         <a:graphic>
@@ -21153,7 +21132,7 @@
                 <a:gridCol w="5394960"/>
                 <a:gridCol w="5486400"/>
               </a:tblGrid>
-              <a:tr h="438912">
+              <a:tr h="475488">
                 <a:tc>
                   <a:txBody>
                     <a:bodyPr/>
@@ -21163,7 +21142,7 @@
                         <a:buNone/>
                       </a:pPr>
                       <a:r>
-                        <a:rPr lang="en-US" sz="1250" b="1" dirty="0">
+                        <a:rPr lang="en-US" sz="1300" b="1" dirty="0">
                           <a:solidFill>
                             <a:srgbClr val="FFFFFF"/>
                           </a:solidFill>
@@ -21173,7 +21152,7 @@
                         </a:rPr>
                         <a:t>Risk</a:t>
                       </a:r>
-                      <a:endParaRPr lang="en-US" sz="1250" dirty="0">
+                      <a:endParaRPr lang="en-US" sz="1300" dirty="0">
                         <a:latin typeface="Arial" charset="0"/>
                         <a:ea typeface="Arial" charset="0"/>
                         <a:cs typeface="Arial" charset="0"/>
@@ -21231,7 +21210,7 @@
                         <a:buNone/>
                       </a:pPr>
                       <a:r>
-                        <a:rPr lang="en-US" sz="1250" b="1" dirty="0">
+                        <a:rPr lang="en-US" sz="1300" b="1" dirty="0">
                           <a:solidFill>
                             <a:srgbClr val="FFFFFF"/>
                           </a:solidFill>
@@ -21241,7 +21220,7 @@
                         </a:rPr>
                         <a:t>FAPI-oriented control</a:t>
                       </a:r>
-                      <a:endParaRPr lang="en-US" sz="1250" dirty="0">
+                      <a:endParaRPr lang="en-US" sz="1300" dirty="0">
                         <a:latin typeface="Arial" charset="0"/>
                         <a:ea typeface="Arial" charset="0"/>
                         <a:cs typeface="Arial" charset="0"/>
@@ -21291,7 +21270,7 @@
                   </a:tcPr>
                 </a:tc>
               </a:tr>
-              <a:tr h="438912">
+              <a:tr h="475488">
                 <a:tc>
                   <a:txBody>
                     <a:bodyPr/>
@@ -21301,7 +21280,7 @@
                         <a:buNone/>
                       </a:pPr>
                       <a:r>
-                        <a:rPr lang="en-US" sz="1200" dirty="0">
+                        <a:rPr lang="en-US" sz="1250" dirty="0">
                           <a:solidFill>
                             <a:srgbClr val="1D2733"/>
                           </a:solidFill>
@@ -21311,7 +21290,7 @@
                         </a:rPr>
                         <a:t>Authorization request tampering</a:t>
                       </a:r>
-                      <a:endParaRPr lang="en-US" sz="1200" dirty="0">
+                      <a:endParaRPr lang="en-US" sz="1250" dirty="0">
                         <a:latin typeface="Arial" charset="0"/>
                         <a:ea typeface="Arial" charset="0"/>
                         <a:cs typeface="Arial" charset="0"/>
@@ -21369,7 +21348,7 @@
                         <a:buNone/>
                       </a:pPr>
                       <a:r>
-                        <a:rPr lang="en-US" sz="1200" dirty="0">
+                        <a:rPr lang="en-US" sz="1250" dirty="0">
                           <a:solidFill>
                             <a:srgbClr val="1D2733"/>
                           </a:solidFill>
@@ -21379,7 +21358,7 @@
                         </a:rPr>
                         <a:t>PAR + signed request objects (JAR)</a:t>
                       </a:r>
-                      <a:endParaRPr lang="en-US" sz="1200" dirty="0">
+                      <a:endParaRPr lang="en-US" sz="1250" dirty="0">
                         <a:latin typeface="Arial" charset="0"/>
                         <a:ea typeface="Arial" charset="0"/>
                         <a:cs typeface="Arial" charset="0"/>
@@ -21429,7 +21408,7 @@
                   </a:tcPr>
                 </a:tc>
               </a:tr>
-              <a:tr h="438912">
+              <a:tr h="475488">
                 <a:tc>
                   <a:txBody>
                     <a:bodyPr/>
@@ -21439,7 +21418,7 @@
                         <a:buNone/>
                       </a:pPr>
                       <a:r>
-                        <a:rPr lang="en-US" sz="1200" dirty="0">
+                        <a:rPr lang="en-US" sz="1250" dirty="0">
                           <a:solidFill>
                             <a:srgbClr val="1D2733"/>
                           </a:solidFill>
@@ -21449,7 +21428,7 @@
                         </a:rPr>
                         <a:t>Bearer token replay</a:t>
                       </a:r>
-                      <a:endParaRPr lang="en-US" sz="1200" dirty="0">
+                      <a:endParaRPr lang="en-US" sz="1250" dirty="0">
                         <a:latin typeface="Arial" charset="0"/>
                         <a:ea typeface="Arial" charset="0"/>
                         <a:cs typeface="Arial" charset="0"/>
@@ -21507,7 +21486,7 @@
                         <a:buNone/>
                       </a:pPr>
                       <a:r>
-                        <a:rPr lang="en-US" sz="1200" dirty="0">
+                        <a:rPr lang="en-US" sz="1250" dirty="0">
                           <a:solidFill>
                             <a:srgbClr val="1D2733"/>
                           </a:solidFill>
@@ -21517,7 +21496,7 @@
                         </a:rPr>
                         <a:t>Sender-constrained tokens (DPoP / mTLS)</a:t>
                       </a:r>
-                      <a:endParaRPr lang="en-US" sz="1200" dirty="0">
+                      <a:endParaRPr lang="en-US" sz="1250" dirty="0">
                         <a:latin typeface="Arial" charset="0"/>
                         <a:ea typeface="Arial" charset="0"/>
                         <a:cs typeface="Arial" charset="0"/>
@@ -21567,7 +21546,7 @@
                   </a:tcPr>
                 </a:tc>
               </a:tr>
-              <a:tr h="438912">
+              <a:tr h="475488">
                 <a:tc>
                   <a:txBody>
                     <a:bodyPr/>
@@ -21577,7 +21556,7 @@
                         <a:buNone/>
                       </a:pPr>
                       <a:r>
-                        <a:rPr lang="en-US" sz="1200" dirty="0">
+                        <a:rPr lang="en-US" sz="1250" dirty="0">
                           <a:solidFill>
                             <a:srgbClr val="1D2733"/>
                           </a:solidFill>
@@ -21587,7 +21566,7 @@
                         </a:rPr>
                         <a:t>Weak client authentication</a:t>
                       </a:r>
-                      <a:endParaRPr lang="en-US" sz="1200" dirty="0">
+                      <a:endParaRPr lang="en-US" sz="1250" dirty="0">
                         <a:latin typeface="Arial" charset="0"/>
                         <a:ea typeface="Arial" charset="0"/>
                         <a:cs typeface="Arial" charset="0"/>
@@ -21645,7 +21624,7 @@
                         <a:buNone/>
                       </a:pPr>
                       <a:r>
-                        <a:rPr lang="en-US" sz="1200" dirty="0">
+                        <a:rPr lang="en-US" sz="1250" dirty="0">
                           <a:solidFill>
                             <a:srgbClr val="1D2733"/>
                           </a:solidFill>
@@ -21655,7 +21634,7 @@
                         </a:rPr>
                         <a:t>Private-key or certificate-based auth</a:t>
                       </a:r>
-                      <a:endParaRPr lang="en-US" sz="1200" dirty="0">
+                      <a:endParaRPr lang="en-US" sz="1250" dirty="0">
                         <a:latin typeface="Arial" charset="0"/>
                         <a:ea typeface="Arial" charset="0"/>
                         <a:cs typeface="Arial" charset="0"/>
@@ -21705,7 +21684,7 @@
                   </a:tcPr>
                 </a:tc>
               </a:tr>
-              <a:tr h="438912">
+              <a:tr h="475488">
                 <a:tc>
                   <a:txBody>
                     <a:bodyPr/>
@@ -21715,7 +21694,7 @@
                         <a:buNone/>
                       </a:pPr>
                       <a:r>
-                        <a:rPr lang="en-US" sz="1200" dirty="0">
+                        <a:rPr lang="en-US" sz="1250" dirty="0">
                           <a:solidFill>
                             <a:srgbClr val="1D2733"/>
                           </a:solidFill>
@@ -21725,7 +21704,7 @@
                         </a:rPr>
                         <a:t>Token accepted by the wrong API</a:t>
                       </a:r>
-                      <a:endParaRPr lang="en-US" sz="1200" dirty="0">
+                      <a:endParaRPr lang="en-US" sz="1250" dirty="0">
                         <a:latin typeface="Arial" charset="0"/>
                         <a:ea typeface="Arial" charset="0"/>
                         <a:cs typeface="Arial" charset="0"/>
@@ -21783,7 +21762,7 @@
                         <a:buNone/>
                       </a:pPr>
                       <a:r>
-                        <a:rPr lang="en-US" sz="1200" dirty="0">
+                        <a:rPr lang="en-US" sz="1250" dirty="0">
                           <a:solidFill>
                             <a:srgbClr val="1D2733"/>
                           </a:solidFill>
@@ -21793,7 +21772,7 @@
                         </a:rPr>
                         <a:t>Strict audience validation</a:t>
                       </a:r>
-                      <a:endParaRPr lang="en-US" sz="1200" dirty="0">
+                      <a:endParaRPr lang="en-US" sz="1250" dirty="0">
                         <a:latin typeface="Arial" charset="0"/>
                         <a:ea typeface="Arial" charset="0"/>
                         <a:cs typeface="Arial" charset="0"/>
@@ -21843,7 +21822,7 @@
                   </a:tcPr>
                 </a:tc>
               </a:tr>
-              <a:tr h="438912">
+              <a:tr h="475488">
                 <a:tc>
                   <a:txBody>
                     <a:bodyPr/>
@@ -21853,7 +21832,7 @@
                         <a:buNone/>
                       </a:pPr>
                       <a:r>
-                        <a:rPr lang="en-US" sz="1200" dirty="0">
+                        <a:rPr lang="en-US" sz="1250" dirty="0">
                           <a:solidFill>
                             <a:srgbClr val="1D2733"/>
                           </a:solidFill>
@@ -21863,7 +21842,7 @@
                         </a:rPr>
                         <a:t>Payment / consent dispute</a:t>
                       </a:r>
-                      <a:endParaRPr lang="en-US" sz="1200" dirty="0">
+                      <a:endParaRPr lang="en-US" sz="1250" dirty="0">
                         <a:latin typeface="Arial" charset="0"/>
                         <a:ea typeface="Arial" charset="0"/>
                         <a:cs typeface="Arial" charset="0"/>
@@ -21921,7 +21900,7 @@
                         <a:buNone/>
                       </a:pPr>
                       <a:r>
-                        <a:rPr lang="en-US" sz="1200" dirty="0">
+                        <a:rPr lang="en-US" sz="1250" dirty="0">
                           <a:solidFill>
                             <a:srgbClr val="1D2733"/>
                           </a:solidFill>
@@ -21931,7 +21910,7 @@
                         </a:rPr>
                         <a:t>Message signing + audit evidence</a:t>
                       </a:r>
-                      <a:endParaRPr lang="en-US" sz="1200" dirty="0">
+                      <a:endParaRPr lang="en-US" sz="1250" dirty="0">
                         <a:latin typeface="Arial" charset="0"/>
                         <a:ea typeface="Arial" charset="0"/>
                         <a:cs typeface="Arial" charset="0"/>
@@ -22323,7 +22302,7 @@
                 <a:ea typeface="Arial" pitchFamily="34" charset="-122"/>
                 <a:cs typeface="Arial" pitchFamily="34" charset="-120"/>
               </a:rPr>
-              <a:t>List the JWT validation checks and why decoding isn't validation</a:t>
+              <a:t>List the JWT validation checks (decoding isn't validation)</a:t>
             </a:r>
             <a:endParaRPr lang="en-US" sz="1400" dirty="0"/>
           </a:p>
@@ -22401,7 +22380,7 @@
                 <a:ea typeface="Arial" pitchFamily="34" charset="-122"/>
                 <a:cs typeface="Arial" pitchFamily="34" charset="-120"/>
               </a:rPr>
-              <a:t>Connect attacks to mitigations: PKCE, state, redirect matching, DPoP/mTLS</a:t>
+              <a:t>Connect attacks to controls: PKCE, state, redirect, DPoP/mTLS</a:t>
             </a:r>
             <a:endParaRPr lang="en-US" sz="1400" dirty="0"/>
           </a:p>
@@ -22565,7 +22544,7 @@
         <p:spPr>
           <a:xfrm>
             <a:off x="640080" y="640080"/>
-            <a:ext cx="10972800" cy="777240"/>
+            <a:ext cx="10972800" cy="822960"/>
           </a:xfrm>
           <a:prstGeom prst="rect">
             <a:avLst/>
@@ -22581,7 +22560,7 @@
               <a:buNone/>
             </a:pPr>
             <a:r>
-              <a:rPr lang="en-US" sz="2600" b="1" dirty="0">
+              <a:rPr lang="en-US" sz="3000" b="1" dirty="0">
                 <a:solidFill>
                   <a:srgbClr val="1F3A5F"/>
                 </a:solidFill>
@@ -22591,7 +22570,7 @@
               </a:rPr>
               <a:t>A framework, not a login or a token format</a:t>
             </a:r>
-            <a:endParaRPr lang="en-US" sz="2600" dirty="0"/>
+            <a:endParaRPr lang="en-US" sz="3000" dirty="0"/>
           </a:p>
         </p:txBody>
       </p:sp>
@@ -22681,12 +22660,12 @@
         </p:nvSpPr>
         <p:spPr>
           <a:xfrm>
-            <a:off x="640080" y="1554480"/>
-            <a:ext cx="5349240" cy="3291840"/>
+            <a:off x="640080" y="1645920"/>
+            <a:ext cx="5349240" cy="3017520"/>
           </a:xfrm>
           <a:prstGeom prst="roundRect">
             <a:avLst>
-              <a:gd name="adj" fmla="val 1667"/>
+              <a:gd name="adj" fmla="val 1818"/>
             </a:avLst>
           </a:prstGeom>
           <a:solidFill>
@@ -22715,8 +22694,8 @@
         </p:nvSpPr>
         <p:spPr>
           <a:xfrm>
-            <a:off x="822960" y="1700784"/>
-            <a:ext cx="4983480" cy="310896"/>
+            <a:off x="841248" y="1810512"/>
+            <a:ext cx="4946904" cy="347472"/>
           </a:xfrm>
           <a:prstGeom prst="rect">
             <a:avLst/>
@@ -22732,7 +22711,7 @@
               <a:buNone/>
             </a:pPr>
             <a:r>
-              <a:rPr lang="en-US" sz="1400" b="1" dirty="0">
+              <a:rPr lang="en-US" sz="1600" b="1" dirty="0">
                 <a:solidFill>
                   <a:srgbClr val="0F8A7E"/>
                 </a:solidFill>
@@ -22742,7 +22721,7 @@
               </a:rPr>
               <a:t>OAuth 2.0 IS</a:t>
             </a:r>
-            <a:endParaRPr lang="en-US" sz="1400" dirty="0"/>
+            <a:endParaRPr lang="en-US" sz="1600" dirty="0"/>
           </a:p>
         </p:txBody>
       </p:sp>
@@ -22754,8 +22733,8 @@
         </p:nvSpPr>
         <p:spPr>
           <a:xfrm>
-            <a:off x="822960" y="2121408"/>
-            <a:ext cx="4983480" cy="2615184"/>
+            <a:off x="841248" y="2286000"/>
+            <a:ext cx="4946904" cy="2249424"/>
           </a:xfrm>
           <a:prstGeom prst="rect">
             <a:avLst/>
@@ -22767,15 +22746,15 @@
           <a:bodyPr wrap="square" lIns="0" tIns="0" rIns="0" bIns="0" rtlCol="0" anchor="t"/>
           <a:lstStyle/>
           <a:p>
-            <a:pPr marL="177800" indent="-177800">
+            <a:pPr marL="203200" indent="-203200">
               <a:spcAft>
-                <a:spcPts val="400"/>
+                <a:spcPts val="800"/>
               </a:spcAft>
               <a:buSzPct val="100000"/>
               <a:buChar char="•"/>
             </a:pPr>
             <a:r>
-              <a:rPr lang="en-US" sz="1300" dirty="0">
+              <a:rPr lang="en-US" sz="1450" dirty="0">
                 <a:solidFill>
                   <a:srgbClr val="1D2733"/>
                 </a:solidFill>
@@ -22785,18 +22764,18 @@
               </a:rPr>
               <a:t>An authorization framework (RFC 6749)</a:t>
             </a:r>
-            <a:endParaRPr lang="en-US" sz="1300" dirty="0"/>
-          </a:p>
-          <a:p>
-            <a:pPr marL="177800" indent="-177800">
+            <a:endParaRPr lang="en-US" sz="1450" dirty="0"/>
+          </a:p>
+          <a:p>
+            <a:pPr marL="203200" indent="-203200">
               <a:spcAft>
-                <a:spcPts val="400"/>
+                <a:spcPts val="800"/>
               </a:spcAft>
               <a:buSzPct val="100000"/>
               <a:buChar char="•"/>
             </a:pPr>
             <a:r>
-              <a:rPr lang="en-US" sz="1300" dirty="0">
+              <a:rPr lang="en-US" sz="1450" dirty="0">
                 <a:solidFill>
                   <a:srgbClr val="1D2733"/>
                 </a:solidFill>
@@ -22804,20 +22783,20 @@
                 <a:ea typeface="Arial" pitchFamily="34" charset="-122"/>
                 <a:cs typeface="Arial" pitchFamily="34" charset="-120"/>
               </a:rPr>
-              <a:t>A way to get limited, scoped access via tokens</a:t>
-            </a:r>
-            <a:endParaRPr lang="en-US" sz="1300" dirty="0"/>
-          </a:p>
-          <a:p>
-            <a:pPr marL="177800" indent="-177800">
+              <a:t>Limited, scoped access via tokens</a:t>
+            </a:r>
+            <a:endParaRPr lang="en-US" sz="1450" dirty="0"/>
+          </a:p>
+          <a:p>
+            <a:pPr marL="203200" indent="-203200">
               <a:spcAft>
-                <a:spcPts val="400"/>
+                <a:spcPts val="800"/>
               </a:spcAft>
               <a:buSzPct val="100000"/>
               <a:buChar char="•"/>
             </a:pPr>
             <a:r>
-              <a:rPr lang="en-US" sz="1300" dirty="0">
+              <a:rPr lang="en-US" sz="1450" dirty="0">
                 <a:solidFill>
                   <a:srgbClr val="1D2733"/>
                 </a:solidFill>
@@ -22825,9 +22804,9 @@
                 <a:ea typeface="Arial" pitchFamily="34" charset="-122"/>
                 <a:cs typeface="Arial" pitchFamily="34" charset="-120"/>
               </a:rPr>
-              <a:t>Answering: what may this client access?</a:t>
-            </a:r>
-            <a:endParaRPr lang="en-US" sz="1300" dirty="0"/>
+              <a:t>The answer to: what may this client access?</a:t>
+            </a:r>
+            <a:endParaRPr lang="en-US" sz="1450" dirty="0"/>
           </a:p>
         </p:txBody>
       </p:sp>
@@ -22839,12 +22818,12 @@
         </p:nvSpPr>
         <p:spPr>
           <a:xfrm>
-            <a:off x="6309360" y="1554480"/>
-            <a:ext cx="5349240" cy="3291840"/>
+            <a:off x="6309360" y="1645920"/>
+            <a:ext cx="5349240" cy="3017520"/>
           </a:xfrm>
           <a:prstGeom prst="roundRect">
             <a:avLst>
-              <a:gd name="adj" fmla="val 1667"/>
+              <a:gd name="adj" fmla="val 1818"/>
             </a:avLst>
           </a:prstGeom>
           <a:solidFill>
@@ -22873,8 +22852,8 @@
         </p:nvSpPr>
         <p:spPr>
           <a:xfrm>
-            <a:off x="6492240" y="1700784"/>
-            <a:ext cx="4983480" cy="310896"/>
+            <a:off x="6510528" y="1810512"/>
+            <a:ext cx="4946904" cy="347472"/>
           </a:xfrm>
           <a:prstGeom prst="rect">
             <a:avLst/>
@@ -22890,7 +22869,7 @@
               <a:buNone/>
             </a:pPr>
             <a:r>
-              <a:rPr lang="en-US" sz="1400" b="1" dirty="0">
+              <a:rPr lang="en-US" sz="1600" b="1" dirty="0">
                 <a:solidFill>
                   <a:srgbClr val="C0492F"/>
                 </a:solidFill>
@@ -22900,7 +22879,7 @@
               </a:rPr>
               <a:t>OAuth 2.0 is NOT</a:t>
             </a:r>
-            <a:endParaRPr lang="en-US" sz="1400" dirty="0"/>
+            <a:endParaRPr lang="en-US" sz="1600" dirty="0"/>
           </a:p>
         </p:txBody>
       </p:sp>
@@ -22912,8 +22891,8 @@
         </p:nvSpPr>
         <p:spPr>
           <a:xfrm>
-            <a:off x="6492240" y="2121408"/>
-            <a:ext cx="4983480" cy="2615184"/>
+            <a:off x="6510528" y="2286000"/>
+            <a:ext cx="4946904" cy="2249424"/>
           </a:xfrm>
           <a:prstGeom prst="rect">
             <a:avLst/>
@@ -22925,15 +22904,15 @@
           <a:bodyPr wrap="square" lIns="0" tIns="0" rIns="0" bIns="0" rtlCol="0" anchor="t"/>
           <a:lstStyle/>
           <a:p>
-            <a:pPr marL="177800" indent="-177800">
+            <a:pPr marL="203200" indent="-203200">
               <a:spcAft>
-                <a:spcPts val="400"/>
+                <a:spcPts val="800"/>
               </a:spcAft>
               <a:buSzPct val="100000"/>
               <a:buChar char="•"/>
             </a:pPr>
             <a:r>
-              <a:rPr lang="en-US" sz="1300" dirty="0">
+              <a:rPr lang="en-US" sz="1450" dirty="0">
                 <a:solidFill>
                   <a:srgbClr val="1D2733"/>
                 </a:solidFill>
@@ -22943,18 +22922,18 @@
               </a:rPr>
               <a:t>Password sharing</a:t>
             </a:r>
-            <a:endParaRPr lang="en-US" sz="1300" dirty="0"/>
-          </a:p>
-          <a:p>
-            <a:pPr marL="177800" indent="-177800">
+            <a:endParaRPr lang="en-US" sz="1450" dirty="0"/>
+          </a:p>
+          <a:p>
+            <a:pPr marL="203200" indent="-203200">
               <a:spcAft>
-                <a:spcPts val="400"/>
+                <a:spcPts val="800"/>
               </a:spcAft>
               <a:buSzPct val="100000"/>
               <a:buChar char="•"/>
             </a:pPr>
             <a:r>
-              <a:rPr lang="en-US" sz="1300" dirty="0">
+              <a:rPr lang="en-US" sz="1450" dirty="0">
                 <a:solidFill>
                   <a:srgbClr val="1D2733"/>
                 </a:solidFill>
@@ -22962,20 +22941,20 @@
                 <a:ea typeface="Arial" pitchFamily="34" charset="-122"/>
                 <a:cs typeface="Arial" pitchFamily="34" charset="-120"/>
               </a:rPr>
-              <a:t>A single endpoint or token format</a:t>
-            </a:r>
-            <a:endParaRPr lang="en-US" sz="1300" dirty="0"/>
-          </a:p>
-          <a:p>
-            <a:pPr marL="177800" indent="-177800">
+              <a:t>One endpoint or token format</a:t>
+            </a:r>
+            <a:endParaRPr lang="en-US" sz="1450" dirty="0"/>
+          </a:p>
+          <a:p>
+            <a:pPr marL="203200" indent="-203200">
               <a:spcAft>
-                <a:spcPts val="400"/>
+                <a:spcPts val="800"/>
               </a:spcAft>
               <a:buSzPct val="100000"/>
               <a:buChar char="•"/>
             </a:pPr>
             <a:r>
-              <a:rPr lang="en-US" sz="1300" dirty="0">
+              <a:rPr lang="en-US" sz="1450" dirty="0">
                 <a:solidFill>
                   <a:srgbClr val="1D2733"/>
                 </a:solidFill>
@@ -22983,20 +22962,20 @@
                 <a:ea typeface="Arial" pitchFamily="34" charset="-122"/>
                 <a:cs typeface="Arial" pitchFamily="34" charset="-120"/>
               </a:rPr>
-              <a:t>A complete login protocol (that's OpenID Connect)</a:t>
-            </a:r>
-            <a:endParaRPr lang="en-US" sz="1300" dirty="0"/>
-          </a:p>
-          <a:p>
-            <a:pPr marL="177800" indent="-177800">
+              <a:t>A login protocol (that's OpenID Connect)</a:t>
+            </a:r>
+            <a:endParaRPr lang="en-US" sz="1450" dirty="0"/>
+          </a:p>
+          <a:p>
+            <a:pPr marL="203200" indent="-203200">
               <a:spcAft>
-                <a:spcPts val="400"/>
+                <a:spcPts val="800"/>
               </a:spcAft>
               <a:buSzPct val="100000"/>
               <a:buChar char="•"/>
             </a:pPr>
             <a:r>
-              <a:rPr lang="en-US" sz="1300" dirty="0">
+              <a:rPr lang="en-US" sz="1450" dirty="0">
                 <a:solidFill>
                   <a:srgbClr val="1D2733"/>
                 </a:solidFill>
@@ -23004,9 +22983,9 @@
                 <a:ea typeface="Arial" pitchFamily="34" charset="-122"/>
                 <a:cs typeface="Arial" pitchFamily="34" charset="-120"/>
               </a:rPr>
-              <a:t>Automatically secure — implementation matters</a:t>
-            </a:r>
-            <a:endParaRPr lang="en-US" sz="1300" dirty="0"/>
+              <a:t>Automatically secure</a:t>
+            </a:r>
+            <a:endParaRPr lang="en-US" sz="1450" dirty="0"/>
           </a:p>
         </p:txBody>
       </p:sp>
@@ -23018,8 +22997,8 @@
         </p:nvSpPr>
         <p:spPr>
           <a:xfrm>
-            <a:off x="640080" y="5074920"/>
-            <a:ext cx="10972800" cy="365760"/>
+            <a:off x="640080" y="4937760"/>
+            <a:ext cx="10972800" cy="457200"/>
           </a:xfrm>
           <a:prstGeom prst="rect">
             <a:avLst/>
@@ -23035,7 +23014,7 @@
               <a:buNone/>
             </a:pPr>
             <a:r>
-              <a:rPr lang="en-US" sz="1400" b="1" dirty="0">
+              <a:rPr lang="en-US" sz="1600" b="1" dirty="0">
                 <a:solidFill>
                   <a:srgbClr val="1F3A5F"/>
                 </a:solidFill>
@@ -23045,7 +23024,7 @@
               </a:rPr>
               <a:t>Framework = the model · RFCs = the spec · Flows = ways to use it.</a:t>
             </a:r>
-            <a:endParaRPr lang="en-US" sz="1400" dirty="0"/>
+            <a:endParaRPr lang="en-US" sz="1600" dirty="0"/>
           </a:p>
         </p:txBody>
       </p:sp>
@@ -23129,7 +23108,7 @@
         <p:spPr>
           <a:xfrm>
             <a:off x="640080" y="640080"/>
-            <a:ext cx="10972800" cy="777240"/>
+            <a:ext cx="10972800" cy="822960"/>
           </a:xfrm>
           <a:prstGeom prst="rect">
             <a:avLst/>
@@ -23145,7 +23124,7 @@
               <a:buNone/>
             </a:pPr>
             <a:r>
-              <a:rPr lang="en-US" sz="2600" b="1" dirty="0">
+              <a:rPr lang="en-US" sz="3000" b="1" dirty="0">
                 <a:solidFill>
                   <a:srgbClr val="1F3A5F"/>
                 </a:solidFill>
@@ -23155,7 +23134,7 @@
               </a:rPr>
               <a:t>Password sharing is the wrong shape</a:t>
             </a:r>
-            <a:endParaRPr lang="en-US" sz="2600" dirty="0"/>
+            <a:endParaRPr lang="en-US" sz="3000" dirty="0"/>
           </a:p>
         </p:txBody>
       </p:sp>
@@ -23245,12 +23224,12 @@
         </p:nvSpPr>
         <p:spPr>
           <a:xfrm>
-            <a:off x="640080" y="1554480"/>
-            <a:ext cx="5349240" cy="3017520"/>
+            <a:off x="640080" y="1645920"/>
+            <a:ext cx="5349240" cy="2834640"/>
           </a:xfrm>
           <a:prstGeom prst="roundRect">
             <a:avLst>
-              <a:gd name="adj" fmla="val 1818"/>
+              <a:gd name="adj" fmla="val 1935"/>
             </a:avLst>
           </a:prstGeom>
           <a:solidFill>
@@ -23279,8 +23258,8 @@
         </p:nvSpPr>
         <p:spPr>
           <a:xfrm>
-            <a:off x="822960" y="1700784"/>
-            <a:ext cx="4983480" cy="310896"/>
+            <a:off x="841248" y="1810512"/>
+            <a:ext cx="4946904" cy="347472"/>
           </a:xfrm>
           <a:prstGeom prst="rect">
             <a:avLst/>
@@ -23296,7 +23275,7 @@
               <a:buNone/>
             </a:pPr>
             <a:r>
-              <a:rPr lang="en-US" sz="1400" b="1" dirty="0">
+              <a:rPr lang="en-US" sz="1600" b="1" dirty="0">
                 <a:solidFill>
                   <a:srgbClr val="C0492F"/>
                 </a:solidFill>
@@ -23306,7 +23285,7 @@
               </a:rPr>
               <a:t>Give away the password</a:t>
             </a:r>
-            <a:endParaRPr lang="en-US" sz="1400" dirty="0"/>
+            <a:endParaRPr lang="en-US" sz="1600" dirty="0"/>
           </a:p>
         </p:txBody>
       </p:sp>
@@ -23318,8 +23297,8 @@
         </p:nvSpPr>
         <p:spPr>
           <a:xfrm>
-            <a:off x="822960" y="2121408"/>
-            <a:ext cx="4983480" cy="2340864"/>
+            <a:off x="841248" y="2286000"/>
+            <a:ext cx="4946904" cy="2066544"/>
           </a:xfrm>
           <a:prstGeom prst="rect">
             <a:avLst/>
@@ -23331,15 +23310,15 @@
           <a:bodyPr wrap="square" lIns="0" tIns="0" rIns="0" bIns="0" rtlCol="0" anchor="t"/>
           <a:lstStyle/>
           <a:p>
-            <a:pPr marL="177800" indent="-177800">
+            <a:pPr marL="203200" indent="-203200">
               <a:spcAft>
-                <a:spcPts val="400"/>
+                <a:spcPts val="800"/>
               </a:spcAft>
               <a:buSzPct val="100000"/>
               <a:buChar char="•"/>
             </a:pPr>
             <a:r>
-              <a:rPr lang="en-US" sz="1300" dirty="0">
+              <a:rPr lang="en-US" sz="1450" dirty="0">
                 <a:solidFill>
                   <a:srgbClr val="1D2733"/>
                 </a:solidFill>
@@ -23347,20 +23326,20 @@
                 <a:ea typeface="Arial" pitchFamily="34" charset="-122"/>
                 <a:cs typeface="Arial" pitchFamily="34" charset="-120"/>
               </a:rPr>
-              <a:t>App can do everything you can</a:t>
-            </a:r>
-            <a:endParaRPr lang="en-US" sz="1300" dirty="0"/>
-          </a:p>
-          <a:p>
-            <a:pPr marL="177800" indent="-177800">
+              <a:t>Does everything you can</a:t>
+            </a:r>
+            <a:endParaRPr lang="en-US" sz="1450" dirty="0"/>
+          </a:p>
+          <a:p>
+            <a:pPr marL="203200" indent="-203200">
               <a:spcAft>
-                <a:spcPts val="400"/>
+                <a:spcPts val="800"/>
               </a:spcAft>
               <a:buSzPct val="100000"/>
               <a:buChar char="•"/>
             </a:pPr>
             <a:r>
-              <a:rPr lang="en-US" sz="1300" dirty="0">
+              <a:rPr lang="en-US" sz="1450" dirty="0">
                 <a:solidFill>
                   <a:srgbClr val="1D2733"/>
                 </a:solidFill>
@@ -23368,20 +23347,20 @@
                 <a:ea typeface="Arial" pitchFamily="34" charset="-122"/>
                 <a:cs typeface="Arial" pitchFamily="34" charset="-120"/>
               </a:rPr>
-              <a:t>No way to scope to one resource</a:t>
-            </a:r>
-            <a:endParaRPr lang="en-US" sz="1300" dirty="0"/>
-          </a:p>
-          <a:p>
-            <a:pPr marL="177800" indent="-177800">
+              <a:t>No way to scope</a:t>
+            </a:r>
+            <a:endParaRPr lang="en-US" sz="1450" dirty="0"/>
+          </a:p>
+          <a:p>
+            <a:pPr marL="203200" indent="-203200">
               <a:spcAft>
-                <a:spcPts val="400"/>
+                <a:spcPts val="800"/>
               </a:spcAft>
               <a:buSzPct val="100000"/>
               <a:buChar char="•"/>
             </a:pPr>
             <a:r>
-              <a:rPr lang="en-US" sz="1300" dirty="0">
+              <a:rPr lang="en-US" sz="1450" dirty="0">
                 <a:solidFill>
                   <a:srgbClr val="1D2733"/>
                 </a:solidFill>
@@ -23389,20 +23368,20 @@
                 <a:ea typeface="Arial" pitchFamily="34" charset="-122"/>
                 <a:cs typeface="Arial" pitchFamily="34" charset="-120"/>
               </a:rPr>
-              <a:t>Revoking means changing the password</a:t>
-            </a:r>
-            <a:endParaRPr lang="en-US" sz="1300" dirty="0"/>
-          </a:p>
-          <a:p>
-            <a:pPr marL="177800" indent="-177800">
+              <a:t>Revoke = change your password</a:t>
+            </a:r>
+            <a:endParaRPr lang="en-US" sz="1450" dirty="0"/>
+          </a:p>
+          <a:p>
+            <a:pPr marL="203200" indent="-203200">
               <a:spcAft>
-                <a:spcPts val="400"/>
+                <a:spcPts val="800"/>
               </a:spcAft>
               <a:buSzPct val="100000"/>
               <a:buChar char="•"/>
             </a:pPr>
             <a:r>
-              <a:rPr lang="en-US" sz="1300" dirty="0">
+              <a:rPr lang="en-US" sz="1450" dirty="0">
                 <a:solidFill>
                   <a:srgbClr val="1D2733"/>
                 </a:solidFill>
@@ -23410,9 +23389,9 @@
                 <a:ea typeface="Arial" pitchFamily="34" charset="-122"/>
                 <a:cs typeface="Arial" pitchFamily="34" charset="-120"/>
               </a:rPr>
-              <a:t>App breach exposes the whole account</a:t>
-            </a:r>
-            <a:endParaRPr lang="en-US" sz="1300" dirty="0"/>
+              <a:t>Breach exposes the whole account</a:t>
+            </a:r>
+            <a:endParaRPr lang="en-US" sz="1450" dirty="0"/>
           </a:p>
         </p:txBody>
       </p:sp>
@@ -23424,12 +23403,12 @@
         </p:nvSpPr>
         <p:spPr>
           <a:xfrm>
-            <a:off x="6309360" y="1554480"/>
-            <a:ext cx="5349240" cy="3017520"/>
+            <a:off x="6309360" y="1645920"/>
+            <a:ext cx="5349240" cy="2834640"/>
           </a:xfrm>
           <a:prstGeom prst="roundRect">
             <a:avLst>
-              <a:gd name="adj" fmla="val 1818"/>
+              <a:gd name="adj" fmla="val 1935"/>
             </a:avLst>
           </a:prstGeom>
           <a:solidFill>
@@ -23458,8 +23437,8 @@
         </p:nvSpPr>
         <p:spPr>
           <a:xfrm>
-            <a:off x="6492240" y="1700784"/>
-            <a:ext cx="4983480" cy="310896"/>
+            <a:off x="6510528" y="1810512"/>
+            <a:ext cx="4946904" cy="347472"/>
           </a:xfrm>
           <a:prstGeom prst="rect">
             <a:avLst/>
@@ -23475,7 +23454,7 @@
               <a:buNone/>
             </a:pPr>
             <a:r>
-              <a:rPr lang="en-US" sz="1400" b="1" dirty="0">
+              <a:rPr lang="en-US" sz="1600" b="1" dirty="0">
                 <a:solidFill>
                   <a:srgbClr val="0F8A7E"/>
                 </a:solidFill>
@@ -23485,7 +23464,7 @@
               </a:rPr>
               <a:t>Give a scoped token</a:t>
             </a:r>
-            <a:endParaRPr lang="en-US" sz="1400" dirty="0"/>
+            <a:endParaRPr lang="en-US" sz="1600" dirty="0"/>
           </a:p>
         </p:txBody>
       </p:sp>
@@ -23497,8 +23476,8 @@
         </p:nvSpPr>
         <p:spPr>
           <a:xfrm>
-            <a:off x="6492240" y="2121408"/>
-            <a:ext cx="4983480" cy="2340864"/>
+            <a:off x="6510528" y="2286000"/>
+            <a:ext cx="4946904" cy="2066544"/>
           </a:xfrm>
           <a:prstGeom prst="rect">
             <a:avLst/>
@@ -23510,15 +23489,15 @@
           <a:bodyPr wrap="square" lIns="0" tIns="0" rIns="0" bIns="0" rtlCol="0" anchor="t"/>
           <a:lstStyle/>
           <a:p>
-            <a:pPr marL="177800" indent="-177800">
+            <a:pPr marL="203200" indent="-203200">
               <a:spcAft>
-                <a:spcPts val="400"/>
+                <a:spcPts val="800"/>
               </a:spcAft>
               <a:buSzPct val="100000"/>
               <a:buChar char="•"/>
             </a:pPr>
             <a:r>
-              <a:rPr lang="en-US" sz="1300" dirty="0">
+              <a:rPr lang="en-US" sz="1450" dirty="0">
                 <a:solidFill>
                   <a:srgbClr val="1D2733"/>
                 </a:solidFill>
@@ -23526,20 +23505,20 @@
                 <a:ea typeface="Arial" pitchFamily="34" charset="-122"/>
                 <a:cs typeface="Arial" pitchFamily="34" charset="-120"/>
               </a:rPr>
-              <a:t>Limited to exactly what's needed</a:t>
-            </a:r>
-            <a:endParaRPr lang="en-US" sz="1300" dirty="0"/>
-          </a:p>
-          <a:p>
-            <a:pPr marL="177800" indent="-177800">
+              <a:t>Limited to what's needed</a:t>
+            </a:r>
+            <a:endParaRPr lang="en-US" sz="1450" dirty="0"/>
+          </a:p>
+          <a:p>
+            <a:pPr marL="203200" indent="-203200">
               <a:spcAft>
-                <a:spcPts val="400"/>
+                <a:spcPts val="800"/>
               </a:spcAft>
               <a:buSzPct val="100000"/>
               <a:buChar char="•"/>
             </a:pPr>
             <a:r>
-              <a:rPr lang="en-US" sz="1300" dirty="0">
+              <a:rPr lang="en-US" sz="1450" dirty="0">
                 <a:solidFill>
                   <a:srgbClr val="1D2733"/>
                 </a:solidFill>
@@ -23547,20 +23526,20 @@
                 <a:ea typeface="Arial" pitchFamily="34" charset="-122"/>
                 <a:cs typeface="Arial" pitchFamily="34" charset="-120"/>
               </a:rPr>
-              <a:t>Password never leaves the trusted service</a:t>
-            </a:r>
-            <a:endParaRPr lang="en-US" sz="1300" dirty="0"/>
-          </a:p>
-          <a:p>
-            <a:pPr marL="177800" indent="-177800">
+              <a:t>Password stays with the trusted service</a:t>
+            </a:r>
+            <a:endParaRPr lang="en-US" sz="1450" dirty="0"/>
+          </a:p>
+          <a:p>
+            <a:pPr marL="203200" indent="-203200">
               <a:spcAft>
-                <a:spcPts val="400"/>
+                <a:spcPts val="800"/>
               </a:spcAft>
               <a:buSzPct val="100000"/>
               <a:buChar char="•"/>
             </a:pPr>
             <a:r>
-              <a:rPr lang="en-US" sz="1300" dirty="0">
+              <a:rPr lang="en-US" sz="1450" dirty="0">
                 <a:solidFill>
                   <a:srgbClr val="1D2733"/>
                 </a:solidFill>
@@ -23570,18 +23549,18 @@
               </a:rPr>
               <a:t>Revoke just this app, anytime</a:t>
             </a:r>
-            <a:endParaRPr lang="en-US" sz="1300" dirty="0"/>
-          </a:p>
-          <a:p>
-            <a:pPr marL="177800" indent="-177800">
+            <a:endParaRPr lang="en-US" sz="1450" dirty="0"/>
+          </a:p>
+          <a:p>
+            <a:pPr marL="203200" indent="-203200">
               <a:spcAft>
-                <a:spcPts val="400"/>
+                <a:spcPts val="800"/>
               </a:spcAft>
               <a:buSzPct val="100000"/>
               <a:buChar char="•"/>
             </a:pPr>
             <a:r>
-              <a:rPr lang="en-US" sz="1300" dirty="0">
+              <a:rPr lang="en-US" sz="1450" dirty="0">
                 <a:solidFill>
                   <a:srgbClr val="1D2733"/>
                 </a:solidFill>
@@ -23589,9 +23568,9 @@
                 <a:ea typeface="Arial" pitchFamily="34" charset="-122"/>
                 <a:cs typeface="Arial" pitchFamily="34" charset="-120"/>
               </a:rPr>
-              <a:t>Token expires on its own</a:t>
-            </a:r>
-            <a:endParaRPr lang="en-US" sz="1300" dirty="0"/>
+              <a:t>Expires on its own</a:t>
+            </a:r>
+            <a:endParaRPr lang="en-US" sz="1450" dirty="0"/>
           </a:p>
         </p:txBody>
       </p:sp>
@@ -23603,8 +23582,8 @@
         </p:nvSpPr>
         <p:spPr>
           <a:xfrm>
-            <a:off x="640080" y="4846320"/>
-            <a:ext cx="10972800" cy="365760"/>
+            <a:off x="640080" y="4754880"/>
+            <a:ext cx="10972800" cy="457200"/>
           </a:xfrm>
           <a:prstGeom prst="rect">
             <a:avLst/>
@@ -23620,7 +23599,7 @@
               <a:buNone/>
             </a:pPr>
             <a:r>
-              <a:rPr lang="en-US" sz="1500" b="1" dirty="0">
+              <a:rPr lang="en-US" sz="1600" b="1" dirty="0">
                 <a:solidFill>
                   <a:srgbClr val="1F3A5F"/>
                 </a:solidFill>
@@ -23630,7 +23609,7 @@
               </a:rPr>
               <a:t>The client receives permission, not the user's password.</a:t>
             </a:r>
-            <a:endParaRPr lang="en-US" sz="1500" dirty="0"/>
+            <a:endParaRPr lang="en-US" sz="1600" dirty="0"/>
           </a:p>
         </p:txBody>
       </p:sp>
@@ -23714,7 +23693,7 @@
         <p:spPr>
           <a:xfrm>
             <a:off x="640080" y="640080"/>
-            <a:ext cx="10972800" cy="777240"/>
+            <a:ext cx="10972800" cy="822960"/>
           </a:xfrm>
           <a:prstGeom prst="rect">
             <a:avLst/>
@@ -23730,7 +23709,7 @@
               <a:buNone/>
             </a:pPr>
             <a:r>
-              <a:rPr lang="en-US" sz="2600" b="1" dirty="0">
+              <a:rPr lang="en-US" sz="3000" b="1" dirty="0">
                 <a:solidFill>
                   <a:srgbClr val="1F3A5F"/>
                 </a:solidFill>
@@ -23740,7 +23719,7 @@
               </a:rPr>
               <a:t>The four actors</a:t>
             </a:r>
-            <a:endParaRPr lang="en-US" sz="2600" dirty="0"/>
+            <a:endParaRPr lang="en-US" sz="3000" dirty="0"/>
           </a:p>
         </p:txBody>
       </p:sp>
@@ -23831,11 +23810,11 @@
         <p:spPr>
           <a:xfrm>
             <a:off x="640080" y="1645920"/>
-            <a:ext cx="5349240" cy="1371600"/>
+            <a:ext cx="5349240" cy="1325880"/>
           </a:xfrm>
           <a:prstGeom prst="roundRect">
             <a:avLst>
-              <a:gd name="adj" fmla="val 4000"/>
+              <a:gd name="adj" fmla="val 4138"/>
             </a:avLst>
           </a:prstGeom>
           <a:solidFill>
@@ -23864,8 +23843,8 @@
         </p:nvSpPr>
         <p:spPr>
           <a:xfrm>
-            <a:off x="822960" y="1792224"/>
-            <a:ext cx="4983480" cy="310896"/>
+            <a:off x="841248" y="1810512"/>
+            <a:ext cx="4946904" cy="347472"/>
           </a:xfrm>
           <a:prstGeom prst="rect">
             <a:avLst/>
@@ -23881,7 +23860,7 @@
               <a:buNone/>
             </a:pPr>
             <a:r>
-              <a:rPr lang="en-US" sz="1400" b="1" dirty="0">
+              <a:rPr lang="en-US" sz="1600" b="1" dirty="0">
                 <a:solidFill>
                   <a:srgbClr val="1F3A5F"/>
                 </a:solidFill>
@@ -23891,7 +23870,7 @@
               </a:rPr>
               <a:t>Resource Owner</a:t>
             </a:r>
-            <a:endParaRPr lang="en-US" sz="1400" dirty="0"/>
+            <a:endParaRPr lang="en-US" sz="1600" dirty="0"/>
           </a:p>
         </p:txBody>
       </p:sp>
@@ -23903,8 +23882,8 @@
         </p:nvSpPr>
         <p:spPr>
           <a:xfrm>
-            <a:off x="822960" y="2212848"/>
-            <a:ext cx="4983480" cy="694944"/>
+            <a:off x="841248" y="2286000"/>
+            <a:ext cx="4946904" cy="557784"/>
           </a:xfrm>
           <a:prstGeom prst="rect">
             <a:avLst/>
@@ -23918,12 +23897,12 @@
           <a:p>
             <a:pPr indent="0" marL="0">
               <a:spcAft>
-                <a:spcPts val="400"/>
+                <a:spcPts val="800"/>
               </a:spcAft>
               <a:buNone/>
             </a:pPr>
             <a:r>
-              <a:rPr lang="en-US" sz="1300" dirty="0">
+              <a:rPr lang="en-US" sz="1450" dirty="0">
                 <a:solidFill>
                   <a:srgbClr val="1D2733"/>
                 </a:solidFill>
@@ -23931,9 +23910,9 @@
                 <a:ea typeface="Arial" pitchFamily="34" charset="-122"/>
                 <a:cs typeface="Arial" pitchFamily="34" charset="-120"/>
               </a:rPr>
-              <a:t>Owns the data — the user (e.g. you on GitHub)</a:t>
-            </a:r>
-            <a:endParaRPr lang="en-US" sz="1300" dirty="0"/>
+              <a:t>Owns the data — the user</a:t>
+            </a:r>
+            <a:endParaRPr lang="en-US" sz="1450" dirty="0"/>
           </a:p>
         </p:txBody>
       </p:sp>
@@ -23946,11 +23925,11 @@
         <p:spPr>
           <a:xfrm>
             <a:off x="6217920" y="1645920"/>
-            <a:ext cx="5349240" cy="1371600"/>
+            <a:ext cx="5349240" cy="1325880"/>
           </a:xfrm>
           <a:prstGeom prst="roundRect">
             <a:avLst>
-              <a:gd name="adj" fmla="val 4000"/>
+              <a:gd name="adj" fmla="val 4138"/>
             </a:avLst>
           </a:prstGeom>
           <a:solidFill>
@@ -23979,8 +23958,8 @@
         </p:nvSpPr>
         <p:spPr>
           <a:xfrm>
-            <a:off x="6400800" y="1792224"/>
-            <a:ext cx="4983480" cy="310896"/>
+            <a:off x="6419088" y="1810512"/>
+            <a:ext cx="4946904" cy="347472"/>
           </a:xfrm>
           <a:prstGeom prst="rect">
             <a:avLst/>
@@ -23996,7 +23975,7 @@
               <a:buNone/>
             </a:pPr>
             <a:r>
-              <a:rPr lang="en-US" sz="1400" b="1" dirty="0">
+              <a:rPr lang="en-US" sz="1600" b="1" dirty="0">
                 <a:solidFill>
                   <a:srgbClr val="1F3A5F"/>
                 </a:solidFill>
@@ -24006,7 +23985,7 @@
               </a:rPr>
               <a:t>Client</a:t>
             </a:r>
-            <a:endParaRPr lang="en-US" sz="1400" dirty="0"/>
+            <a:endParaRPr lang="en-US" sz="1600" dirty="0"/>
           </a:p>
         </p:txBody>
       </p:sp>
@@ -24018,8 +23997,8 @@
         </p:nvSpPr>
         <p:spPr>
           <a:xfrm>
-            <a:off x="6400800" y="2212848"/>
-            <a:ext cx="4983480" cy="694944"/>
+            <a:off x="6419088" y="2286000"/>
+            <a:ext cx="4946904" cy="557784"/>
           </a:xfrm>
           <a:prstGeom prst="rect">
             <a:avLst/>
@@ -24033,12 +24012,12 @@
           <a:p>
             <a:pPr indent="0" marL="0">
               <a:spcAft>
-                <a:spcPts val="400"/>
+                <a:spcPts val="800"/>
               </a:spcAft>
               <a:buNone/>
             </a:pPr>
             <a:r>
-              <a:rPr lang="en-US" sz="1300" dirty="0">
+              <a:rPr lang="en-US" sz="1450" dirty="0">
                 <a:solidFill>
                   <a:srgbClr val="1D2733"/>
                 </a:solidFill>
@@ -24046,9 +24025,9 @@
                 <a:ea typeface="Arial" pitchFamily="34" charset="-122"/>
                 <a:cs typeface="Arial" pitchFamily="34" charset="-120"/>
               </a:rPr>
-              <a:t>Wants access — the app (e.g. a deployment dashboard)</a:t>
-            </a:r>
-            <a:endParaRPr lang="en-US" sz="1300" dirty="0"/>
+              <a:t>Wants access — the app</a:t>
+            </a:r>
+            <a:endParaRPr lang="en-US" sz="1450" dirty="0"/>
           </a:p>
         </p:txBody>
       </p:sp>
@@ -24061,11 +24040,11 @@
         <p:spPr>
           <a:xfrm>
             <a:off x="640080" y="3200400"/>
-            <a:ext cx="5349240" cy="1371600"/>
+            <a:ext cx="5349240" cy="1325880"/>
           </a:xfrm>
           <a:prstGeom prst="roundRect">
             <a:avLst>
-              <a:gd name="adj" fmla="val 4000"/>
+              <a:gd name="adj" fmla="val 4138"/>
             </a:avLst>
           </a:prstGeom>
           <a:solidFill>
@@ -24094,8 +24073,8 @@
         </p:nvSpPr>
         <p:spPr>
           <a:xfrm>
-            <a:off x="822960" y="3346704"/>
-            <a:ext cx="4983480" cy="310896"/>
+            <a:off x="841248" y="3364992"/>
+            <a:ext cx="4946904" cy="347472"/>
           </a:xfrm>
           <a:prstGeom prst="rect">
             <a:avLst/>
@@ -24111,7 +24090,7 @@
               <a:buNone/>
             </a:pPr>
             <a:r>
-              <a:rPr lang="en-US" sz="1400" b="1" dirty="0">
+              <a:rPr lang="en-US" sz="1600" b="1" dirty="0">
                 <a:solidFill>
                   <a:srgbClr val="1F3A5F"/>
                 </a:solidFill>
@@ -24121,7 +24100,7 @@
               </a:rPr>
               <a:t>Authorization Server</a:t>
             </a:r>
-            <a:endParaRPr lang="en-US" sz="1400" dirty="0"/>
+            <a:endParaRPr lang="en-US" sz="1600" dirty="0"/>
           </a:p>
         </p:txBody>
       </p:sp>
@@ -24133,8 +24112,8 @@
         </p:nvSpPr>
         <p:spPr>
           <a:xfrm>
-            <a:off x="822960" y="3767328"/>
-            <a:ext cx="4983480" cy="694944"/>
+            <a:off x="841248" y="3840480"/>
+            <a:ext cx="4946904" cy="557784"/>
           </a:xfrm>
           <a:prstGeom prst="rect">
             <a:avLst/>
@@ -24148,12 +24127,12 @@
           <a:p>
             <a:pPr indent="0" marL="0">
               <a:spcAft>
-                <a:spcPts val="400"/>
+                <a:spcPts val="800"/>
               </a:spcAft>
               <a:buNone/>
             </a:pPr>
             <a:r>
-              <a:rPr lang="en-US" sz="1300" dirty="0">
+              <a:rPr lang="en-US" sz="1450" dirty="0">
                 <a:solidFill>
                   <a:srgbClr val="1D2733"/>
                 </a:solidFill>
@@ -24161,9 +24140,9 @@
                 <a:ea typeface="Arial" pitchFamily="34" charset="-122"/>
                 <a:cs typeface="Arial" pitchFamily="34" charset="-120"/>
               </a:rPr>
-              <a:t>Authenticates the user, gets consent, issues tokens</a:t>
-            </a:r>
-            <a:endParaRPr lang="en-US" sz="1300" dirty="0"/>
+              <a:t>Authenticates, gets consent, issues tokens</a:t>
+            </a:r>
+            <a:endParaRPr lang="en-US" sz="1450" dirty="0"/>
           </a:p>
         </p:txBody>
       </p:sp>
@@ -24176,11 +24155,11 @@
         <p:spPr>
           <a:xfrm>
             <a:off x="6217920" y="3200400"/>
-            <a:ext cx="5349240" cy="1371600"/>
+            <a:ext cx="5349240" cy="1325880"/>
           </a:xfrm>
           <a:prstGeom prst="roundRect">
             <a:avLst>
-              <a:gd name="adj" fmla="val 4000"/>
+              <a:gd name="adj" fmla="val 4138"/>
             </a:avLst>
           </a:prstGeom>
           <a:solidFill>
@@ -24209,8 +24188,8 @@
         </p:nvSpPr>
         <p:spPr>
           <a:xfrm>
-            <a:off x="6400800" y="3346704"/>
-            <a:ext cx="4983480" cy="310896"/>
+            <a:off x="6419088" y="3364992"/>
+            <a:ext cx="4946904" cy="347472"/>
           </a:xfrm>
           <a:prstGeom prst="rect">
             <a:avLst/>
@@ -24226,7 +24205,7 @@
               <a:buNone/>
             </a:pPr>
             <a:r>
-              <a:rPr lang="en-US" sz="1400" b="1" dirty="0">
+              <a:rPr lang="en-US" sz="1600" b="1" dirty="0">
                 <a:solidFill>
                   <a:srgbClr val="1F3A5F"/>
                 </a:solidFill>
@@ -24236,7 +24215,7 @@
               </a:rPr>
               <a:t>Resource Server</a:t>
             </a:r>
-            <a:endParaRPr lang="en-US" sz="1400" dirty="0"/>
+            <a:endParaRPr lang="en-US" sz="1600" dirty="0"/>
           </a:p>
         </p:txBody>
       </p:sp>
@@ -24248,8 +24227,8 @@
         </p:nvSpPr>
         <p:spPr>
           <a:xfrm>
-            <a:off x="6400800" y="3767328"/>
-            <a:ext cx="4983480" cy="694944"/>
+            <a:off x="6419088" y="3840480"/>
+            <a:ext cx="4946904" cy="557784"/>
           </a:xfrm>
           <a:prstGeom prst="rect">
             <a:avLst/>
@@ -24263,12 +24242,12 @@
           <a:p>
             <a:pPr indent="0" marL="0">
               <a:spcAft>
-                <a:spcPts val="400"/>
+                <a:spcPts val="800"/>
               </a:spcAft>
               <a:buNone/>
             </a:pPr>
             <a:r>
-              <a:rPr lang="en-US" sz="1300" dirty="0">
+              <a:rPr lang="en-US" sz="1450" dirty="0">
                 <a:solidFill>
                   <a:srgbClr val="1D2733"/>
                 </a:solidFill>
@@ -24276,9 +24255,9 @@
                 <a:ea typeface="Arial" pitchFamily="34" charset="-122"/>
                 <a:cs typeface="Arial" pitchFamily="34" charset="-120"/>
               </a:rPr>
-              <a:t>Hosts the API and validates access tokens</a:t>
-            </a:r>
-            <a:endParaRPr lang="en-US" sz="1300" dirty="0"/>
+              <a:t>Hosts the API, validates tokens</a:t>
+            </a:r>
+            <a:endParaRPr lang="en-US" sz="1450" dirty="0"/>
           </a:p>
         </p:txBody>
       </p:sp>
@@ -24290,7 +24269,7 @@
         </p:nvSpPr>
         <p:spPr>
           <a:xfrm>
-            <a:off x="640080" y="4937760"/>
+            <a:off x="640080" y="4892040"/>
             <a:ext cx="10972800" cy="365760"/>
           </a:xfrm>
           <a:prstGeom prst="rect">
@@ -24315,7 +24294,7 @@
                 <a:ea typeface="Arial" pitchFamily="34" charset="-122"/>
                 <a:cs typeface="Arial" pitchFamily="34" charset="-120"/>
               </a:rPr>
-              <a:t>Identify them by asking: who owns the data, who wants access, who grants it, who serves the API?</a:t>
+              <a:t>Ask: who owns the data, who wants access, who grants it, who serves the API?</a:t>
             </a:r>
             <a:endParaRPr lang="en-US" sz="1350" dirty="0"/>
           </a:p>
@@ -24401,7 +24380,7 @@
         <p:spPr>
           <a:xfrm>
             <a:off x="640080" y="640080"/>
-            <a:ext cx="10972800" cy="777240"/>
+            <a:ext cx="10972800" cy="822960"/>
           </a:xfrm>
           <a:prstGeom prst="rect">
             <a:avLst/>
@@ -24417,7 +24396,7 @@
               <a:buNone/>
             </a:pPr>
             <a:r>
-              <a:rPr lang="en-US" sz="2600" b="1" dirty="0">
+              <a:rPr lang="en-US" sz="3000" b="1" dirty="0">
                 <a:solidFill>
                   <a:srgbClr val="1F3A5F"/>
                 </a:solidFill>
@@ -24427,7 +24406,7 @@
               </a:rPr>
               <a:t>Two endpoints, two channels</a:t>
             </a:r>
-            <a:endParaRPr lang="en-US" sz="2600" dirty="0"/>
+            <a:endParaRPr lang="en-US" sz="3000" dirty="0"/>
           </a:p>
         </p:txBody>
       </p:sp>
@@ -24536,7 +24515,7 @@
                 <a:gridCol w="4663440"/>
                 <a:gridCol w="3840480"/>
               </a:tblGrid>
-              <a:tr h="502920">
+              <a:tr h="548640">
                 <a:tc>
                   <a:txBody>
                     <a:bodyPr/>
@@ -24546,7 +24525,7 @@
                         <a:buNone/>
                       </a:pPr>
                       <a:r>
-                        <a:rPr lang="en-US" sz="1250" b="1" dirty="0">
+                        <a:rPr lang="en-US" sz="1300" b="1" dirty="0">
                           <a:solidFill>
                             <a:srgbClr val="FFFFFF"/>
                           </a:solidFill>
@@ -24556,7 +24535,7 @@
                         </a:rPr>
                         <a:t>Endpoint</a:t>
                       </a:r>
-                      <a:endParaRPr lang="en-US" sz="1250" dirty="0">
+                      <a:endParaRPr lang="en-US" sz="1300" dirty="0">
                         <a:latin typeface="Arial" charset="0"/>
                         <a:ea typeface="Arial" charset="0"/>
                         <a:cs typeface="Arial" charset="0"/>
@@ -24614,7 +24593,7 @@
                         <a:buNone/>
                       </a:pPr>
                       <a:r>
-                        <a:rPr lang="en-US" sz="1250" b="1" dirty="0">
+                        <a:rPr lang="en-US" sz="1300" b="1" dirty="0">
                           <a:solidFill>
                             <a:srgbClr val="FFFFFF"/>
                           </a:solidFill>
@@ -24624,7 +24603,7 @@
                         </a:rPr>
                         <a:t>Job</a:t>
                       </a:r>
-                      <a:endParaRPr lang="en-US" sz="1250" dirty="0">
+                      <a:endParaRPr lang="en-US" sz="1300" dirty="0">
                         <a:latin typeface="Arial" charset="0"/>
                         <a:ea typeface="Arial" charset="0"/>
                         <a:cs typeface="Arial" charset="0"/>
@@ -24682,7 +24661,7 @@
                         <a:buNone/>
                       </a:pPr>
                       <a:r>
-                        <a:rPr lang="en-US" sz="1250" b="1" dirty="0">
+                        <a:rPr lang="en-US" sz="1300" b="1" dirty="0">
                           <a:solidFill>
                             <a:srgbClr val="FFFFFF"/>
                           </a:solidFill>
@@ -24692,7 +24671,7 @@
                         </a:rPr>
                         <a:t>Channel</a:t>
                       </a:r>
-                      <a:endParaRPr lang="en-US" sz="1250" dirty="0">
+                      <a:endParaRPr lang="en-US" sz="1300" dirty="0">
                         <a:latin typeface="Arial" charset="0"/>
                         <a:ea typeface="Arial" charset="0"/>
                         <a:cs typeface="Arial" charset="0"/>
@@ -24742,7 +24721,7 @@
                   </a:tcPr>
                 </a:tc>
               </a:tr>
-              <a:tr h="502920">
+              <a:tr h="548640">
                 <a:tc>
                   <a:txBody>
                     <a:bodyPr/>
@@ -24752,7 +24731,7 @@
                         <a:buNone/>
                       </a:pPr>
                       <a:r>
-                        <a:rPr lang="en-US" sz="1200" dirty="0">
+                        <a:rPr lang="en-US" sz="1250" dirty="0">
                           <a:solidFill>
                             <a:srgbClr val="1D2733"/>
                           </a:solidFill>
@@ -24762,7 +24741,7 @@
                         </a:rPr>
                         <a:t>/authorize</a:t>
                       </a:r>
-                      <a:endParaRPr lang="en-US" sz="1200" dirty="0">
+                      <a:endParaRPr lang="en-US" sz="1250" dirty="0">
                         <a:latin typeface="Arial" charset="0"/>
                         <a:ea typeface="Arial" charset="0"/>
                         <a:cs typeface="Arial" charset="0"/>
@@ -24820,7 +24799,7 @@
                         <a:buNone/>
                       </a:pPr>
                       <a:r>
-                        <a:rPr lang="en-US" sz="1200" dirty="0">
+                        <a:rPr lang="en-US" sz="1250" dirty="0">
                           <a:solidFill>
                             <a:srgbClr val="1D2733"/>
                           </a:solidFill>
@@ -24828,9 +24807,9 @@
                           <a:ea typeface="Arial" pitchFamily="34" charset="-122"/>
                           <a:cs typeface="Arial" pitchFamily="34" charset="-120"/>
                         </a:rPr>
-                        <a:t>User logs in &amp; approves access</a:t>
+                        <a:t>User logs in &amp; approves</a:t>
                       </a:r>
-                      <a:endParaRPr lang="en-US" sz="1200" dirty="0">
+                      <a:endParaRPr lang="en-US" sz="1250" dirty="0">
                         <a:latin typeface="Arial" charset="0"/>
                         <a:ea typeface="Arial" charset="0"/>
                         <a:cs typeface="Arial" charset="0"/>
@@ -24888,7 +24867,7 @@
                         <a:buNone/>
                       </a:pPr>
                       <a:r>
-                        <a:rPr lang="en-US" sz="1200" dirty="0">
+                        <a:rPr lang="en-US" sz="1250" dirty="0">
                           <a:solidFill>
                             <a:srgbClr val="1D2733"/>
                           </a:solidFill>
@@ -24896,9 +24875,9 @@
                           <a:ea typeface="Arial" pitchFamily="34" charset="-122"/>
                           <a:cs typeface="Arial" pitchFamily="34" charset="-120"/>
                         </a:rPr>
-                        <a:t>Front-channel (browser) — more exposed</a:t>
+                        <a:t>Front-channel (browser) — exposed</a:t>
                       </a:r>
-                      <a:endParaRPr lang="en-US" sz="1200" dirty="0">
+                      <a:endParaRPr lang="en-US" sz="1250" dirty="0">
                         <a:latin typeface="Arial" charset="0"/>
                         <a:ea typeface="Arial" charset="0"/>
                         <a:cs typeface="Arial" charset="0"/>
@@ -24948,7 +24927,7 @@
                   </a:tcPr>
                 </a:tc>
               </a:tr>
-              <a:tr h="502920">
+              <a:tr h="548640">
                 <a:tc>
                   <a:txBody>
                     <a:bodyPr/>
@@ -24958,7 +24937,7 @@
                         <a:buNone/>
                       </a:pPr>
                       <a:r>
-                        <a:rPr lang="en-US" sz="1200" dirty="0">
+                        <a:rPr lang="en-US" sz="1250" dirty="0">
                           <a:solidFill>
                             <a:srgbClr val="1D2733"/>
                           </a:solidFill>
@@ -24968,7 +24947,7 @@
                         </a:rPr>
                         <a:t>/token</a:t>
                       </a:r>
-                      <a:endParaRPr lang="en-US" sz="1200" dirty="0">
+                      <a:endParaRPr lang="en-US" sz="1250" dirty="0">
                         <a:latin typeface="Arial" charset="0"/>
                         <a:ea typeface="Arial" charset="0"/>
                         <a:cs typeface="Arial" charset="0"/>
@@ -25026,7 +25005,7 @@
                         <a:buNone/>
                       </a:pPr>
                       <a:r>
-                        <a:rPr lang="en-US" sz="1200" dirty="0">
+                        <a:rPr lang="en-US" sz="1250" dirty="0">
                           <a:solidFill>
                             <a:srgbClr val="1D2733"/>
                           </a:solidFill>
@@ -25034,9 +25013,9 @@
                           <a:ea typeface="Arial" pitchFamily="34" charset="-122"/>
                           <a:cs typeface="Arial" pitchFamily="34" charset="-120"/>
                         </a:rPr>
-                        <a:t>Exchange a grant for an access token</a:t>
+                        <a:t>Exchange a grant for a token</a:t>
                       </a:r>
-                      <a:endParaRPr lang="en-US" sz="1200" dirty="0">
+                      <a:endParaRPr lang="en-US" sz="1250" dirty="0">
                         <a:latin typeface="Arial" charset="0"/>
                         <a:ea typeface="Arial" charset="0"/>
                         <a:cs typeface="Arial" charset="0"/>
@@ -25094,7 +25073,7 @@
                         <a:buNone/>
                       </a:pPr>
                       <a:r>
-                        <a:rPr lang="en-US" sz="1200" dirty="0">
+                        <a:rPr lang="en-US" sz="1250" dirty="0">
                           <a:solidFill>
                             <a:srgbClr val="1D2733"/>
                           </a:solidFill>
@@ -25102,9 +25081,9 @@
                           <a:ea typeface="Arial" pitchFamily="34" charset="-122"/>
                           <a:cs typeface="Arial" pitchFamily="34" charset="-120"/>
                         </a:rPr>
-                        <a:t>Back-channel (server-to-server) — protected</a:t>
+                        <a:t>Back-channel (server) — protected</a:t>
                       </a:r>
-                      <a:endParaRPr lang="en-US" sz="1200" dirty="0">
+                      <a:endParaRPr lang="en-US" sz="1250" dirty="0">
                         <a:latin typeface="Arial" charset="0"/>
                         <a:ea typeface="Arial" charset="0"/>
                         <a:cs typeface="Arial" charset="0"/>
@@ -25166,8 +25145,8 @@
         </p:nvSpPr>
         <p:spPr>
           <a:xfrm>
-            <a:off x="640080" y="3566160"/>
-            <a:ext cx="10972800" cy="365760"/>
+            <a:off x="640080" y="3657600"/>
+            <a:ext cx="10972800" cy="457200"/>
           </a:xfrm>
           <a:prstGeom prst="rect">
             <a:avLst/>
@@ -25183,7 +25162,7 @@
               <a:buNone/>
             </a:pPr>
             <a:r>
-              <a:rPr lang="en-US" sz="1400" b="1" dirty="0">
+              <a:rPr lang="en-US" sz="1600" b="1" dirty="0">
                 <a:solidFill>
                   <a:srgbClr val="1F3A5F"/>
                 </a:solidFill>
@@ -25191,9 +25170,9 @@
                 <a:ea typeface="Arial" pitchFamily="34" charset="-122"/>
                 <a:cs typeface="Arial" pitchFamily="34" charset="-120"/>
               </a:rPr>
-              <a:t>Front-channel vs back-channel is the idea behind every later security control.</a:t>
-            </a:r>
-            <a:endParaRPr lang="en-US" sz="1400" dirty="0"/>
+              <a:t>Front-channel vs back-channel is the idea behind every later control.</a:t>
+            </a:r>
+            <a:endParaRPr lang="en-US" sz="1600" dirty="0"/>
           </a:p>
         </p:txBody>
       </p:sp>
@@ -25205,12 +25184,12 @@
         </p:nvSpPr>
         <p:spPr>
           <a:xfrm>
-            <a:off x="640080" y="4114800"/>
-            <a:ext cx="10881360" cy="1371600"/>
+            <a:off x="640080" y="4206240"/>
+            <a:ext cx="10881360" cy="1280160"/>
           </a:xfrm>
           <a:prstGeom prst="roundRect">
             <a:avLst>
-              <a:gd name="adj" fmla="val 4000"/>
+              <a:gd name="adj" fmla="val 4286"/>
             </a:avLst>
           </a:prstGeom>
           <a:solidFill>
@@ -25239,8 +25218,8 @@
         </p:nvSpPr>
         <p:spPr>
           <a:xfrm>
-            <a:off x="822960" y="4261104"/>
-            <a:ext cx="10515600" cy="310896"/>
+            <a:off x="841248" y="4370832"/>
+            <a:ext cx="10479024" cy="347472"/>
           </a:xfrm>
           <a:prstGeom prst="rect">
             <a:avLst/>
@@ -25256,7 +25235,7 @@
               <a:buNone/>
             </a:pPr>
             <a:r>
-              <a:rPr lang="en-US" sz="1400" b="1" dirty="0">
+              <a:rPr lang="en-US" sz="1600" b="1" dirty="0">
                 <a:solidFill>
                   <a:srgbClr val="1F3A5F"/>
                 </a:solidFill>
@@ -25264,9 +25243,9 @@
                 <a:ea typeface="Arial" pitchFamily="34" charset="-122"/>
                 <a:cs typeface="Arial" pitchFamily="34" charset="-120"/>
               </a:rPr>
-              <a:t>Also: the access token</a:t>
-            </a:r>
-            <a:endParaRPr lang="en-US" sz="1400" dirty="0"/>
+              <a:t>The access token</a:t>
+            </a:r>
+            <a:endParaRPr lang="en-US" sz="1600" dirty="0"/>
           </a:p>
         </p:txBody>
       </p:sp>
@@ -25278,8 +25257,8 @@
         </p:nvSpPr>
         <p:spPr>
           <a:xfrm>
-            <a:off x="822960" y="4681728"/>
-            <a:ext cx="10515600" cy="694944"/>
+            <a:off x="841248" y="4846320"/>
+            <a:ext cx="10479024" cy="512064"/>
           </a:xfrm>
           <a:prstGeom prst="rect">
             <a:avLst/>
@@ -25293,12 +25272,12 @@
           <a:p>
             <a:pPr indent="0" marL="0">
               <a:spcAft>
-                <a:spcPts val="400"/>
+                <a:spcPts val="800"/>
               </a:spcAft>
               <a:buNone/>
             </a:pPr>
             <a:r>
-              <a:rPr lang="en-US" sz="1300" dirty="0">
+              <a:rPr lang="en-US" sz="1450" dirty="0">
                 <a:solidFill>
                   <a:srgbClr val="1D2733"/>
                 </a:solidFill>
@@ -25306,9 +25285,9 @@
                 <a:ea typeface="Arial" pitchFamily="34" charset="-122"/>
                 <a:cs typeface="Arial" pitchFamily="34" charset="-120"/>
               </a:rPr>
-              <a:t>Represents permission, not the user's password · scoped, expiring, revocable · checked by the resource server on every call.</a:t>
-            </a:r>
-            <a:endParaRPr lang="en-US" sz="1300" dirty="0"/>
+              <a:t>Permission, not a password · scoped · expiring · revocable · checked on every call.</a:t>
+            </a:r>
+            <a:endParaRPr lang="en-US" sz="1450" dirty="0"/>
           </a:p>
         </p:txBody>
       </p:sp>
@@ -25392,7 +25371,7 @@
         <p:spPr>
           <a:xfrm>
             <a:off x="640080" y="640080"/>
-            <a:ext cx="10972800" cy="777240"/>
+            <a:ext cx="10972800" cy="822960"/>
           </a:xfrm>
           <a:prstGeom prst="rect">
             <a:avLst/>
@@ -25408,7 +25387,7 @@
               <a:buNone/>
             </a:pPr>
             <a:r>
-              <a:rPr lang="en-US" sz="2600" b="1" dirty="0">
+              <a:rPr lang="en-US" sz="3000" b="1" dirty="0">
                 <a:solidFill>
                   <a:srgbClr val="1F3A5F"/>
                 </a:solidFill>
@@ -25418,7 +25397,7 @@
               </a:rPr>
               <a:t>OAuth vs OpenID Connect</a:t>
             </a:r>
-            <a:endParaRPr lang="en-US" sz="2600" dirty="0"/>
+            <a:endParaRPr lang="en-US" sz="3000" dirty="0"/>
           </a:p>
         </p:txBody>
       </p:sp>
@@ -25527,7 +25506,7 @@
                 <a:gridCol w="4434840"/>
                 <a:gridCol w="4434840"/>
               </a:tblGrid>
-              <a:tr h="457200">
+              <a:tr h="502920">
                 <a:tc>
                   <a:txBody>
                     <a:bodyPr/>
@@ -25536,7 +25515,7 @@
                       <a:pPr algn="l" indent="0" marL="0">
                         <a:buNone/>
                       </a:pPr>
-                      <a:endParaRPr lang="en-US" sz="1250" dirty="0">
+                      <a:endParaRPr lang="en-US" sz="1300" dirty="0">
                         <a:latin typeface="Arial" charset="0"/>
                         <a:ea typeface="Arial" charset="0"/>
                         <a:cs typeface="Arial" charset="0"/>
@@ -25594,7 +25573,7 @@
                         <a:buNone/>
                       </a:pPr>
                       <a:r>
-                        <a:rPr lang="en-US" sz="1250" b="1" dirty="0">
+                        <a:rPr lang="en-US" sz="1300" b="1" dirty="0">
                           <a:solidFill>
                             <a:srgbClr val="FFFFFF"/>
                           </a:solidFill>
@@ -25604,7 +25583,7 @@
                         </a:rPr>
                         <a:t>OAuth 2.0</a:t>
                       </a:r>
-                      <a:endParaRPr lang="en-US" sz="1250" dirty="0">
+                      <a:endParaRPr lang="en-US" sz="1300" dirty="0">
                         <a:latin typeface="Arial" charset="0"/>
                         <a:ea typeface="Arial" charset="0"/>
                         <a:cs typeface="Arial" charset="0"/>
@@ -25662,7 +25641,7 @@
                         <a:buNone/>
                       </a:pPr>
                       <a:r>
-                        <a:rPr lang="en-US" sz="1250" b="1" dirty="0">
+                        <a:rPr lang="en-US" sz="1300" b="1" dirty="0">
                           <a:solidFill>
                             <a:srgbClr val="FFFFFF"/>
                           </a:solidFill>
@@ -25672,7 +25651,7 @@
                         </a:rPr>
                         <a:t>OpenID Connect</a:t>
                       </a:r>
-                      <a:endParaRPr lang="en-US" sz="1250" dirty="0">
+                      <a:endParaRPr lang="en-US" sz="1300" dirty="0">
                         <a:latin typeface="Arial" charset="0"/>
                         <a:ea typeface="Arial" charset="0"/>
                         <a:cs typeface="Arial" charset="0"/>
@@ -25722,7 +25701,7 @@
                   </a:tcPr>
                 </a:tc>
               </a:tr>
-              <a:tr h="457200">
+              <a:tr h="502920">
                 <a:tc>
                   <a:txBody>
                     <a:bodyPr/>
@@ -25732,7 +25711,7 @@
                         <a:buNone/>
                       </a:pPr>
                       <a:r>
-                        <a:rPr lang="en-US" sz="1200" dirty="0">
+                        <a:rPr lang="en-US" sz="1250" dirty="0">
                           <a:solidFill>
                             <a:srgbClr val="1D2733"/>
                           </a:solidFill>
@@ -25742,7 +25721,7 @@
                         </a:rPr>
                         <a:t>Purpose</a:t>
                       </a:r>
-                      <a:endParaRPr lang="en-US" sz="1200" dirty="0">
+                      <a:endParaRPr lang="en-US" sz="1250" dirty="0">
                         <a:latin typeface="Arial" charset="0"/>
                         <a:ea typeface="Arial" charset="0"/>
                         <a:cs typeface="Arial" charset="0"/>
@@ -25800,7 +25779,7 @@
                         <a:buNone/>
                       </a:pPr>
                       <a:r>
-                        <a:rPr lang="en-US" sz="1200" dirty="0">
+                        <a:rPr lang="en-US" sz="1250" dirty="0">
                           <a:solidFill>
                             <a:srgbClr val="1D2733"/>
                           </a:solidFill>
@@ -25810,7 +25789,7 @@
                         </a:rPr>
                         <a:t>Authorization</a:t>
                       </a:r>
-                      <a:endParaRPr lang="en-US" sz="1200" dirty="0">
+                      <a:endParaRPr lang="en-US" sz="1250" dirty="0">
                         <a:latin typeface="Arial" charset="0"/>
                         <a:ea typeface="Arial" charset="0"/>
                         <a:cs typeface="Arial" charset="0"/>
@@ -25868,7 +25847,7 @@
                         <a:buNone/>
                       </a:pPr>
                       <a:r>
-                        <a:rPr lang="en-US" sz="1200" dirty="0">
+                        <a:rPr lang="en-US" sz="1250" dirty="0">
                           <a:solidFill>
                             <a:srgbClr val="1D2733"/>
                           </a:solidFill>
@@ -25878,7 +25857,7 @@
                         </a:rPr>
                         <a:t>Authentication</a:t>
                       </a:r>
-                      <a:endParaRPr lang="en-US" sz="1200" dirty="0">
+                      <a:endParaRPr lang="en-US" sz="1250" dirty="0">
                         <a:latin typeface="Arial" charset="0"/>
                         <a:ea typeface="Arial" charset="0"/>
                         <a:cs typeface="Arial" charset="0"/>
@@ -25928,7 +25907,7 @@
                   </a:tcPr>
                 </a:tc>
               </a:tr>
-              <a:tr h="457200">
+              <a:tr h="502920">
                 <a:tc>
                   <a:txBody>
                     <a:bodyPr/>
@@ -25938,7 +25917,7 @@
                         <a:buNone/>
                       </a:pPr>
                       <a:r>
-                        <a:rPr lang="en-US" sz="1200" dirty="0">
+                        <a:rPr lang="en-US" sz="1250" dirty="0">
                           <a:solidFill>
                             <a:srgbClr val="1D2733"/>
                           </a:solidFill>
@@ -25948,7 +25927,7 @@
                         </a:rPr>
                         <a:t>Question</a:t>
                       </a:r>
-                      <a:endParaRPr lang="en-US" sz="1200" dirty="0">
+                      <a:endParaRPr lang="en-US" sz="1250" dirty="0">
                         <a:latin typeface="Arial" charset="0"/>
                         <a:ea typeface="Arial" charset="0"/>
                         <a:cs typeface="Arial" charset="0"/>
@@ -26006,7 +25985,7 @@
                         <a:buNone/>
                       </a:pPr>
                       <a:r>
-                        <a:rPr lang="en-US" sz="1200" dirty="0">
+                        <a:rPr lang="en-US" sz="1250" dirty="0">
                           <a:solidFill>
                             <a:srgbClr val="1D2733"/>
                           </a:solidFill>
@@ -26016,7 +25995,7 @@
                         </a:rPr>
                         <a:t>What can this client access?</a:t>
                       </a:r>
-                      <a:endParaRPr lang="en-US" sz="1200" dirty="0">
+                      <a:endParaRPr lang="en-US" sz="1250" dirty="0">
                         <a:latin typeface="Arial" charset="0"/>
                         <a:ea typeface="Arial" charset="0"/>
                         <a:cs typeface="Arial" charset="0"/>
@@ -26074,7 +26053,7 @@
                         <a:buNone/>
                       </a:pPr>
                       <a:r>
-                        <a:rPr lang="en-US" sz="1200" dirty="0">
+                        <a:rPr lang="en-US" sz="1250" dirty="0">
                           <a:solidFill>
                             <a:srgbClr val="1D2733"/>
                           </a:solidFill>
@@ -26084,7 +26063,7 @@
                         </a:rPr>
                         <a:t>Who is the user?</a:t>
                       </a:r>
-                      <a:endParaRPr lang="en-US" sz="1200" dirty="0">
+                      <a:endParaRPr lang="en-US" sz="1250" dirty="0">
                         <a:latin typeface="Arial" charset="0"/>
                         <a:ea typeface="Arial" charset="0"/>
                         <a:cs typeface="Arial" charset="0"/>
@@ -26134,7 +26113,7 @@
                   </a:tcPr>
                 </a:tc>
               </a:tr>
-              <a:tr h="457200">
+              <a:tr h="502920">
                 <a:tc>
                   <a:txBody>
                     <a:bodyPr/>
@@ -26144,7 +26123,7 @@
                         <a:buNone/>
                       </a:pPr>
                       <a:r>
-                        <a:rPr lang="en-US" sz="1200" dirty="0">
+                        <a:rPr lang="en-US" sz="1250" dirty="0">
                           <a:solidFill>
                             <a:srgbClr val="1D2733"/>
                           </a:solidFill>
@@ -26154,7 +26133,7 @@
                         </a:rPr>
                         <a:t>Main token</a:t>
                       </a:r>
-                      <a:endParaRPr lang="en-US" sz="1200" dirty="0">
+                      <a:endParaRPr lang="en-US" sz="1250" dirty="0">
                         <a:latin typeface="Arial" charset="0"/>
                         <a:ea typeface="Arial" charset="0"/>
                         <a:cs typeface="Arial" charset="0"/>
@@ -26212,7 +26191,7 @@
                         <a:buNone/>
                       </a:pPr>
                       <a:r>
-                        <a:rPr lang="en-US" sz="1200" dirty="0">
+                        <a:rPr lang="en-US" sz="1250" dirty="0">
                           <a:solidFill>
                             <a:srgbClr val="1D2733"/>
                           </a:solidFill>
@@ -26222,7 +26201,7 @@
                         </a:rPr>
                         <a:t>Access token</a:t>
                       </a:r>
-                      <a:endParaRPr lang="en-US" sz="1200" dirty="0">
+                      <a:endParaRPr lang="en-US" sz="1250" dirty="0">
                         <a:latin typeface="Arial" charset="0"/>
                         <a:ea typeface="Arial" charset="0"/>
                         <a:cs typeface="Arial" charset="0"/>
@@ -26280,7 +26259,7 @@
                         <a:buNone/>
                       </a:pPr>
                       <a:r>
-                        <a:rPr lang="en-US" sz="1200" dirty="0">
+                        <a:rPr lang="en-US" sz="1250" dirty="0">
                           <a:solidFill>
                             <a:srgbClr val="1D2733"/>
                           </a:solidFill>
@@ -26290,7 +26269,7 @@
                         </a:rPr>
                         <a:t>ID token</a:t>
                       </a:r>
-                      <a:endParaRPr lang="en-US" sz="1200" dirty="0">
+                      <a:endParaRPr lang="en-US" sz="1250" dirty="0">
                         <a:latin typeface="Arial" charset="0"/>
                         <a:ea typeface="Arial" charset="0"/>
                         <a:cs typeface="Arial" charset="0"/>
@@ -26340,7 +26319,7 @@
                   </a:tcPr>
                 </a:tc>
               </a:tr>
-              <a:tr h="457200">
+              <a:tr h="502920">
                 <a:tc>
                   <a:txBody>
                     <a:bodyPr/>
@@ -26350,7 +26329,7 @@
                         <a:buNone/>
                       </a:pPr>
                       <a:r>
-                        <a:rPr lang="en-US" sz="1200" dirty="0">
+                        <a:rPr lang="en-US" sz="1250" dirty="0">
                           <a:solidFill>
                             <a:srgbClr val="1D2733"/>
                           </a:solidFill>
@@ -26360,7 +26339,7 @@
                         </a:rPr>
                         <a:t>Example</a:t>
                       </a:r>
-                      <a:endParaRPr lang="en-US" sz="1200" dirty="0">
+                      <a:endParaRPr lang="en-US" sz="1250" dirty="0">
                         <a:latin typeface="Arial" charset="0"/>
                         <a:ea typeface="Arial" charset="0"/>
                         <a:cs typeface="Arial" charset="0"/>
@@ -26418,7 +26397,7 @@
                         <a:buNone/>
                       </a:pPr>
                       <a:r>
-                        <a:rPr lang="en-US" sz="1200" dirty="0">
+                        <a:rPr lang="en-US" sz="1250" dirty="0">
                           <a:solidFill>
                             <a:srgbClr val="1D2733"/>
                           </a:solidFill>
@@ -26426,9 +26405,9 @@
                           <a:ea typeface="Arial" pitchFamily="34" charset="-122"/>
                           <a:cs typeface="Arial" pitchFamily="34" charset="-120"/>
                         </a:rPr>
-                        <a:t>Connect GitHub repos / Drive files</a:t>
+                        <a:t>Connect GitHub / Drive</a:t>
                       </a:r>
-                      <a:endParaRPr lang="en-US" sz="1200" dirty="0">
+                      <a:endParaRPr lang="en-US" sz="1250" dirty="0">
                         <a:latin typeface="Arial" charset="0"/>
                         <a:ea typeface="Arial" charset="0"/>
                         <a:cs typeface="Arial" charset="0"/>
@@ -26486,7 +26465,7 @@
                         <a:buNone/>
                       </a:pPr>
                       <a:r>
-                        <a:rPr lang="en-US" sz="1200" dirty="0">
+                        <a:rPr lang="en-US" sz="1250" dirty="0">
                           <a:solidFill>
                             <a:srgbClr val="1D2733"/>
                           </a:solidFill>
@@ -26496,7 +26475,7 @@
                         </a:rPr>
                         <a:t>“Log in with Google”</a:t>
                       </a:r>
-                      <a:endParaRPr lang="en-US" sz="1200" dirty="0">
+                      <a:endParaRPr lang="en-US" sz="1250" dirty="0">
                         <a:latin typeface="Arial" charset="0"/>
                         <a:ea typeface="Arial" charset="0"/>
                         <a:cs typeface="Arial" charset="0"/>
@@ -26558,8 +26537,8 @@
         </p:nvSpPr>
         <p:spPr>
           <a:xfrm>
-            <a:off x="640080" y="4846320"/>
-            <a:ext cx="10972800" cy="365760"/>
+            <a:off x="640080" y="4937760"/>
+            <a:ext cx="10972800" cy="457200"/>
           </a:xfrm>
           <a:prstGeom prst="rect">
             <a:avLst/>
@@ -26575,7 +26554,7 @@
               <a:buNone/>
             </a:pPr>
             <a:r>
-              <a:rPr lang="en-US" sz="1450" b="1" dirty="0">
+              <a:rPr lang="en-US" sz="1600" b="1" dirty="0">
                 <a:solidFill>
                   <a:srgbClr val="1F3A5F"/>
                 </a:solidFill>
@@ -26583,9 +26562,9 @@
                 <a:ea typeface="Arial" pitchFamily="34" charset="-122"/>
                 <a:cs typeface="Arial" pitchFamily="34" charset="-120"/>
               </a:rPr>
-              <a:t>Wants to call an API → OAuth. Wants to know who you are → OpenID Connect.</a:t>
-            </a:r>
-            <a:endParaRPr lang="en-US" sz="1450" dirty="0"/>
+              <a:t>Call an API → OAuth. Know who you are → OpenID Connect.</a:t>
+            </a:r>
+            <a:endParaRPr lang="en-US" sz="1600" dirty="0"/>
           </a:p>
         </p:txBody>
       </p:sp>
